--- a/exports/pptx/lessons/middle-module-06-moon-phases-tithi/day-04-tithi-calendar.pptx
+++ b/exports/pptx/lessons/middle-module-06-moon-phases-tithi/day-04-tithi-calendar.pptx
@@ -18,9 +18,17 @@
     <p:sldId id="266" r:id="rId12"/>
     <p:sldId id="267" r:id="rId13"/>
     <p:sldId id="268" r:id="rId14"/>
+    <p:sldId id="269" r:id="rId15"/>
+    <p:sldId id="270" r:id="rId16"/>
+    <p:sldId id="271" r:id="rId17"/>
+    <p:sldId id="272" r:id="rId18"/>
+    <p:sldId id="273" r:id="rId19"/>
+    <p:sldId id="274" r:id="rId20"/>
+    <p:sldId id="275" r:id="rId21"/>
+    <p:sldId id="276" r:id="rId22"/>
   </p:sldIdLst>
   <p:notesMasterIdLst>
-    <p:notesMasterId r:id="rId15"/>
+    <p:notesMasterId r:id="rId23"/>
   </p:notesMasterIdLst>
   <p:sldSz cx="9144000" cy="5143500"/>
   <p:notesSz cx="5143500" cy="9144000"/>
@@ -908,6 +916,534 @@
 </p:notes>
 </file>
 
+<file path=ppt/notesSlides/notesSlide14.xml><?xml version="1.0" encoding="utf-8"?>
+<p:notes xmlns:a="http://schemas.openxmlformats.org/drawingml/2006/main" xmlns:r="http://schemas.openxmlformats.org/officeDocument/2006/relationships" xmlns:p="http://schemas.openxmlformats.org/presentationml/2006/main">
+  <p:cSld>
+    <p:spTree>
+      <p:nvGrpSpPr>
+        <p:cNvPr id="1" name=""/>
+        <p:cNvGrpSpPr/>
+        <p:nvPr/>
+      </p:nvGrpSpPr>
+      <p:grpSpPr>
+        <a:xfrm>
+          <a:off x="0" y="0"/>
+          <a:ext cx="0" cy="0"/>
+          <a:chOff x="0" y="0"/>
+          <a:chExt cx="0" cy="0"/>
+        </a:xfrm>
+      </p:grpSpPr>
+      <p:sp>
+        <p:nvSpPr>
+          <p:cNvPr id="2" name="Slide Image Placeholder 1"/>
+          <p:cNvSpPr>
+            <a:spLocks noGrp="1" noRot="1" noChangeAspect="1"/>
+          </p:cNvSpPr>
+          <p:nvPr>
+            <p:ph type="sldImg"/>
+          </p:nvPr>
+        </p:nvSpPr>
+        <p:spPr/>
+      </p:sp>
+      <p:sp>
+        <p:nvSpPr>
+          <p:cNvPr id="3" name="Notes Placeholder 2"/>
+          <p:cNvSpPr>
+            <a:spLocks noGrp="1"/>
+          </p:cNvSpPr>
+          <p:nvPr>
+            <p:ph type="body" idx="1"/>
+          </p:nvPr>
+        </p:nvSpPr>
+        <p:spPr/>
+        <p:txBody>
+          <a:bodyPr/>
+          <a:lstStyle/>
+          <a:p>
+            <a:r>
+              <a:rPr lang="en-US" dirty="0"/>
+              <a:t/>
+            </a:r>
+            <a:endParaRPr lang="en-US" dirty="0"/>
+          </a:p>
+        </p:txBody>
+      </p:sp>
+      <p:sp>
+        <p:nvSpPr>
+          <p:cNvPr id="4" name="Slide Number Placeholder 3"/>
+          <p:cNvSpPr>
+            <a:spLocks noGrp="1"/>
+          </p:cNvSpPr>
+          <p:nvPr>
+            <p:ph type="sldNum" sz="quarter" idx="10"/>
+          </p:nvPr>
+        </p:nvSpPr>
+        <p:spPr/>
+        <p:txBody>
+          <a:bodyPr/>
+          <a:lstStyle/>
+          <a:p>
+            <a:fld id="{F7021451-1387-4CA6-816F-3879F97B5CBC}" type="slidenum">
+              <a:rPr lang="en-US"/>
+              <a:t>14</a:t>
+            </a:fld>
+            <a:endParaRPr lang="en-US"/>
+          </a:p>
+        </p:txBody>
+      </p:sp>
+    </p:spTree>
+    <p:extLst>
+      <p:ext uri="{BB962C8B-B14F-4D97-AF65-F5344CB8AC3E}">
+        <p14:creationId xmlns:p14="http://schemas.microsoft.com/office/powerpoint/2010/main" val="1024086991"/>
+      </p:ext>
+    </p:extLst>
+  </p:cSld>
+  <p:clrMapOvr>
+    <a:masterClrMapping/>
+  </p:clrMapOvr>
+</p:notes>
+</file>
+
+<file path=ppt/notesSlides/notesSlide15.xml><?xml version="1.0" encoding="utf-8"?>
+<p:notes xmlns:a="http://schemas.openxmlformats.org/drawingml/2006/main" xmlns:r="http://schemas.openxmlformats.org/officeDocument/2006/relationships" xmlns:p="http://schemas.openxmlformats.org/presentationml/2006/main">
+  <p:cSld>
+    <p:spTree>
+      <p:nvGrpSpPr>
+        <p:cNvPr id="1" name=""/>
+        <p:cNvGrpSpPr/>
+        <p:nvPr/>
+      </p:nvGrpSpPr>
+      <p:grpSpPr>
+        <a:xfrm>
+          <a:off x="0" y="0"/>
+          <a:ext cx="0" cy="0"/>
+          <a:chOff x="0" y="0"/>
+          <a:chExt cx="0" cy="0"/>
+        </a:xfrm>
+      </p:grpSpPr>
+      <p:sp>
+        <p:nvSpPr>
+          <p:cNvPr id="2" name="Slide Image Placeholder 1"/>
+          <p:cNvSpPr>
+            <a:spLocks noGrp="1" noRot="1" noChangeAspect="1"/>
+          </p:cNvSpPr>
+          <p:nvPr>
+            <p:ph type="sldImg"/>
+          </p:nvPr>
+        </p:nvSpPr>
+        <p:spPr/>
+      </p:sp>
+      <p:sp>
+        <p:nvSpPr>
+          <p:cNvPr id="3" name="Notes Placeholder 2"/>
+          <p:cNvSpPr>
+            <a:spLocks noGrp="1"/>
+          </p:cNvSpPr>
+          <p:nvPr>
+            <p:ph type="body" idx="1"/>
+          </p:nvPr>
+        </p:nvSpPr>
+        <p:spPr/>
+        <p:txBody>
+          <a:bodyPr/>
+          <a:lstStyle/>
+          <a:p>
+            <a:r>
+              <a:rPr lang="en-US" dirty="0"/>
+              <a:t/>
+            </a:r>
+            <a:endParaRPr lang="en-US" dirty="0"/>
+          </a:p>
+        </p:txBody>
+      </p:sp>
+      <p:sp>
+        <p:nvSpPr>
+          <p:cNvPr id="4" name="Slide Number Placeholder 3"/>
+          <p:cNvSpPr>
+            <a:spLocks noGrp="1"/>
+          </p:cNvSpPr>
+          <p:nvPr>
+            <p:ph type="sldNum" sz="quarter" idx="10"/>
+          </p:nvPr>
+        </p:nvSpPr>
+        <p:spPr/>
+        <p:txBody>
+          <a:bodyPr/>
+          <a:lstStyle/>
+          <a:p>
+            <a:fld id="{F7021451-1387-4CA6-816F-3879F97B5CBC}" type="slidenum">
+              <a:rPr lang="en-US"/>
+              <a:t>15</a:t>
+            </a:fld>
+            <a:endParaRPr lang="en-US"/>
+          </a:p>
+        </p:txBody>
+      </p:sp>
+    </p:spTree>
+    <p:extLst>
+      <p:ext uri="{BB962C8B-B14F-4D97-AF65-F5344CB8AC3E}">
+        <p14:creationId xmlns:p14="http://schemas.microsoft.com/office/powerpoint/2010/main" val="1024086991"/>
+      </p:ext>
+    </p:extLst>
+  </p:cSld>
+  <p:clrMapOvr>
+    <a:masterClrMapping/>
+  </p:clrMapOvr>
+</p:notes>
+</file>
+
+<file path=ppt/notesSlides/notesSlide16.xml><?xml version="1.0" encoding="utf-8"?>
+<p:notes xmlns:a="http://schemas.openxmlformats.org/drawingml/2006/main" xmlns:r="http://schemas.openxmlformats.org/officeDocument/2006/relationships" xmlns:p="http://schemas.openxmlformats.org/presentationml/2006/main">
+  <p:cSld>
+    <p:spTree>
+      <p:nvGrpSpPr>
+        <p:cNvPr id="1" name=""/>
+        <p:cNvGrpSpPr/>
+        <p:nvPr/>
+      </p:nvGrpSpPr>
+      <p:grpSpPr>
+        <a:xfrm>
+          <a:off x="0" y="0"/>
+          <a:ext cx="0" cy="0"/>
+          <a:chOff x="0" y="0"/>
+          <a:chExt cx="0" cy="0"/>
+        </a:xfrm>
+      </p:grpSpPr>
+      <p:sp>
+        <p:nvSpPr>
+          <p:cNvPr id="2" name="Slide Image Placeholder 1"/>
+          <p:cNvSpPr>
+            <a:spLocks noGrp="1" noRot="1" noChangeAspect="1"/>
+          </p:cNvSpPr>
+          <p:nvPr>
+            <p:ph type="sldImg"/>
+          </p:nvPr>
+        </p:nvSpPr>
+        <p:spPr/>
+      </p:sp>
+      <p:sp>
+        <p:nvSpPr>
+          <p:cNvPr id="3" name="Notes Placeholder 2"/>
+          <p:cNvSpPr>
+            <a:spLocks noGrp="1"/>
+          </p:cNvSpPr>
+          <p:nvPr>
+            <p:ph type="body" idx="1"/>
+          </p:nvPr>
+        </p:nvSpPr>
+        <p:spPr/>
+        <p:txBody>
+          <a:bodyPr/>
+          <a:lstStyle/>
+          <a:p>
+            <a:r>
+              <a:rPr lang="en-US" dirty="0"/>
+              <a:t/>
+            </a:r>
+            <a:endParaRPr lang="en-US" dirty="0"/>
+          </a:p>
+        </p:txBody>
+      </p:sp>
+      <p:sp>
+        <p:nvSpPr>
+          <p:cNvPr id="4" name="Slide Number Placeholder 3"/>
+          <p:cNvSpPr>
+            <a:spLocks noGrp="1"/>
+          </p:cNvSpPr>
+          <p:nvPr>
+            <p:ph type="sldNum" sz="quarter" idx="10"/>
+          </p:nvPr>
+        </p:nvSpPr>
+        <p:spPr/>
+        <p:txBody>
+          <a:bodyPr/>
+          <a:lstStyle/>
+          <a:p>
+            <a:fld id="{F7021451-1387-4CA6-816F-3879F97B5CBC}" type="slidenum">
+              <a:rPr lang="en-US"/>
+              <a:t>16</a:t>
+            </a:fld>
+            <a:endParaRPr lang="en-US"/>
+          </a:p>
+        </p:txBody>
+      </p:sp>
+    </p:spTree>
+    <p:extLst>
+      <p:ext uri="{BB962C8B-B14F-4D97-AF65-F5344CB8AC3E}">
+        <p14:creationId xmlns:p14="http://schemas.microsoft.com/office/powerpoint/2010/main" val="1024086991"/>
+      </p:ext>
+    </p:extLst>
+  </p:cSld>
+  <p:clrMapOvr>
+    <a:masterClrMapping/>
+  </p:clrMapOvr>
+</p:notes>
+</file>
+
+<file path=ppt/notesSlides/notesSlide17.xml><?xml version="1.0" encoding="utf-8"?>
+<p:notes xmlns:a="http://schemas.openxmlformats.org/drawingml/2006/main" xmlns:r="http://schemas.openxmlformats.org/officeDocument/2006/relationships" xmlns:p="http://schemas.openxmlformats.org/presentationml/2006/main">
+  <p:cSld>
+    <p:spTree>
+      <p:nvGrpSpPr>
+        <p:cNvPr id="1" name=""/>
+        <p:cNvGrpSpPr/>
+        <p:nvPr/>
+      </p:nvGrpSpPr>
+      <p:grpSpPr>
+        <a:xfrm>
+          <a:off x="0" y="0"/>
+          <a:ext cx="0" cy="0"/>
+          <a:chOff x="0" y="0"/>
+          <a:chExt cx="0" cy="0"/>
+        </a:xfrm>
+      </p:grpSpPr>
+      <p:sp>
+        <p:nvSpPr>
+          <p:cNvPr id="2" name="Slide Image Placeholder 1"/>
+          <p:cNvSpPr>
+            <a:spLocks noGrp="1" noRot="1" noChangeAspect="1"/>
+          </p:cNvSpPr>
+          <p:nvPr>
+            <p:ph type="sldImg"/>
+          </p:nvPr>
+        </p:nvSpPr>
+        <p:spPr/>
+      </p:sp>
+      <p:sp>
+        <p:nvSpPr>
+          <p:cNvPr id="3" name="Notes Placeholder 2"/>
+          <p:cNvSpPr>
+            <a:spLocks noGrp="1"/>
+          </p:cNvSpPr>
+          <p:nvPr>
+            <p:ph type="body" idx="1"/>
+          </p:nvPr>
+        </p:nvSpPr>
+        <p:spPr/>
+        <p:txBody>
+          <a:bodyPr/>
+          <a:lstStyle/>
+          <a:p>
+            <a:r>
+              <a:rPr lang="en-US" dirty="0"/>
+              <a:t/>
+            </a:r>
+            <a:endParaRPr lang="en-US" dirty="0"/>
+          </a:p>
+        </p:txBody>
+      </p:sp>
+      <p:sp>
+        <p:nvSpPr>
+          <p:cNvPr id="4" name="Slide Number Placeholder 3"/>
+          <p:cNvSpPr>
+            <a:spLocks noGrp="1"/>
+          </p:cNvSpPr>
+          <p:nvPr>
+            <p:ph type="sldNum" sz="quarter" idx="10"/>
+          </p:nvPr>
+        </p:nvSpPr>
+        <p:spPr/>
+        <p:txBody>
+          <a:bodyPr/>
+          <a:lstStyle/>
+          <a:p>
+            <a:fld id="{F7021451-1387-4CA6-816F-3879F97B5CBC}" type="slidenum">
+              <a:rPr lang="en-US"/>
+              <a:t>17</a:t>
+            </a:fld>
+            <a:endParaRPr lang="en-US"/>
+          </a:p>
+        </p:txBody>
+      </p:sp>
+    </p:spTree>
+    <p:extLst>
+      <p:ext uri="{BB962C8B-B14F-4D97-AF65-F5344CB8AC3E}">
+        <p14:creationId xmlns:p14="http://schemas.microsoft.com/office/powerpoint/2010/main" val="1024086991"/>
+      </p:ext>
+    </p:extLst>
+  </p:cSld>
+  <p:clrMapOvr>
+    <a:masterClrMapping/>
+  </p:clrMapOvr>
+</p:notes>
+</file>
+
+<file path=ppt/notesSlides/notesSlide18.xml><?xml version="1.0" encoding="utf-8"?>
+<p:notes xmlns:a="http://schemas.openxmlformats.org/drawingml/2006/main" xmlns:r="http://schemas.openxmlformats.org/officeDocument/2006/relationships" xmlns:p="http://schemas.openxmlformats.org/presentationml/2006/main">
+  <p:cSld>
+    <p:spTree>
+      <p:nvGrpSpPr>
+        <p:cNvPr id="1" name=""/>
+        <p:cNvGrpSpPr/>
+        <p:nvPr/>
+      </p:nvGrpSpPr>
+      <p:grpSpPr>
+        <a:xfrm>
+          <a:off x="0" y="0"/>
+          <a:ext cx="0" cy="0"/>
+          <a:chOff x="0" y="0"/>
+          <a:chExt cx="0" cy="0"/>
+        </a:xfrm>
+      </p:grpSpPr>
+      <p:sp>
+        <p:nvSpPr>
+          <p:cNvPr id="2" name="Slide Image Placeholder 1"/>
+          <p:cNvSpPr>
+            <a:spLocks noGrp="1" noRot="1" noChangeAspect="1"/>
+          </p:cNvSpPr>
+          <p:nvPr>
+            <p:ph type="sldImg"/>
+          </p:nvPr>
+        </p:nvSpPr>
+        <p:spPr/>
+      </p:sp>
+      <p:sp>
+        <p:nvSpPr>
+          <p:cNvPr id="3" name="Notes Placeholder 2"/>
+          <p:cNvSpPr>
+            <a:spLocks noGrp="1"/>
+          </p:cNvSpPr>
+          <p:nvPr>
+            <p:ph type="body" idx="1"/>
+          </p:nvPr>
+        </p:nvSpPr>
+        <p:spPr/>
+        <p:txBody>
+          <a:bodyPr/>
+          <a:lstStyle/>
+          <a:p>
+            <a:r>
+              <a:rPr lang="en-US" dirty="0"/>
+              <a:t/>
+            </a:r>
+            <a:endParaRPr lang="en-US" dirty="0"/>
+          </a:p>
+        </p:txBody>
+      </p:sp>
+      <p:sp>
+        <p:nvSpPr>
+          <p:cNvPr id="4" name="Slide Number Placeholder 3"/>
+          <p:cNvSpPr>
+            <a:spLocks noGrp="1"/>
+          </p:cNvSpPr>
+          <p:nvPr>
+            <p:ph type="sldNum" sz="quarter" idx="10"/>
+          </p:nvPr>
+        </p:nvSpPr>
+        <p:spPr/>
+        <p:txBody>
+          <a:bodyPr/>
+          <a:lstStyle/>
+          <a:p>
+            <a:fld id="{F7021451-1387-4CA6-816F-3879F97B5CBC}" type="slidenum">
+              <a:rPr lang="en-US"/>
+              <a:t>18</a:t>
+            </a:fld>
+            <a:endParaRPr lang="en-US"/>
+          </a:p>
+        </p:txBody>
+      </p:sp>
+    </p:spTree>
+    <p:extLst>
+      <p:ext uri="{BB962C8B-B14F-4D97-AF65-F5344CB8AC3E}">
+        <p14:creationId xmlns:p14="http://schemas.microsoft.com/office/powerpoint/2010/main" val="1024086991"/>
+      </p:ext>
+    </p:extLst>
+  </p:cSld>
+  <p:clrMapOvr>
+    <a:masterClrMapping/>
+  </p:clrMapOvr>
+</p:notes>
+</file>
+
+<file path=ppt/notesSlides/notesSlide19.xml><?xml version="1.0" encoding="utf-8"?>
+<p:notes xmlns:a="http://schemas.openxmlformats.org/drawingml/2006/main" xmlns:r="http://schemas.openxmlformats.org/officeDocument/2006/relationships" xmlns:p="http://schemas.openxmlformats.org/presentationml/2006/main">
+  <p:cSld>
+    <p:spTree>
+      <p:nvGrpSpPr>
+        <p:cNvPr id="1" name=""/>
+        <p:cNvGrpSpPr/>
+        <p:nvPr/>
+      </p:nvGrpSpPr>
+      <p:grpSpPr>
+        <a:xfrm>
+          <a:off x="0" y="0"/>
+          <a:ext cx="0" cy="0"/>
+          <a:chOff x="0" y="0"/>
+          <a:chExt cx="0" cy="0"/>
+        </a:xfrm>
+      </p:grpSpPr>
+      <p:sp>
+        <p:nvSpPr>
+          <p:cNvPr id="2" name="Slide Image Placeholder 1"/>
+          <p:cNvSpPr>
+            <a:spLocks noGrp="1" noRot="1" noChangeAspect="1"/>
+          </p:cNvSpPr>
+          <p:nvPr>
+            <p:ph type="sldImg"/>
+          </p:nvPr>
+        </p:nvSpPr>
+        <p:spPr/>
+      </p:sp>
+      <p:sp>
+        <p:nvSpPr>
+          <p:cNvPr id="3" name="Notes Placeholder 2"/>
+          <p:cNvSpPr>
+            <a:spLocks noGrp="1"/>
+          </p:cNvSpPr>
+          <p:nvPr>
+            <p:ph type="body" idx="1"/>
+          </p:nvPr>
+        </p:nvSpPr>
+        <p:spPr/>
+        <p:txBody>
+          <a:bodyPr/>
+          <a:lstStyle/>
+          <a:p>
+            <a:r>
+              <a:rPr lang="en-US" dirty="0"/>
+              <a:t/>
+            </a:r>
+            <a:endParaRPr lang="en-US" dirty="0"/>
+          </a:p>
+        </p:txBody>
+      </p:sp>
+      <p:sp>
+        <p:nvSpPr>
+          <p:cNvPr id="4" name="Slide Number Placeholder 3"/>
+          <p:cNvSpPr>
+            <a:spLocks noGrp="1"/>
+          </p:cNvSpPr>
+          <p:nvPr>
+            <p:ph type="sldNum" sz="quarter" idx="10"/>
+          </p:nvPr>
+        </p:nvSpPr>
+        <p:spPr/>
+        <p:txBody>
+          <a:bodyPr/>
+          <a:lstStyle/>
+          <a:p>
+            <a:fld id="{F7021451-1387-4CA6-816F-3879F97B5CBC}" type="slidenum">
+              <a:rPr lang="en-US"/>
+              <a:t>19</a:t>
+            </a:fld>
+            <a:endParaRPr lang="en-US"/>
+          </a:p>
+        </p:txBody>
+      </p:sp>
+    </p:spTree>
+    <p:extLst>
+      <p:ext uri="{BB962C8B-B14F-4D97-AF65-F5344CB8AC3E}">
+        <p14:creationId xmlns:p14="http://schemas.microsoft.com/office/powerpoint/2010/main" val="1024086991"/>
+      </p:ext>
+    </p:extLst>
+  </p:cSld>
+  <p:clrMapOvr>
+    <a:masterClrMapping/>
+  </p:clrMapOvr>
+</p:notes>
+</file>
+
 <file path=ppt/notesSlides/notesSlide2.xml><?xml version="1.0" encoding="utf-8"?>
 <p:notes xmlns:a="http://schemas.openxmlformats.org/drawingml/2006/main" xmlns:r="http://schemas.openxmlformats.org/officeDocument/2006/relationships" xmlns:p="http://schemas.openxmlformats.org/presentationml/2006/main">
   <p:cSld>
@@ -978,6 +1514,182 @@
             <a:fld id="{F7021451-1387-4CA6-816F-3879F97B5CBC}" type="slidenum">
               <a:rPr lang="en-US"/>
               <a:t>2</a:t>
+            </a:fld>
+            <a:endParaRPr lang="en-US"/>
+          </a:p>
+        </p:txBody>
+      </p:sp>
+    </p:spTree>
+    <p:extLst>
+      <p:ext uri="{BB962C8B-B14F-4D97-AF65-F5344CB8AC3E}">
+        <p14:creationId xmlns:p14="http://schemas.microsoft.com/office/powerpoint/2010/main" val="1024086991"/>
+      </p:ext>
+    </p:extLst>
+  </p:cSld>
+  <p:clrMapOvr>
+    <a:masterClrMapping/>
+  </p:clrMapOvr>
+</p:notes>
+</file>
+
+<file path=ppt/notesSlides/notesSlide20.xml><?xml version="1.0" encoding="utf-8"?>
+<p:notes xmlns:a="http://schemas.openxmlformats.org/drawingml/2006/main" xmlns:r="http://schemas.openxmlformats.org/officeDocument/2006/relationships" xmlns:p="http://schemas.openxmlformats.org/presentationml/2006/main">
+  <p:cSld>
+    <p:spTree>
+      <p:nvGrpSpPr>
+        <p:cNvPr id="1" name=""/>
+        <p:cNvGrpSpPr/>
+        <p:nvPr/>
+      </p:nvGrpSpPr>
+      <p:grpSpPr>
+        <a:xfrm>
+          <a:off x="0" y="0"/>
+          <a:ext cx="0" cy="0"/>
+          <a:chOff x="0" y="0"/>
+          <a:chExt cx="0" cy="0"/>
+        </a:xfrm>
+      </p:grpSpPr>
+      <p:sp>
+        <p:nvSpPr>
+          <p:cNvPr id="2" name="Slide Image Placeholder 1"/>
+          <p:cNvSpPr>
+            <a:spLocks noGrp="1" noRot="1" noChangeAspect="1"/>
+          </p:cNvSpPr>
+          <p:nvPr>
+            <p:ph type="sldImg"/>
+          </p:nvPr>
+        </p:nvSpPr>
+        <p:spPr/>
+      </p:sp>
+      <p:sp>
+        <p:nvSpPr>
+          <p:cNvPr id="3" name="Notes Placeholder 2"/>
+          <p:cNvSpPr>
+            <a:spLocks noGrp="1"/>
+          </p:cNvSpPr>
+          <p:nvPr>
+            <p:ph type="body" idx="1"/>
+          </p:nvPr>
+        </p:nvSpPr>
+        <p:spPr/>
+        <p:txBody>
+          <a:bodyPr/>
+          <a:lstStyle/>
+          <a:p>
+            <a:r>
+              <a:rPr lang="en-US" dirty="0"/>
+              <a:t/>
+            </a:r>
+            <a:endParaRPr lang="en-US" dirty="0"/>
+          </a:p>
+        </p:txBody>
+      </p:sp>
+      <p:sp>
+        <p:nvSpPr>
+          <p:cNvPr id="4" name="Slide Number Placeholder 3"/>
+          <p:cNvSpPr>
+            <a:spLocks noGrp="1"/>
+          </p:cNvSpPr>
+          <p:nvPr>
+            <p:ph type="sldNum" sz="quarter" idx="10"/>
+          </p:nvPr>
+        </p:nvSpPr>
+        <p:spPr/>
+        <p:txBody>
+          <a:bodyPr/>
+          <a:lstStyle/>
+          <a:p>
+            <a:fld id="{F7021451-1387-4CA6-816F-3879F97B5CBC}" type="slidenum">
+              <a:rPr lang="en-US"/>
+              <a:t>20</a:t>
+            </a:fld>
+            <a:endParaRPr lang="en-US"/>
+          </a:p>
+        </p:txBody>
+      </p:sp>
+    </p:spTree>
+    <p:extLst>
+      <p:ext uri="{BB962C8B-B14F-4D97-AF65-F5344CB8AC3E}">
+        <p14:creationId xmlns:p14="http://schemas.microsoft.com/office/powerpoint/2010/main" val="1024086991"/>
+      </p:ext>
+    </p:extLst>
+  </p:cSld>
+  <p:clrMapOvr>
+    <a:masterClrMapping/>
+  </p:clrMapOvr>
+</p:notes>
+</file>
+
+<file path=ppt/notesSlides/notesSlide21.xml><?xml version="1.0" encoding="utf-8"?>
+<p:notes xmlns:a="http://schemas.openxmlformats.org/drawingml/2006/main" xmlns:r="http://schemas.openxmlformats.org/officeDocument/2006/relationships" xmlns:p="http://schemas.openxmlformats.org/presentationml/2006/main">
+  <p:cSld>
+    <p:spTree>
+      <p:nvGrpSpPr>
+        <p:cNvPr id="1" name=""/>
+        <p:cNvGrpSpPr/>
+        <p:nvPr/>
+      </p:nvGrpSpPr>
+      <p:grpSpPr>
+        <a:xfrm>
+          <a:off x="0" y="0"/>
+          <a:ext cx="0" cy="0"/>
+          <a:chOff x="0" y="0"/>
+          <a:chExt cx="0" cy="0"/>
+        </a:xfrm>
+      </p:grpSpPr>
+      <p:sp>
+        <p:nvSpPr>
+          <p:cNvPr id="2" name="Slide Image Placeholder 1"/>
+          <p:cNvSpPr>
+            <a:spLocks noGrp="1" noRot="1" noChangeAspect="1"/>
+          </p:cNvSpPr>
+          <p:nvPr>
+            <p:ph type="sldImg"/>
+          </p:nvPr>
+        </p:nvSpPr>
+        <p:spPr/>
+      </p:sp>
+      <p:sp>
+        <p:nvSpPr>
+          <p:cNvPr id="3" name="Notes Placeholder 2"/>
+          <p:cNvSpPr>
+            <a:spLocks noGrp="1"/>
+          </p:cNvSpPr>
+          <p:nvPr>
+            <p:ph type="body" idx="1"/>
+          </p:nvPr>
+        </p:nvSpPr>
+        <p:spPr/>
+        <p:txBody>
+          <a:bodyPr/>
+          <a:lstStyle/>
+          <a:p>
+            <a:r>
+              <a:rPr lang="en-US" dirty="0"/>
+              <a:t/>
+            </a:r>
+            <a:endParaRPr lang="en-US" dirty="0"/>
+          </a:p>
+        </p:txBody>
+      </p:sp>
+      <p:sp>
+        <p:nvSpPr>
+          <p:cNvPr id="4" name="Slide Number Placeholder 3"/>
+          <p:cNvSpPr>
+            <a:spLocks noGrp="1"/>
+          </p:cNvSpPr>
+          <p:nvPr>
+            <p:ph type="sldNum" sz="quarter" idx="10"/>
+          </p:nvPr>
+        </p:nvSpPr>
+        <p:spPr/>
+        <p:txBody>
+          <a:bodyPr/>
+          <a:lstStyle/>
+          <a:p>
+            <a:fld id="{F7021451-1387-4CA6-816F-3879F97B5CBC}" type="slidenum">
+              <a:rPr lang="en-US"/>
+              <a:t>21</a:t>
             </a:fld>
             <a:endParaRPr lang="en-US"/>
           </a:p>
@@ -2189,102 +2901,6 @@
         </p:nvSpPr>
         <p:spPr>
           <a:xfrm>
-            <a:off x="406301" y="1223963"/>
-            <a:ext cx="8498026" cy="274290"/>
-          </a:xfrm>
-          <a:prstGeom prst="rect">
-            <a:avLst/>
-          </a:prstGeom>
-          <a:noFill/>
-          <a:ln/>
-        </p:spPr>
-        <p:txBody>
-          <a:bodyPr wrap="square" lIns="0" tIns="0" rIns="0" bIns="0" rtlCol="0" anchor="t"/>
-          <a:lstStyle/>
-          <a:p>
-            <a:pPr algn="l" indent="0" marL="0">
-              <a:lnSpc>
-                <a:spcPts val="2160"/>
-              </a:lnSpc>
-              <a:spcBef>
-                <a:spcPts val="600"/>
-              </a:spcBef>
-              <a:spcAft>
-                <a:spcPts val="800"/>
-              </a:spcAft>
-              <a:buNone/>
-            </a:pPr>
-            <a:r>
-              <a:rPr lang="en-US" sz="1800" b="1" dirty="0">
-                <a:solidFill>
-                  <a:srgbClr val="FE4447"/>
-                </a:solidFill>
-                <a:latin typeface="Georgia" pitchFamily="34" charset="0"/>
-                <a:ea typeface="Georgia" pitchFamily="34" charset="-122"/>
-                <a:cs typeface="Georgia" pitchFamily="34" charset="-120"/>
-              </a:rPr>
-              <a:t>Learning objective</a:t>
-            </a:r>
-            <a:endParaRPr lang="en-US" sz="1800" dirty="0"/>
-          </a:p>
-        </p:txBody>
-      </p:sp>
-      <p:sp>
-        <p:nvSpPr>
-          <p:cNvPr id="6" name="Text 4"/>
-          <p:cNvSpPr/>
-          <p:nvPr/>
-        </p:nvSpPr>
-        <p:spPr>
-          <a:xfrm>
-            <a:off x="406301" y="1637854"/>
-            <a:ext cx="8498026" cy="426541"/>
-          </a:xfrm>
-          <a:prstGeom prst="rect">
-            <a:avLst/>
-          </a:prstGeom>
-          <a:noFill/>
-          <a:ln/>
-        </p:spPr>
-        <p:txBody>
-          <a:bodyPr wrap="square" lIns="0" tIns="0" rIns="0" bIns="0" rtlCol="0" anchor="t"/>
-          <a:lstStyle/>
-          <a:p>
-            <a:pPr algn="l" indent="0" marL="0">
-              <a:lnSpc>
-                <a:spcPts val="1680"/>
-              </a:lnSpc>
-              <a:spcBef>
-                <a:spcPts val="300"/>
-              </a:spcBef>
-              <a:spcAft>
-                <a:spcPts val="300"/>
-              </a:spcAft>
-              <a:buNone/>
-            </a:pPr>
-            <a:r>
-              <a:rPr lang="en-US" sz="1200" dirty="0">
-                <a:solidFill>
-                  <a:srgbClr val="1C2833"/>
-                </a:solidFill>
-                <a:latin typeface="Arial" pitchFamily="34" charset="0"/>
-                <a:ea typeface="Arial" pitchFamily="34" charset="-122"/>
-                <a:cs typeface="Arial" pitchFamily="34" charset="-120"/>
-              </a:rPr>
-              <a:t>Each student (or pair) will build a tithi calendar for the current calendar month — labelling each date with its tithi name, pakṣa, and expected Moon shape.</a:t>
-            </a:r>
-            <a:endParaRPr lang="en-US" sz="1200" dirty="0"/>
-          </a:p>
-        </p:txBody>
-      </p:sp>
-      <p:sp>
-        <p:nvSpPr>
-          <p:cNvPr id="7" name="Text 5"/>
-          <p:cNvSpPr/>
-          <p:nvPr/>
-        </p:nvSpPr>
-        <p:spPr>
-          <a:xfrm>
             <a:off x="406301" y="4434929"/>
             <a:ext cx="8498026" cy="213271"/>
           </a:xfrm>
@@ -2429,7 +3045,7 @@
                 <a:ea typeface="Georgia" pitchFamily="34" charset="-122"/>
                 <a:cs typeface="Georgia" pitchFamily="34" charset="-120"/>
               </a:rPr>
-              <a:t>Homework</a:t>
+              <a:t>Core (15 min) (cont.)</a:t>
             </a:r>
             <a:endParaRPr lang="en-US" sz="1800" dirty="0"/>
           </a:p>
@@ -2443,8 +3059,8 @@
         </p:nvSpPr>
         <p:spPr>
           <a:xfrm>
-            <a:off x="406301" y="870942"/>
-            <a:ext cx="8498026" cy="639812"/>
+            <a:off x="634901" y="883593"/>
+            <a:ext cx="8102798" cy="281880"/>
           </a:xfrm>
           <a:prstGeom prst="rect">
             <a:avLst/>
@@ -2456,40 +3072,15 @@
           <a:bodyPr wrap="square" lIns="0" tIns="0" rIns="0" bIns="0" rtlCol="0" anchor="t"/>
           <a:lstStyle/>
           <a:p>
-            <a:pPr algn="l" indent="0" marL="0">
-              <a:lnSpc>
-                <a:spcPts val="1680"/>
-              </a:lnSpc>
-              <a:spcBef>
-                <a:spcPts val="300"/>
-              </a:spcBef>
-              <a:spcAft>
-                <a:spcPts val="300"/>
-              </a:spcAft>
-              <a:buNone/>
-            </a:pPr>
-            <a:r>
-              <a:rPr lang="en-US" sz="1200" dirty="0">
-                <a:solidFill>
-                  <a:srgbClr val="1C2833"/>
-                </a:solidFill>
-                <a:latin typeface="Arial" pitchFamily="34" charset="0"/>
-                <a:ea typeface="Arial" pitchFamily="34" charset="-122"/>
-                <a:cs typeface="Arial" pitchFamily="34" charset="-120"/>
-              </a:rPr>
-              <a:t>– Continue the Moon diary. Compare last night's sketch with the calendar you built today — does the shape match the predicted shape for that tithi? – For Day 5: be ready to name </a:t>
-            </a:r>
-            <a:pPr algn="l" indent="0" marL="0">
-              <a:lnSpc>
-                <a:spcPts val="1680"/>
-              </a:lnSpc>
-              <a:spcBef>
-                <a:spcPts val="300"/>
-              </a:spcBef>
-              <a:spcAft>
-                <a:spcPts val="300"/>
-              </a:spcAft>
-              <a:buNone/>
+            <a:pPr algn="l" marL="342900" indent="-342900">
+              <a:lnSpc>
+                <a:spcPts val="1620"/>
+              </a:lnSpc>
+              <a:spcAft>
+                <a:spcPts val="300"/>
+              </a:spcAft>
+              <a:buSzPct val="100000"/>
+              <a:buChar char="•"/>
             </a:pPr>
             <a:r>
               <a:rPr lang="en-US" sz="1200" b="1" dirty="0">
@@ -2500,30 +3091,27 @@
                 <a:ea typeface="Arial" pitchFamily="34" charset="-122"/>
                 <a:cs typeface="Arial" pitchFamily="34" charset="-120"/>
               </a:rPr>
-              <a:t>one festival in your family</a:t>
-            </a:r>
-            <a:pPr algn="l" indent="0" marL="0">
-              <a:lnSpc>
-                <a:spcPts val="1680"/>
-              </a:lnSpc>
-              <a:spcBef>
-                <a:spcPts val="300"/>
-              </a:spcBef>
-              <a:spcAft>
-                <a:spcPts val="300"/>
-              </a:spcAft>
-              <a:buNone/>
-            </a:pPr>
-            <a:r>
-              <a:rPr lang="en-US" sz="1200" dirty="0">
-                <a:solidFill>
-                  <a:srgbClr val="1C2833"/>
-                </a:solidFill>
-                <a:latin typeface="Arial" pitchFamily="34" charset="0"/>
-                <a:ea typeface="Arial" pitchFamily="34" charset="-122"/>
-                <a:cs typeface="Arial" pitchFamily="34" charset="-120"/>
-              </a:rPr>
-              <a:t> (or community) that you know is tied to a specific tithi.</a:t>
+              <a:t>Anatomy of a tithi calendar — the activity sheet.</a:t>
+            </a:r>
+            <a:pPr algn="l" indent="0" marL="0">
+              <a:lnSpc>
+                <a:spcPts val="1620"/>
+              </a:lnSpc>
+              <a:spcAft>
+                <a:spcPts val="300"/>
+              </a:spcAft>
+              <a:buNone/>
+            </a:pPr>
+            <a:r>
+              <a:rPr lang="en-US" sz="1200" dirty="0">
+                <a:solidFill>
+                  <a:srgbClr val="1C2833"/>
+                </a:solidFill>
+                <a:latin typeface="Arial" pitchFamily="34" charset="0"/>
+                <a:ea typeface="Arial" pitchFamily="34" charset="-122"/>
+                <a:cs typeface="Arial" pitchFamily="34" charset="-120"/>
+              </a:rPr>
+              <a:t> Walk through the blank grid:</a:t>
             </a:r>
             <a:endParaRPr lang="en-US" sz="1200" dirty="0"/>
           </a:p>
@@ -2532,6 +3120,76 @@
       <p:sp>
         <p:nvSpPr>
           <p:cNvPr id="5" name="Text 3"/>
+          <p:cNvSpPr/>
+          <p:nvPr/>
+        </p:nvSpPr>
+        <p:spPr>
+          <a:xfrm>
+            <a:off x="634901" y="1266974"/>
+            <a:ext cx="8102798" cy="525661"/>
+          </a:xfrm>
+          <a:prstGeom prst="rect">
+            <a:avLst/>
+          </a:prstGeom>
+          <a:noFill/>
+          <a:ln/>
+        </p:spPr>
+        <p:txBody>
+          <a:bodyPr wrap="square" lIns="0" tIns="0" rIns="0" bIns="0" rtlCol="0" anchor="t"/>
+          <a:lstStyle/>
+          <a:p>
+            <a:pPr algn="l" marL="342900" indent="-342900">
+              <a:lnSpc>
+                <a:spcPts val="1620"/>
+              </a:lnSpc>
+              <a:spcAft>
+                <a:spcPts val="300"/>
+              </a:spcAft>
+              <a:buSzPct val="100000"/>
+              <a:buChar char="•"/>
+            </a:pPr>
+            <a:r>
+              <a:rPr lang="en-US" sz="1200" dirty="0">
+                <a:solidFill>
+                  <a:srgbClr val="1C2833"/>
+                </a:solidFill>
+                <a:latin typeface="Arial" pitchFamily="34" charset="0"/>
+                <a:ea typeface="Arial" pitchFamily="34" charset="-122"/>
+                <a:cs typeface="Arial" pitchFamily="34" charset="-120"/>
+              </a:rPr>
+              <a:t>One row per date</a:t>
+            </a:r>
+            <a:endParaRPr lang="en-US" sz="1200" dirty="0"/>
+          </a:p>
+          <a:p>
+            <a:pPr algn="l" marL="342900" indent="-342900">
+              <a:lnSpc>
+                <a:spcPts val="1620"/>
+              </a:lnSpc>
+              <a:spcAft>
+                <a:spcPts val="300"/>
+              </a:spcAft>
+              <a:buSzPct val="100000"/>
+              <a:buChar char="•"/>
+            </a:pPr>
+            <a:r>
+              <a:rPr lang="en-US" sz="1200" dirty="0">
+                <a:solidFill>
+                  <a:srgbClr val="1C2833"/>
+                </a:solidFill>
+                <a:latin typeface="Arial" pitchFamily="34" charset="0"/>
+                <a:ea typeface="Arial" pitchFamily="34" charset="-122"/>
+                <a:cs typeface="Arial" pitchFamily="34" charset="-120"/>
+              </a:rPr>
+              <a:t>Columns: Date | Day of week | Pakṣa | Tithi name | Tithi end-time | Expected Moon shape</a:t>
+            </a:r>
+            <a:endParaRPr lang="en-US" sz="1200" dirty="0"/>
+          </a:p>
+        </p:txBody>
+      </p:sp>
+      <p:sp>
+        <p:nvSpPr>
+          <p:cNvPr id="6" name="Text 4"/>
           <p:cNvSpPr/>
           <p:nvPr/>
         </p:nvSpPr>
@@ -2681,7 +3339,7 @@
                 <a:ea typeface="Georgia" pitchFamily="34" charset="-122"/>
                 <a:cs typeface="Georgia" pitchFamily="34" charset="-120"/>
               </a:rPr>
-              <a:t>Differentiation</a:t>
+              <a:t>Core (15 min) (cont.)</a:t>
             </a:r>
             <a:endParaRPr lang="en-US" sz="1800" dirty="0"/>
           </a:p>
@@ -2696,7 +3354,7 @@
         <p:spPr>
           <a:xfrm>
             <a:off x="634901" y="883593"/>
-            <a:ext cx="8102798" cy="1142702"/>
+            <a:ext cx="8102798" cy="487561"/>
           </a:xfrm>
           <a:prstGeom prst="rect">
             <a:avLst/>
@@ -2727,27 +3385,27 @@
                 <a:ea typeface="Arial" pitchFamily="34" charset="-122"/>
                 <a:cs typeface="Arial" pitchFamily="34" charset="-120"/>
               </a:rPr>
-              <a:t>One tier up:</a:t>
-            </a:r>
-            <a:pPr algn="l" indent="0" marL="0">
-              <a:lnSpc>
-                <a:spcPts val="1620"/>
-              </a:lnSpc>
-              <a:spcAft>
-                <a:spcPts val="300"/>
-              </a:spcAft>
-              <a:buNone/>
-            </a:pPr>
-            <a:r>
-              <a:rPr lang="en-US" sz="1200" dirty="0">
-                <a:solidFill>
-                  <a:srgbClr val="1C2833"/>
-                </a:solidFill>
-                <a:latin typeface="Arial" pitchFamily="34" charset="0"/>
-                <a:ea typeface="Arial" pitchFamily="34" charset="-122"/>
-                <a:cs typeface="Arial" pitchFamily="34" charset="-120"/>
-              </a:rPr>
-              <a:t> Look at the </a:t>
+              <a:t>One festival hook.</a:t>
+            </a:r>
+            <a:pPr algn="l" indent="0" marL="0">
+              <a:lnSpc>
+                <a:spcPts val="1620"/>
+              </a:lnSpc>
+              <a:spcAft>
+                <a:spcPts val="300"/>
+              </a:spcAft>
+              <a:buNone/>
+            </a:pPr>
+            <a:r>
+              <a:rPr lang="en-US" sz="1200" dirty="0">
+                <a:solidFill>
+                  <a:srgbClr val="1C2833"/>
+                </a:solidFill>
+                <a:latin typeface="Arial" pitchFamily="34" charset="0"/>
+                <a:ea typeface="Arial" pitchFamily="34" charset="-122"/>
+                <a:cs typeface="Arial" pitchFamily="34" charset="-120"/>
+              </a:rPr>
+              <a:t> Find one festival this month from the </a:t>
             </a:r>
             <a:pPr algn="l" indent="0" marL="0">
               <a:lnSpc>
@@ -2787,7 +3445,7 @@
                 <a:ea typeface="Arial" pitchFamily="34" charset="-122"/>
                 <a:cs typeface="Arial" pitchFamily="34" charset="-120"/>
               </a:rPr>
-              <a:t> for the month BEFORE this one. Find a tithi that was </a:t>
+              <a:t> and announce it: </a:t>
             </a:r>
             <a:pPr algn="l" indent="0" marL="0">
               <a:lnSpc>
@@ -2807,71 +3465,7 @@
                 <a:ea typeface="Arial" pitchFamily="34" charset="-122"/>
                 <a:cs typeface="Arial" pitchFamily="34" charset="-120"/>
               </a:rPr>
-              <a:t>kṣaya</a:t>
-            </a:r>
-            <a:pPr algn="l" indent="0" marL="0">
-              <a:lnSpc>
-                <a:spcPts val="1620"/>
-              </a:lnSpc>
-              <a:spcAft>
-                <a:spcPts val="300"/>
-              </a:spcAft>
-              <a:buNone/>
-            </a:pPr>
-            <a:r>
-              <a:rPr lang="en-US" sz="1200" dirty="0">
-                <a:solidFill>
-                  <a:srgbClr val="1C2833"/>
-                </a:solidFill>
-                <a:latin typeface="Arial" pitchFamily="34" charset="0"/>
-                <a:ea typeface="Arial" pitchFamily="34" charset="-122"/>
-                <a:cs typeface="Arial" pitchFamily="34" charset="-120"/>
-              </a:rPr>
-              <a:t> (skipped). Explain in writing what happened on that date — the previous tithi was running at sunrise, then the next tithi started after sunrise and ended before the next sunrise. So the "skipped" tithi never had its own sunrise.</a:t>
-            </a:r>
-            <a:endParaRPr lang="en-US" sz="1200" dirty="0"/>
-          </a:p>
-          <a:p>
-            <a:pPr algn="l" marL="342900" indent="-342900">
-              <a:lnSpc>
-                <a:spcPts val="1620"/>
-              </a:lnSpc>
-              <a:spcAft>
-                <a:spcPts val="300"/>
-              </a:spcAft>
-              <a:buSzPct val="100000"/>
-              <a:buChar char="•"/>
-            </a:pPr>
-            <a:r>
-              <a:rPr lang="en-US" sz="1200" b="1" dirty="0">
-                <a:solidFill>
-                  <a:srgbClr val="1C2833"/>
-                </a:solidFill>
-                <a:latin typeface="Arial" pitchFamily="34" charset="0"/>
-                <a:ea typeface="Arial" pitchFamily="34" charset="-122"/>
-                <a:cs typeface="Arial" pitchFamily="34" charset="-120"/>
-              </a:rPr>
-              <a:t>One tier down:</a:t>
-            </a:r>
-            <a:pPr algn="l" indent="0" marL="0">
-              <a:lnSpc>
-                <a:spcPts val="1620"/>
-              </a:lnSpc>
-              <a:spcAft>
-                <a:spcPts val="300"/>
-              </a:spcAft>
-              <a:buNone/>
-            </a:pPr>
-            <a:r>
-              <a:rPr lang="en-US" sz="1200" dirty="0">
-                <a:solidFill>
-                  <a:srgbClr val="1C2833"/>
-                </a:solidFill>
-                <a:latin typeface="Arial" pitchFamily="34" charset="0"/>
-                <a:ea typeface="Arial" pitchFamily="34" charset="-122"/>
-                <a:cs typeface="Arial" pitchFamily="34" charset="-120"/>
-              </a:rPr>
-              <a:t> Fill in the date column and the tithi-name column only. Skip the end-times and the Moon shapes for this lesson.</a:t>
+              <a:t>"On dvitīyā of śukla pakṣa this month, there's a regional festival called X — let's see if we agree with the date."</a:t>
             </a:r>
             <a:endParaRPr lang="en-US" sz="1200" dirty="0"/>
           </a:p>
@@ -3029,7 +3623,7 @@
                 <a:ea typeface="Georgia" pitchFamily="34" charset="-122"/>
                 <a:cs typeface="Georgia" pitchFamily="34" charset="-120"/>
               </a:rPr>
-              <a:t>Teacher notes</a:t>
+              <a:t>Activity (20 min) — Build the calendar</a:t>
             </a:r>
             <a:endParaRPr lang="en-US" sz="1800" dirty="0"/>
           </a:p>
@@ -3043,8 +3637,8 @@
         </p:nvSpPr>
         <p:spPr>
           <a:xfrm>
-            <a:off x="634901" y="883593"/>
-            <a:ext cx="8102798" cy="693241"/>
+            <a:off x="406301" y="870942"/>
+            <a:ext cx="8498026" cy="222796"/>
           </a:xfrm>
           <a:prstGeom prst="rect">
             <a:avLst/>
@@ -3056,115 +3650,120 @@
           <a:bodyPr wrap="square" lIns="0" tIns="0" rIns="0" bIns="0" rtlCol="0" anchor="t"/>
           <a:lstStyle/>
           <a:p>
-            <a:pPr algn="l" marL="342900" indent="-342900">
-              <a:lnSpc>
-                <a:spcPts val="1620"/>
-              </a:lnSpc>
-              <a:spcAft>
-                <a:spcPts val="300"/>
-              </a:spcAft>
-              <a:buSzPct val="100000"/>
-              <a:buChar char="•"/>
-            </a:pPr>
-            <a:pPr algn="l" indent="0" marL="0">
-              <a:lnSpc>
-                <a:spcPts val="1620"/>
-              </a:lnSpc>
-              <a:spcAft>
-                <a:spcPts val="300"/>
-              </a:spcAft>
-              <a:buNone/>
-            </a:pPr>
-            <a:r>
-              <a:rPr lang="en-US" sz="1200" i="1" dirty="0">
-                <a:solidFill>
-                  <a:srgbClr val="1C2833"/>
-                </a:solidFill>
-                <a:latin typeface="Arial" pitchFamily="34" charset="0"/>
-                <a:ea typeface="Arial" pitchFamily="34" charset="-122"/>
-                <a:cs typeface="Arial" pitchFamily="34" charset="-120"/>
-              </a:rPr>
-              <a:t>Choose ONE</a:t>
-            </a:r>
-            <a:pPr algn="l" indent="0" marL="0">
-              <a:lnSpc>
-                <a:spcPts val="1620"/>
-              </a:lnSpc>
-              <a:spcAft>
-                <a:spcPts val="300"/>
-              </a:spcAft>
-              <a:buNone/>
-            </a:pPr>
-            <a:r>
-              <a:rPr lang="en-US" sz="1200" dirty="0">
-                <a:solidFill>
-                  <a:srgbClr val="1C2833"/>
-                </a:solidFill>
-                <a:latin typeface="Arial" pitchFamily="34" charset="0"/>
-                <a:ea typeface="Arial" pitchFamily="34" charset="-122"/>
-                <a:cs typeface="Arial" pitchFamily="34" charset="-120"/>
-              </a:rPr>
-              <a:t>pañcāṅga</a:t>
-            </a:r>
-            <a:pPr algn="l" indent="0" marL="0">
-              <a:lnSpc>
-                <a:spcPts val="1620"/>
-              </a:lnSpc>
-              <a:spcAft>
-                <a:spcPts val="300"/>
-              </a:spcAft>
-              <a:buNone/>
-            </a:pPr>
-            <a:r>
-              <a:rPr lang="en-US" sz="1200" i="1" dirty="0">
-                <a:solidFill>
-                  <a:srgbClr val="1C2833"/>
-                </a:solidFill>
-                <a:latin typeface="Arial" pitchFamily="34" charset="0"/>
-                <a:ea typeface="Arial" pitchFamily="34" charset="-122"/>
-                <a:cs typeface="Arial" pitchFamily="34" charset="-120"/>
-              </a:rPr>
-              <a:t> source for the entire class.</a:t>
-            </a:r>
-            <a:pPr algn="l" indent="0" marL="0">
-              <a:lnSpc>
-                <a:spcPts val="1620"/>
-              </a:lnSpc>
-              <a:spcAft>
-                <a:spcPts val="300"/>
-              </a:spcAft>
-              <a:buNone/>
-            </a:pPr>
-            <a:r>
-              <a:rPr lang="en-US" sz="1200" i="1" dirty="0">
-                <a:solidFill>
-                  <a:srgbClr val="1C2833"/>
-                </a:solidFill>
-                <a:latin typeface="Arial" pitchFamily="34" charset="0"/>
-                <a:ea typeface="Arial" pitchFamily="34" charset="-122"/>
-                <a:cs typeface="Arial" pitchFamily="34" charset="-120"/>
-              </a:rPr>
-              <a:t> Different</a:t>
-            </a:r>
-            <a:pPr algn="l" indent="0" marL="0">
-              <a:lnSpc>
-                <a:spcPts val="1620"/>
-              </a:lnSpc>
-              <a:spcAft>
-                <a:spcPts val="300"/>
-              </a:spcAft>
-              <a:buNone/>
-            </a:pPr>
-            <a:r>
-              <a:rPr lang="en-US" sz="1200" dirty="0">
-                <a:solidFill>
-                  <a:srgbClr val="1C2833"/>
-                </a:solidFill>
-                <a:latin typeface="Arial" pitchFamily="34" charset="0"/>
-                <a:ea typeface="Arial" pitchFamily="34" charset="-122"/>
-                <a:cs typeface="Arial" pitchFamily="34" charset="-120"/>
-              </a:rPr>
-              <a:t>pañcāṅgas* may use different sunrise locations or computational systems and give slightly different tithi names for borderline dates. Pick one (Drik Panchang is well-known; Mypanchang.com is also reliable) and stick to it for the whole module.</a:t>
+            <a:pPr algn="l" indent="0" marL="0">
+              <a:lnSpc>
+                <a:spcPts val="1680"/>
+              </a:lnSpc>
+              <a:spcBef>
+                <a:spcPts val="300"/>
+              </a:spcBef>
+              <a:spcAft>
+                <a:spcPts val="300"/>
+              </a:spcAft>
+              <a:buNone/>
+            </a:pPr>
+            <a:r>
+              <a:rPr lang="en-US" sz="1200" dirty="0">
+                <a:solidFill>
+                  <a:srgbClr val="1C2833"/>
+                </a:solidFill>
+                <a:latin typeface="Arial" pitchFamily="34" charset="0"/>
+                <a:ea typeface="Arial" pitchFamily="34" charset="-122"/>
+                <a:cs typeface="Arial" pitchFamily="34" charset="-120"/>
+              </a:rPr>
+              <a:t>This </a:t>
+            </a:r>
+            <a:pPr algn="l" indent="0" marL="0">
+              <a:lnSpc>
+                <a:spcPts val="1680"/>
+              </a:lnSpc>
+              <a:spcBef>
+                <a:spcPts val="300"/>
+              </a:spcBef>
+              <a:spcAft>
+                <a:spcPts val="300"/>
+              </a:spcAft>
+              <a:buNone/>
+            </a:pPr>
+            <a:r>
+              <a:rPr lang="en-US" sz="1200" b="1" dirty="0">
+                <a:solidFill>
+                  <a:srgbClr val="1C2833"/>
+                </a:solidFill>
+                <a:latin typeface="Arial" pitchFamily="34" charset="0"/>
+                <a:ea typeface="Arial" pitchFamily="34" charset="-122"/>
+                <a:cs typeface="Arial" pitchFamily="34" charset="-120"/>
+              </a:rPr>
+              <a:t>IS</a:t>
+            </a:r>
+            <a:pPr algn="l" indent="0" marL="0">
+              <a:lnSpc>
+                <a:spcPts val="1680"/>
+              </a:lnSpc>
+              <a:spcBef>
+                <a:spcPts val="300"/>
+              </a:spcBef>
+              <a:spcAft>
+                <a:spcPts val="300"/>
+              </a:spcAft>
+              <a:buNone/>
+            </a:pPr>
+            <a:r>
+              <a:rPr lang="en-US" sz="1200" dirty="0">
+                <a:solidFill>
+                  <a:srgbClr val="1C2833"/>
+                </a:solidFill>
+                <a:latin typeface="Arial" pitchFamily="34" charset="0"/>
+                <a:ea typeface="Arial" pitchFamily="34" charset="-122"/>
+                <a:cs typeface="Arial" pitchFamily="34" charset="-120"/>
+              </a:rPr>
+              <a:t> Activity 01 — see </a:t>
+            </a:r>
+            <a:pPr algn="l" indent="0" marL="0">
+              <a:lnSpc>
+                <a:spcPts val="1680"/>
+              </a:lnSpc>
+              <a:spcBef>
+                <a:spcPts val="300"/>
+              </a:spcBef>
+              <a:spcAft>
+                <a:spcPts val="300"/>
+              </a:spcAft>
+              <a:buNone/>
+            </a:pPr>
+            <a:r>
+              <a:rPr lang="en-US" sz="1200" dirty="0">
+                <a:solidFill>
+                  <a:srgbClr val="1C2833"/>
+                </a:solidFill>
+                <a:latin typeface="Arial" pitchFamily="34" charset="0"/>
+                <a:ea typeface="Arial" pitchFamily="34" charset="-122"/>
+                <a:cs typeface="Arial" pitchFamily="34" charset="-120"/>
+              </a:rPr>
+              <a:t>activities/activity-01-build-tithi-calendar.md</a:t>
+            </a:r>
+            <a:pPr algn="l" indent="0" marL="0">
+              <a:lnSpc>
+                <a:spcPts val="1680"/>
+              </a:lnSpc>
+              <a:spcBef>
+                <a:spcPts val="300"/>
+              </a:spcBef>
+              <a:spcAft>
+                <a:spcPts val="300"/>
+              </a:spcAft>
+              <a:buNone/>
+            </a:pPr>
+            <a:r>
+              <a:rPr lang="en-US" sz="1200" dirty="0">
+                <a:solidFill>
+                  <a:srgbClr val="1C2833"/>
+                </a:solidFill>
+                <a:latin typeface="Arial" pitchFamily="34" charset="0"/>
+                <a:ea typeface="Arial" pitchFamily="34" charset="-122"/>
+                <a:cs typeface="Arial" pitchFamily="34" charset="-120"/>
+              </a:rPr>
+              <a:t> for the full set of instructions.</a:t>
             </a:r>
             <a:endParaRPr lang="en-US" sz="1200" dirty="0"/>
           </a:p>
@@ -3173,192 +3772,6 @@
       <p:sp>
         <p:nvSpPr>
           <p:cNvPr id="5" name="Text 3"/>
-          <p:cNvSpPr/>
-          <p:nvPr/>
-        </p:nvSpPr>
-        <p:spPr>
-          <a:xfrm>
-            <a:off x="406301" y="1665684"/>
-            <a:ext cx="8498026" cy="853083"/>
-          </a:xfrm>
-          <a:prstGeom prst="rect">
-            <a:avLst/>
-          </a:prstGeom>
-          <a:noFill/>
-          <a:ln/>
-        </p:spPr>
-        <p:txBody>
-          <a:bodyPr wrap="square" lIns="0" tIns="0" rIns="0" bIns="0" rtlCol="0" anchor="t"/>
-          <a:lstStyle/>
-          <a:p>
-            <a:pPr algn="l" indent="0" marL="0">
-              <a:lnSpc>
-                <a:spcPts val="1680"/>
-              </a:lnSpc>
-              <a:spcBef>
-                <a:spcPts val="300"/>
-              </a:spcBef>
-              <a:spcAft>
-                <a:spcPts val="300"/>
-              </a:spcAft>
-              <a:buNone/>
-            </a:pPr>
-            <a:r>
-              <a:rPr lang="en-US" sz="1200" dirty="0">
-                <a:solidFill>
-                  <a:srgbClr val="1C2833"/>
-                </a:solidFill>
-                <a:latin typeface="Arial" pitchFamily="34" charset="0"/>
-                <a:ea typeface="Arial" pitchFamily="34" charset="-122"/>
-                <a:cs typeface="Arial" pitchFamily="34" charset="-120"/>
-              </a:rPr>
-              <a:t>– Some calendars list two tithis on a single date (e.g. "Caturthī upto 14:37, then Pañcamī"). This is normal. Have students enter the tithi at sunrise, then note the transition. – The colour-coding (yellow for </a:t>
-            </a:r>
-            <a:pPr algn="l" indent="0" marL="0">
-              <a:lnSpc>
-                <a:spcPts val="1680"/>
-              </a:lnSpc>
-              <a:spcBef>
-                <a:spcPts val="300"/>
-              </a:spcBef>
-              <a:spcAft>
-                <a:spcPts val="300"/>
-              </a:spcAft>
-              <a:buNone/>
-            </a:pPr>
-            <a:r>
-              <a:rPr lang="en-US" sz="1200" i="1" dirty="0">
-                <a:solidFill>
-                  <a:srgbClr val="1C2833"/>
-                </a:solidFill>
-                <a:latin typeface="Arial" pitchFamily="34" charset="0"/>
-                <a:ea typeface="Arial" pitchFamily="34" charset="-122"/>
-                <a:cs typeface="Arial" pitchFamily="34" charset="-120"/>
-              </a:rPr>
-              <a:t>śukla</a:t>
-            </a:r>
-            <a:pPr algn="l" indent="0" marL="0">
-              <a:lnSpc>
-                <a:spcPts val="1680"/>
-              </a:lnSpc>
-              <a:spcBef>
-                <a:spcPts val="300"/>
-              </a:spcBef>
-              <a:spcAft>
-                <a:spcPts val="300"/>
-              </a:spcAft>
-              <a:buNone/>
-            </a:pPr>
-            <a:r>
-              <a:rPr lang="en-US" sz="1200" dirty="0">
-                <a:solidFill>
-                  <a:srgbClr val="1C2833"/>
-                </a:solidFill>
-                <a:latin typeface="Arial" pitchFamily="34" charset="0"/>
-                <a:ea typeface="Arial" pitchFamily="34" charset="-122"/>
-                <a:cs typeface="Arial" pitchFamily="34" charset="-120"/>
-              </a:rPr>
-              <a:t>, blue/grey for </a:t>
-            </a:r>
-            <a:pPr algn="l" indent="0" marL="0">
-              <a:lnSpc>
-                <a:spcPts val="1680"/>
-              </a:lnSpc>
-              <a:spcBef>
-                <a:spcPts val="300"/>
-              </a:spcBef>
-              <a:spcAft>
-                <a:spcPts val="300"/>
-              </a:spcAft>
-              <a:buNone/>
-            </a:pPr>
-            <a:r>
-              <a:rPr lang="en-US" sz="1200" i="1" dirty="0">
-                <a:solidFill>
-                  <a:srgbClr val="1C2833"/>
-                </a:solidFill>
-                <a:latin typeface="Arial" pitchFamily="34" charset="0"/>
-                <a:ea typeface="Arial" pitchFamily="34" charset="-122"/>
-                <a:cs typeface="Arial" pitchFamily="34" charset="-120"/>
-              </a:rPr>
-              <a:t>kṛṣṇa</a:t>
-            </a:r>
-            <a:pPr algn="l" indent="0" marL="0">
-              <a:lnSpc>
-                <a:spcPts val="1680"/>
-              </a:lnSpc>
-              <a:spcBef>
-                <a:spcPts val="300"/>
-              </a:spcBef>
-              <a:spcAft>
-                <a:spcPts val="300"/>
-              </a:spcAft>
-              <a:buNone/>
-            </a:pPr>
-            <a:r>
-              <a:rPr lang="en-US" sz="1200" dirty="0">
-                <a:solidFill>
-                  <a:srgbClr val="1C2833"/>
-                </a:solidFill>
-                <a:latin typeface="Arial" pitchFamily="34" charset="0"/>
-                <a:ea typeface="Arial" pitchFamily="34" charset="-122"/>
-                <a:cs typeface="Arial" pitchFamily="34" charset="-120"/>
-              </a:rPr>
-              <a:t>) makes the calendar legible at a glance. Insist on it. – Bring a backup: if printing fails, project the </a:t>
-            </a:r>
-            <a:pPr algn="l" indent="0" marL="0">
-              <a:lnSpc>
-                <a:spcPts val="1680"/>
-              </a:lnSpc>
-              <a:spcBef>
-                <a:spcPts val="300"/>
-              </a:spcBef>
-              <a:spcAft>
-                <a:spcPts val="300"/>
-              </a:spcAft>
-              <a:buNone/>
-            </a:pPr>
-            <a:r>
-              <a:rPr lang="en-US" sz="1200" i="1" dirty="0">
-                <a:solidFill>
-                  <a:srgbClr val="1C2833"/>
-                </a:solidFill>
-                <a:latin typeface="Arial" pitchFamily="34" charset="0"/>
-                <a:ea typeface="Arial" pitchFamily="34" charset="-122"/>
-                <a:cs typeface="Arial" pitchFamily="34" charset="-120"/>
-              </a:rPr>
-              <a:t>pañcāṅga</a:t>
-            </a:r>
-            <a:pPr algn="l" indent="0" marL="0">
-              <a:lnSpc>
-                <a:spcPts val="1680"/>
-              </a:lnSpc>
-              <a:spcBef>
-                <a:spcPts val="300"/>
-              </a:spcBef>
-              <a:spcAft>
-                <a:spcPts val="300"/>
-              </a:spcAft>
-              <a:buNone/>
-            </a:pPr>
-            <a:r>
-              <a:rPr lang="en-US" sz="1200" dirty="0">
-                <a:solidFill>
-                  <a:srgbClr val="1C2833"/>
-                </a:solidFill>
-                <a:latin typeface="Arial" pitchFamily="34" charset="0"/>
-                <a:ea typeface="Arial" pitchFamily="34" charset="-122"/>
-                <a:cs typeface="Arial" pitchFamily="34" charset="-120"/>
-              </a:rPr>
-              <a:t> for the whole class to read together. Less efficient but workable.</a:t>
-            </a:r>
-            <a:endParaRPr lang="en-US" sz="1200" dirty="0"/>
-          </a:p>
-        </p:txBody>
-      </p:sp>
-      <p:sp>
-        <p:nvSpPr>
-          <p:cNvPr id="6" name="Text 4"/>
           <p:cNvSpPr/>
           <p:nvPr/>
         </p:nvSpPr>
@@ -3508,7 +3921,555 @@
                 <a:ea typeface="Georgia" pitchFamily="34" charset="-122"/>
                 <a:cs typeface="Georgia" pitchFamily="34" charset="-120"/>
               </a:rPr>
-              <a:t>Citation(s) used in this lesson</a:t>
+              <a:t>Activity (20 min) — Build the calendar (cont.)</a:t>
+            </a:r>
+            <a:endParaRPr lang="en-US" sz="1800" dirty="0"/>
+          </a:p>
+        </p:txBody>
+      </p:sp>
+      <p:sp>
+        <p:nvSpPr>
+          <p:cNvPr id="4" name="Text 2"/>
+          <p:cNvSpPr/>
+          <p:nvPr/>
+        </p:nvSpPr>
+        <p:spPr>
+          <a:xfrm>
+            <a:off x="406301" y="870942"/>
+            <a:ext cx="8498026" cy="213271"/>
+          </a:xfrm>
+          <a:prstGeom prst="rect">
+            <a:avLst/>
+          </a:prstGeom>
+          <a:noFill/>
+          <a:ln/>
+        </p:spPr>
+        <p:txBody>
+          <a:bodyPr wrap="square" lIns="0" tIns="0" rIns="0" bIns="0" rtlCol="0" anchor="t"/>
+          <a:lstStyle/>
+          <a:p>
+            <a:pPr algn="l" indent="0" marL="0">
+              <a:lnSpc>
+                <a:spcPts val="1680"/>
+              </a:lnSpc>
+              <a:spcBef>
+                <a:spcPts val="300"/>
+              </a:spcBef>
+              <a:spcAft>
+                <a:spcPts val="300"/>
+              </a:spcAft>
+              <a:buNone/>
+            </a:pPr>
+            <a:r>
+              <a:rPr lang="en-US" sz="1200" dirty="0">
+                <a:solidFill>
+                  <a:srgbClr val="1C2833"/>
+                </a:solidFill>
+                <a:latin typeface="Arial" pitchFamily="34" charset="0"/>
+                <a:ea typeface="Arial" pitchFamily="34" charset="-122"/>
+                <a:cs typeface="Arial" pitchFamily="34" charset="-120"/>
+              </a:rPr>
+              <a:t>In pairs:</a:t>
+            </a:r>
+            <a:endParaRPr lang="en-US" sz="1200" dirty="0"/>
+          </a:p>
+        </p:txBody>
+      </p:sp>
+      <p:sp>
+        <p:nvSpPr>
+          <p:cNvPr id="5" name="Text 3"/>
+          <p:cNvSpPr/>
+          <p:nvPr/>
+        </p:nvSpPr>
+        <p:spPr>
+          <a:xfrm>
+            <a:off x="634901" y="1173063"/>
+            <a:ext cx="8102798" cy="1257002"/>
+          </a:xfrm>
+          <a:prstGeom prst="rect">
+            <a:avLst/>
+          </a:prstGeom>
+          <a:noFill/>
+          <a:ln/>
+        </p:spPr>
+        <p:txBody>
+          <a:bodyPr wrap="square" lIns="0" tIns="0" rIns="0" bIns="0" rtlCol="0" anchor="t"/>
+          <a:lstStyle/>
+          <a:p>
+            <a:pPr algn="l" marL="342900" indent="-342900">
+              <a:lnSpc>
+                <a:spcPts val="1620"/>
+              </a:lnSpc>
+              <a:spcAft>
+                <a:spcPts val="300"/>
+              </a:spcAft>
+              <a:buSzPct val="100000"/>
+              <a:buChar char="•"/>
+            </a:pPr>
+            <a:r>
+              <a:rPr lang="en-US" sz="1200" dirty="0">
+                <a:solidFill>
+                  <a:srgbClr val="1C2833"/>
+                </a:solidFill>
+                <a:latin typeface="Arial" pitchFamily="34" charset="0"/>
+                <a:ea typeface="Arial" pitchFamily="34" charset="-122"/>
+                <a:cs typeface="Arial" pitchFamily="34" charset="-120"/>
+              </a:rPr>
+              <a:t>Receive one printed </a:t>
+            </a:r>
+            <a:pPr algn="l" indent="0" marL="0">
+              <a:lnSpc>
+                <a:spcPts val="1620"/>
+              </a:lnSpc>
+              <a:spcAft>
+                <a:spcPts val="300"/>
+              </a:spcAft>
+              <a:buNone/>
+            </a:pPr>
+            <a:r>
+              <a:rPr lang="en-US" sz="1200" i="1" dirty="0">
+                <a:solidFill>
+                  <a:srgbClr val="1C2833"/>
+                </a:solidFill>
+                <a:latin typeface="Arial" pitchFamily="34" charset="0"/>
+                <a:ea typeface="Arial" pitchFamily="34" charset="-122"/>
+                <a:cs typeface="Arial" pitchFamily="34" charset="-120"/>
+              </a:rPr>
+              <a:t>pañcāṅga</a:t>
+            </a:r>
+            <a:pPr algn="l" indent="0" marL="0">
+              <a:lnSpc>
+                <a:spcPts val="1620"/>
+              </a:lnSpc>
+              <a:spcAft>
+                <a:spcPts val="300"/>
+              </a:spcAft>
+              <a:buNone/>
+            </a:pPr>
+            <a:r>
+              <a:rPr lang="en-US" sz="1200" dirty="0">
+                <a:solidFill>
+                  <a:srgbClr val="1C2833"/>
+                </a:solidFill>
+                <a:latin typeface="Arial" pitchFamily="34" charset="0"/>
+                <a:ea typeface="Arial" pitchFamily="34" charset="-122"/>
+                <a:cs typeface="Arial" pitchFamily="34" charset="-120"/>
+              </a:rPr>
+              <a:t> page for the current month.</a:t>
+            </a:r>
+            <a:endParaRPr lang="en-US" sz="1200" dirty="0"/>
+          </a:p>
+          <a:p>
+            <a:pPr algn="l" marL="342900" indent="-342900">
+              <a:lnSpc>
+                <a:spcPts val="1620"/>
+              </a:lnSpc>
+              <a:spcAft>
+                <a:spcPts val="300"/>
+              </a:spcAft>
+              <a:buSzPct val="100000"/>
+              <a:buChar char="•"/>
+            </a:pPr>
+            <a:r>
+              <a:rPr lang="en-US" sz="1200" dirty="0">
+                <a:solidFill>
+                  <a:srgbClr val="1C2833"/>
+                </a:solidFill>
+                <a:latin typeface="Arial" pitchFamily="34" charset="0"/>
+                <a:ea typeface="Arial" pitchFamily="34" charset="-122"/>
+                <a:cs typeface="Arial" pitchFamily="34" charset="-120"/>
+              </a:rPr>
+              <a:t>Fill in the blank calendar grid for every date of the month.</a:t>
+            </a:r>
+            <a:endParaRPr lang="en-US" sz="1200" dirty="0"/>
+          </a:p>
+          <a:p>
+            <a:pPr algn="l" marL="342900" indent="-342900">
+              <a:lnSpc>
+                <a:spcPts val="1620"/>
+              </a:lnSpc>
+              <a:spcAft>
+                <a:spcPts val="300"/>
+              </a:spcAft>
+              <a:buSzPct val="100000"/>
+              <a:buChar char="•"/>
+            </a:pPr>
+            <a:r>
+              <a:rPr lang="en-US" sz="1200" dirty="0">
+                <a:solidFill>
+                  <a:srgbClr val="1C2833"/>
+                </a:solidFill>
+                <a:latin typeface="Arial" pitchFamily="34" charset="0"/>
+                <a:ea typeface="Arial" pitchFamily="34" charset="-122"/>
+                <a:cs typeface="Arial" pitchFamily="34" charset="-120"/>
+              </a:rPr>
+              <a:t>Colour code: </a:t>
+            </a:r>
+            <a:pPr algn="l" indent="0" marL="0">
+              <a:lnSpc>
+                <a:spcPts val="1620"/>
+              </a:lnSpc>
+              <a:spcAft>
+                <a:spcPts val="300"/>
+              </a:spcAft>
+              <a:buNone/>
+            </a:pPr>
+            <a:r>
+              <a:rPr lang="en-US" sz="1200" i="1" dirty="0">
+                <a:solidFill>
+                  <a:srgbClr val="1C2833"/>
+                </a:solidFill>
+                <a:latin typeface="Arial" pitchFamily="34" charset="0"/>
+                <a:ea typeface="Arial" pitchFamily="34" charset="-122"/>
+                <a:cs typeface="Arial" pitchFamily="34" charset="-120"/>
+              </a:rPr>
+              <a:t>śukla pakṣa</a:t>
+            </a:r>
+            <a:pPr algn="l" indent="0" marL="0">
+              <a:lnSpc>
+                <a:spcPts val="1620"/>
+              </a:lnSpc>
+              <a:spcAft>
+                <a:spcPts val="300"/>
+              </a:spcAft>
+              <a:buNone/>
+            </a:pPr>
+            <a:r>
+              <a:rPr lang="en-US" sz="1200" dirty="0">
+                <a:solidFill>
+                  <a:srgbClr val="1C2833"/>
+                </a:solidFill>
+                <a:latin typeface="Arial" pitchFamily="34" charset="0"/>
+                <a:ea typeface="Arial" pitchFamily="34" charset="-122"/>
+                <a:cs typeface="Arial" pitchFamily="34" charset="-120"/>
+              </a:rPr>
+              <a:t> in yellow, </a:t>
+            </a:r>
+            <a:pPr algn="l" indent="0" marL="0">
+              <a:lnSpc>
+                <a:spcPts val="1620"/>
+              </a:lnSpc>
+              <a:spcAft>
+                <a:spcPts val="300"/>
+              </a:spcAft>
+              <a:buNone/>
+            </a:pPr>
+            <a:r>
+              <a:rPr lang="en-US" sz="1200" i="1" dirty="0">
+                <a:solidFill>
+                  <a:srgbClr val="1C2833"/>
+                </a:solidFill>
+                <a:latin typeface="Arial" pitchFamily="34" charset="0"/>
+                <a:ea typeface="Arial" pitchFamily="34" charset="-122"/>
+                <a:cs typeface="Arial" pitchFamily="34" charset="-120"/>
+              </a:rPr>
+              <a:t>kṛṣṇa pakṣa</a:t>
+            </a:r>
+            <a:pPr algn="l" indent="0" marL="0">
+              <a:lnSpc>
+                <a:spcPts val="1620"/>
+              </a:lnSpc>
+              <a:spcAft>
+                <a:spcPts val="300"/>
+              </a:spcAft>
+              <a:buNone/>
+            </a:pPr>
+            <a:r>
+              <a:rPr lang="en-US" sz="1200" dirty="0">
+                <a:solidFill>
+                  <a:srgbClr val="1C2833"/>
+                </a:solidFill>
+                <a:latin typeface="Arial" pitchFamily="34" charset="0"/>
+                <a:ea typeface="Arial" pitchFamily="34" charset="-122"/>
+                <a:cs typeface="Arial" pitchFamily="34" charset="-120"/>
+              </a:rPr>
+              <a:t> in grey/blue.</a:t>
+            </a:r>
+            <a:endParaRPr lang="en-US" sz="1200" dirty="0"/>
+          </a:p>
+          <a:p>
+            <a:pPr algn="l" marL="342900" indent="-342900">
+              <a:lnSpc>
+                <a:spcPts val="1620"/>
+              </a:lnSpc>
+              <a:spcAft>
+                <a:spcPts val="300"/>
+              </a:spcAft>
+              <a:buSzPct val="100000"/>
+              <a:buChar char="•"/>
+            </a:pPr>
+            <a:r>
+              <a:rPr lang="en-US" sz="1200" dirty="0">
+                <a:solidFill>
+                  <a:srgbClr val="1C2833"/>
+                </a:solidFill>
+                <a:latin typeface="Arial" pitchFamily="34" charset="0"/>
+                <a:ea typeface="Arial" pitchFamily="34" charset="-122"/>
+                <a:cs typeface="Arial" pitchFamily="34" charset="-120"/>
+              </a:rPr>
+              <a:t>Sketch a small Moon shape for each date (or every 3rd date if running short on time).</a:t>
+            </a:r>
+            <a:endParaRPr lang="en-US" sz="1200" dirty="0"/>
+          </a:p>
+          <a:p>
+            <a:pPr algn="l" marL="342900" indent="-342900">
+              <a:lnSpc>
+                <a:spcPts val="1620"/>
+              </a:lnSpc>
+              <a:spcAft>
+                <a:spcPts val="300"/>
+              </a:spcAft>
+              <a:buSzPct val="100000"/>
+              <a:buChar char="•"/>
+            </a:pPr>
+            <a:r>
+              <a:rPr lang="en-US" sz="1200" dirty="0">
+                <a:solidFill>
+                  <a:srgbClr val="1C2833"/>
+                </a:solidFill>
+                <a:latin typeface="Arial" pitchFamily="34" charset="0"/>
+                <a:ea typeface="Arial" pitchFamily="34" charset="-122"/>
+                <a:cs typeface="Arial" pitchFamily="34" charset="-120"/>
+              </a:rPr>
+              <a:t>Circle any </a:t>
+            </a:r>
+            <a:pPr algn="l" indent="0" marL="0">
+              <a:lnSpc>
+                <a:spcPts val="1620"/>
+              </a:lnSpc>
+              <a:spcAft>
+                <a:spcPts val="300"/>
+              </a:spcAft>
+              <a:buNone/>
+            </a:pPr>
+            <a:r>
+              <a:rPr lang="en-US" sz="1200" i="1" dirty="0">
+                <a:solidFill>
+                  <a:srgbClr val="1C2833"/>
+                </a:solidFill>
+                <a:latin typeface="Arial" pitchFamily="34" charset="0"/>
+                <a:ea typeface="Arial" pitchFamily="34" charset="-122"/>
+                <a:cs typeface="Arial" pitchFamily="34" charset="-120"/>
+              </a:rPr>
+              <a:t>amāvasyā</a:t>
+            </a:r>
+            <a:pPr algn="l" indent="0" marL="0">
+              <a:lnSpc>
+                <a:spcPts val="1620"/>
+              </a:lnSpc>
+              <a:spcAft>
+                <a:spcPts val="300"/>
+              </a:spcAft>
+              <a:buNone/>
+            </a:pPr>
+            <a:r>
+              <a:rPr lang="en-US" sz="1200" dirty="0">
+                <a:solidFill>
+                  <a:srgbClr val="1C2833"/>
+                </a:solidFill>
+                <a:latin typeface="Arial" pitchFamily="34" charset="0"/>
+                <a:ea typeface="Arial" pitchFamily="34" charset="-122"/>
+                <a:cs typeface="Arial" pitchFamily="34" charset="-120"/>
+              </a:rPr>
+              <a:t> and </a:t>
+            </a:r>
+            <a:pPr algn="l" indent="0" marL="0">
+              <a:lnSpc>
+                <a:spcPts val="1620"/>
+              </a:lnSpc>
+              <a:spcAft>
+                <a:spcPts val="300"/>
+              </a:spcAft>
+              <a:buNone/>
+            </a:pPr>
+            <a:r>
+              <a:rPr lang="en-US" sz="1200" i="1" dirty="0">
+                <a:solidFill>
+                  <a:srgbClr val="1C2833"/>
+                </a:solidFill>
+                <a:latin typeface="Arial" pitchFamily="34" charset="0"/>
+                <a:ea typeface="Arial" pitchFamily="34" charset="-122"/>
+                <a:cs typeface="Arial" pitchFamily="34" charset="-120"/>
+              </a:rPr>
+              <a:t>pūrṇimā</a:t>
+            </a:r>
+            <a:pPr algn="l" indent="0" marL="0">
+              <a:lnSpc>
+                <a:spcPts val="1620"/>
+              </a:lnSpc>
+              <a:spcAft>
+                <a:spcPts val="300"/>
+              </a:spcAft>
+              <a:buNone/>
+            </a:pPr>
+            <a:r>
+              <a:rPr lang="en-US" sz="1200" dirty="0">
+                <a:solidFill>
+                  <a:srgbClr val="1C2833"/>
+                </a:solidFill>
+                <a:latin typeface="Arial" pitchFamily="34" charset="0"/>
+                <a:ea typeface="Arial" pitchFamily="34" charset="-122"/>
+                <a:cs typeface="Arial" pitchFamily="34" charset="-120"/>
+              </a:rPr>
+              <a:t>.</a:t>
+            </a:r>
+            <a:endParaRPr lang="en-US" sz="1200" dirty="0"/>
+          </a:p>
+        </p:txBody>
+      </p:sp>
+      <p:sp>
+        <p:nvSpPr>
+          <p:cNvPr id="6" name="Text 4"/>
+          <p:cNvSpPr/>
+          <p:nvPr/>
+        </p:nvSpPr>
+        <p:spPr>
+          <a:xfrm>
+            <a:off x="406301" y="4434929"/>
+            <a:ext cx="8498026" cy="213271"/>
+          </a:xfrm>
+          <a:prstGeom prst="rect">
+            <a:avLst/>
+          </a:prstGeom>
+          <a:noFill/>
+          <a:ln/>
+        </p:spPr>
+        <p:txBody>
+          <a:bodyPr wrap="square" lIns="0" tIns="0" rIns="0" bIns="0" rtlCol="0" anchor="t"/>
+          <a:lstStyle/>
+          <a:p>
+            <a:pPr algn="l" indent="0" marL="0">
+              <a:lnSpc>
+                <a:spcPts val="1680"/>
+              </a:lnSpc>
+              <a:spcBef>
+                <a:spcPts val="300"/>
+              </a:spcBef>
+              <a:spcAft>
+                <a:spcPts val="300"/>
+              </a:spcAft>
+              <a:buNone/>
+            </a:pPr>
+            <a:r>
+              <a:rPr lang="en-US" sz="1200" dirty="0">
+                <a:solidFill>
+                  <a:srgbClr val="1C2833"/>
+                </a:solidFill>
+                <a:latin typeface="Arial" pitchFamily="34" charset="0"/>
+                <a:ea typeface="Arial" pitchFamily="34" charset="-122"/>
+                <a:cs typeface="Arial" pitchFamily="34" charset="-120"/>
+              </a:rPr>
+              <a:t>Middle ·  · IKS Curriculum</a:t>
+            </a:r>
+            <a:endParaRPr lang="en-US" sz="1200" dirty="0"/>
+          </a:p>
+        </p:txBody>
+      </p:sp>
+    </p:spTree>
+  </p:cSld>
+  <p:clrMapOvr>
+    <a:masterClrMapping/>
+  </p:clrMapOvr>
+</p:sld>
+</file>
+
+<file path=ppt/slides/slide14.xml><?xml version="1.0" encoding="utf-8"?>
+<p:sld xmlns:a="http://schemas.openxmlformats.org/drawingml/2006/main" xmlns:r="http://schemas.openxmlformats.org/officeDocument/2006/relationships" xmlns:p="http://schemas.openxmlformats.org/presentationml/2006/main">
+  <p:cSld name="Slide 14">
+    <p:bg>
+      <p:bgPr>
+        <a:solidFill>
+          <a:srgbClr val="FFFFFF"/>
+        </a:solidFill>
+      </p:bgPr>
+    </p:bg>
+    <p:spTree>
+      <p:nvGrpSpPr>
+        <p:cNvPr id="1" name=""/>
+        <p:cNvGrpSpPr/>
+        <p:nvPr/>
+      </p:nvGrpSpPr>
+      <p:grpSpPr>
+        <a:xfrm>
+          <a:off x="0" y="0"/>
+          <a:ext cx="0" cy="0"/>
+          <a:chOff x="0" y="0"/>
+          <a:chExt cx="0" cy="0"/>
+        </a:xfrm>
+      </p:grpSpPr>
+      <p:sp>
+        <p:nvSpPr>
+          <p:cNvPr id="2" name="Text 0"/>
+          <p:cNvSpPr/>
+          <p:nvPr/>
+        </p:nvSpPr>
+        <p:spPr>
+          <a:xfrm>
+            <a:off x="0" y="0"/>
+            <a:ext cx="9144000" cy="101501"/>
+          </a:xfrm>
+          <a:prstGeom prst="rect">
+            <a:avLst/>
+          </a:prstGeom>
+          <a:solidFill>
+            <a:srgbClr val="277884"/>
+          </a:solidFill>
+          <a:ln/>
+        </p:spPr>
+        <p:txBody>
+          <a:bodyPr wrap="square" rtlCol="0" anchor="ctr"/>
+          <a:lstStyle/>
+          <a:p>
+            <a:pPr indent="0" marL="0">
+              <a:buNone/>
+            </a:pPr>
+            <a:endParaRPr lang="en-US" dirty="0"/>
+          </a:p>
+        </p:txBody>
+      </p:sp>
+      <p:sp>
+        <p:nvSpPr>
+          <p:cNvPr id="3" name="Text 1"/>
+          <p:cNvSpPr/>
+          <p:nvPr/>
+        </p:nvSpPr>
+        <p:spPr>
+          <a:xfrm>
+            <a:off x="406301" y="457051"/>
+            <a:ext cx="8498026" cy="274290"/>
+          </a:xfrm>
+          <a:prstGeom prst="rect">
+            <a:avLst/>
+          </a:prstGeom>
+          <a:noFill/>
+          <a:ln/>
+        </p:spPr>
+        <p:txBody>
+          <a:bodyPr wrap="square" lIns="0" tIns="0" rIns="0" bIns="0" rtlCol="0" anchor="t"/>
+          <a:lstStyle/>
+          <a:p>
+            <a:pPr algn="l" indent="0" marL="0">
+              <a:lnSpc>
+                <a:spcPts val="2160"/>
+              </a:lnSpc>
+              <a:spcBef>
+                <a:spcPts val="600"/>
+              </a:spcBef>
+              <a:spcAft>
+                <a:spcPts val="800"/>
+              </a:spcAft>
+              <a:buNone/>
+            </a:pPr>
+            <a:r>
+              <a:rPr lang="en-US" sz="1800" b="1" dirty="0">
+                <a:solidFill>
+                  <a:srgbClr val="FE4447"/>
+                </a:solidFill>
+                <a:latin typeface="Georgia" pitchFamily="34" charset="0"/>
+                <a:ea typeface="Georgia" pitchFamily="34" charset="-122"/>
+                <a:cs typeface="Georgia" pitchFamily="34" charset="-120"/>
+              </a:rPr>
+              <a:t>Activity (20 min) — Build the calendar (cont.)</a:t>
             </a:r>
             <a:endParaRPr lang="en-US" sz="1800" dirty="0"/>
           </a:p>
@@ -3556,7 +4517,7 @@
                 <a:ea typeface="Arial" pitchFamily="34" charset="-122"/>
                 <a:cs typeface="Arial" pitchFamily="34" charset="-120"/>
               </a:rPr>
-              <a:t>– The class </a:t>
+              <a:t>Walk around. The most common error: students copy the wrong column from the </a:t>
             </a:r>
             <a:pPr algn="l" indent="0" marL="0">
               <a:lnSpc>
@@ -3602,8 +4563,33 @@
                 <a:ea typeface="Arial" pitchFamily="34" charset="-122"/>
                 <a:cs typeface="Arial" pitchFamily="34" charset="-120"/>
               </a:rPr>
-              <a:t> source (named on the board): use this consistently. The data is computed using the same astronomical principles described in the </a:t>
-            </a:r>
+              <a:t>. Have them double-check 2–3 entries with you.</a:t>
+            </a:r>
+            <a:endParaRPr lang="en-US" sz="1200" dirty="0"/>
+          </a:p>
+        </p:txBody>
+      </p:sp>
+      <p:sp>
+        <p:nvSpPr>
+          <p:cNvPr id="5" name="Text 3"/>
+          <p:cNvSpPr/>
+          <p:nvPr/>
+        </p:nvSpPr>
+        <p:spPr>
+          <a:xfrm>
+            <a:off x="406301" y="4434929"/>
+            <a:ext cx="8498026" cy="213271"/>
+          </a:xfrm>
+          <a:prstGeom prst="rect">
+            <a:avLst/>
+          </a:prstGeom>
+          <a:noFill/>
+          <a:ln/>
+        </p:spPr>
+        <p:txBody>
+          <a:bodyPr wrap="square" lIns="0" tIns="0" rIns="0" bIns="0" rtlCol="0" anchor="t"/>
+          <a:lstStyle/>
+          <a:p>
             <a:pPr algn="l" indent="0" marL="0">
               <a:lnSpc>
                 <a:spcPts val="1680"/>
@@ -3617,6 +4603,226 @@
               <a:buNone/>
             </a:pPr>
             <a:r>
+              <a:rPr lang="en-US" sz="1200" dirty="0">
+                <a:solidFill>
+                  <a:srgbClr val="1C2833"/>
+                </a:solidFill>
+                <a:latin typeface="Arial" pitchFamily="34" charset="0"/>
+                <a:ea typeface="Arial" pitchFamily="34" charset="-122"/>
+                <a:cs typeface="Arial" pitchFamily="34" charset="-120"/>
+              </a:rPr>
+              <a:t>Middle ·  · IKS Curriculum</a:t>
+            </a:r>
+            <a:endParaRPr lang="en-US" sz="1200" dirty="0"/>
+          </a:p>
+        </p:txBody>
+      </p:sp>
+    </p:spTree>
+  </p:cSld>
+  <p:clrMapOvr>
+    <a:masterClrMapping/>
+  </p:clrMapOvr>
+</p:sld>
+</file>
+
+<file path=ppt/slides/slide15.xml><?xml version="1.0" encoding="utf-8"?>
+<p:sld xmlns:a="http://schemas.openxmlformats.org/drawingml/2006/main" xmlns:r="http://schemas.openxmlformats.org/officeDocument/2006/relationships" xmlns:p="http://schemas.openxmlformats.org/presentationml/2006/main">
+  <p:cSld name="Slide 15">
+    <p:bg>
+      <p:bgPr>
+        <a:solidFill>
+          <a:srgbClr val="FFFFFF"/>
+        </a:solidFill>
+      </p:bgPr>
+    </p:bg>
+    <p:spTree>
+      <p:nvGrpSpPr>
+        <p:cNvPr id="1" name=""/>
+        <p:cNvGrpSpPr/>
+        <p:nvPr/>
+      </p:nvGrpSpPr>
+      <p:grpSpPr>
+        <a:xfrm>
+          <a:off x="0" y="0"/>
+          <a:ext cx="0" cy="0"/>
+          <a:chOff x="0" y="0"/>
+          <a:chExt cx="0" cy="0"/>
+        </a:xfrm>
+      </p:grpSpPr>
+      <p:sp>
+        <p:nvSpPr>
+          <p:cNvPr id="2" name="Text 0"/>
+          <p:cNvSpPr/>
+          <p:nvPr/>
+        </p:nvSpPr>
+        <p:spPr>
+          <a:xfrm>
+            <a:off x="0" y="0"/>
+            <a:ext cx="9144000" cy="101501"/>
+          </a:xfrm>
+          <a:prstGeom prst="rect">
+            <a:avLst/>
+          </a:prstGeom>
+          <a:solidFill>
+            <a:srgbClr val="277884"/>
+          </a:solidFill>
+          <a:ln/>
+        </p:spPr>
+        <p:txBody>
+          <a:bodyPr wrap="square" rtlCol="0" anchor="ctr"/>
+          <a:lstStyle/>
+          <a:p>
+            <a:pPr indent="0" marL="0">
+              <a:buNone/>
+            </a:pPr>
+            <a:endParaRPr lang="en-US" dirty="0"/>
+          </a:p>
+        </p:txBody>
+      </p:sp>
+      <p:sp>
+        <p:nvSpPr>
+          <p:cNvPr id="3" name="Text 1"/>
+          <p:cNvSpPr/>
+          <p:nvPr/>
+        </p:nvSpPr>
+        <p:spPr>
+          <a:xfrm>
+            <a:off x="406301" y="457051"/>
+            <a:ext cx="8498026" cy="274290"/>
+          </a:xfrm>
+          <a:prstGeom prst="rect">
+            <a:avLst/>
+          </a:prstGeom>
+          <a:noFill/>
+          <a:ln/>
+        </p:spPr>
+        <p:txBody>
+          <a:bodyPr wrap="square" lIns="0" tIns="0" rIns="0" bIns="0" rtlCol="0" anchor="t"/>
+          <a:lstStyle/>
+          <a:p>
+            <a:pPr algn="l" indent="0" marL="0">
+              <a:lnSpc>
+                <a:spcPts val="2160"/>
+              </a:lnSpc>
+              <a:spcBef>
+                <a:spcPts val="600"/>
+              </a:spcBef>
+              <a:spcAft>
+                <a:spcPts val="800"/>
+              </a:spcAft>
+              <a:buNone/>
+            </a:pPr>
+            <a:r>
+              <a:rPr lang="en-US" sz="1800" b="1" dirty="0">
+                <a:solidFill>
+                  <a:srgbClr val="FE4447"/>
+                </a:solidFill>
+                <a:latin typeface="Georgia" pitchFamily="34" charset="0"/>
+                <a:ea typeface="Georgia" pitchFamily="34" charset="-122"/>
+                <a:cs typeface="Georgia" pitchFamily="34" charset="-120"/>
+              </a:rPr>
+              <a:t>Wrap-up (5 min)</a:t>
+            </a:r>
+            <a:endParaRPr lang="en-US" sz="1800" dirty="0"/>
+          </a:p>
+        </p:txBody>
+      </p:sp>
+      <p:sp>
+        <p:nvSpPr>
+          <p:cNvPr id="4" name="Text 2"/>
+          <p:cNvSpPr/>
+          <p:nvPr/>
+        </p:nvSpPr>
+        <p:spPr>
+          <a:xfrm>
+            <a:off x="634901" y="883593"/>
+            <a:ext cx="8102798" cy="769441"/>
+          </a:xfrm>
+          <a:prstGeom prst="rect">
+            <a:avLst/>
+          </a:prstGeom>
+          <a:noFill/>
+          <a:ln/>
+        </p:spPr>
+        <p:txBody>
+          <a:bodyPr wrap="square" lIns="0" tIns="0" rIns="0" bIns="0" rtlCol="0" anchor="t"/>
+          <a:lstStyle/>
+          <a:p>
+            <a:pPr algn="l" marL="342900" indent="-342900">
+              <a:lnSpc>
+                <a:spcPts val="1620"/>
+              </a:lnSpc>
+              <a:spcAft>
+                <a:spcPts val="300"/>
+              </a:spcAft>
+              <a:buSzPct val="100000"/>
+              <a:buChar char="•"/>
+            </a:pPr>
+            <a:r>
+              <a:rPr lang="en-US" sz="1200" dirty="0">
+                <a:solidFill>
+                  <a:srgbClr val="1C2833"/>
+                </a:solidFill>
+                <a:latin typeface="Arial" pitchFamily="34" charset="0"/>
+                <a:ea typeface="Arial" pitchFamily="34" charset="-122"/>
+                <a:cs typeface="Arial" pitchFamily="34" charset="-120"/>
+              </a:rPr>
+              <a:t>Pairs hold up their finished calendars briefly. The teacher takes a quick scan.</a:t>
+            </a:r>
+            <a:endParaRPr lang="en-US" sz="1200" dirty="0"/>
+          </a:p>
+          <a:p>
+            <a:pPr algn="l" marL="342900" indent="-342900">
+              <a:lnSpc>
+                <a:spcPts val="1620"/>
+              </a:lnSpc>
+              <a:spcAft>
+                <a:spcPts val="300"/>
+              </a:spcAft>
+              <a:buSzPct val="100000"/>
+              <a:buChar char="•"/>
+            </a:pPr>
+            <a:r>
+              <a:rPr lang="en-US" sz="1200" b="1" dirty="0">
+                <a:solidFill>
+                  <a:srgbClr val="1C2833"/>
+                </a:solidFill>
+                <a:latin typeface="Arial" pitchFamily="34" charset="0"/>
+                <a:ea typeface="Arial" pitchFamily="34" charset="-122"/>
+                <a:cs typeface="Arial" pitchFamily="34" charset="-120"/>
+              </a:rPr>
+              <a:t>Exit question (1 min, oral):</a:t>
+            </a:r>
+            <a:pPr algn="l" indent="0" marL="0">
+              <a:lnSpc>
+                <a:spcPts val="1620"/>
+              </a:lnSpc>
+              <a:spcAft>
+                <a:spcPts val="300"/>
+              </a:spcAft>
+              <a:buNone/>
+            </a:pPr>
+            <a:r>
+              <a:rPr lang="en-US" sz="1200" dirty="0">
+                <a:solidFill>
+                  <a:srgbClr val="1C2833"/>
+                </a:solidFill>
+                <a:latin typeface="Arial" pitchFamily="34" charset="0"/>
+                <a:ea typeface="Arial" pitchFamily="34" charset="-122"/>
+                <a:cs typeface="Arial" pitchFamily="34" charset="-120"/>
+              </a:rPr>
+              <a:t> </a:t>
+            </a:r>
+            <a:pPr algn="l" indent="0" marL="0">
+              <a:lnSpc>
+                <a:spcPts val="1620"/>
+              </a:lnSpc>
+              <a:spcAft>
+                <a:spcPts val="300"/>
+              </a:spcAft>
+              <a:buNone/>
+            </a:pPr>
+            <a:r>
               <a:rPr lang="en-US" sz="1200" i="1" dirty="0">
                 <a:solidFill>
                   <a:srgbClr val="1C2833"/>
@@ -3625,8 +4831,157 @@
                 <a:ea typeface="Arial" pitchFamily="34" charset="-122"/>
                 <a:cs typeface="Arial" pitchFamily="34" charset="-120"/>
               </a:rPr>
-              <a:t>Sūrya-siddhānta</a:t>
-            </a:r>
+              <a:t>"Which date this month is</a:t>
+            </a:r>
+            <a:pPr algn="l" indent="0" marL="0">
+              <a:lnSpc>
+                <a:spcPts val="1620"/>
+              </a:lnSpc>
+              <a:spcAft>
+                <a:spcPts val="300"/>
+              </a:spcAft>
+              <a:buNone/>
+            </a:pPr>
+            <a:r>
+              <a:rPr lang="en-US" sz="1200" dirty="0">
+                <a:solidFill>
+                  <a:srgbClr val="1C2833"/>
+                </a:solidFill>
+                <a:latin typeface="Arial" pitchFamily="34" charset="0"/>
+                <a:ea typeface="Arial" pitchFamily="34" charset="-122"/>
+                <a:cs typeface="Arial" pitchFamily="34" charset="-120"/>
+              </a:rPr>
+              <a:t>pūrṇimā</a:t>
+            </a:r>
+            <a:pPr algn="l" indent="0" marL="0">
+              <a:lnSpc>
+                <a:spcPts val="1620"/>
+              </a:lnSpc>
+              <a:spcAft>
+                <a:spcPts val="300"/>
+              </a:spcAft>
+              <a:buNone/>
+            </a:pPr>
+            <a:r>
+              <a:rPr lang="en-US" sz="1200" i="1" dirty="0">
+                <a:solidFill>
+                  <a:srgbClr val="1C2833"/>
+                </a:solidFill>
+                <a:latin typeface="Arial" pitchFamily="34" charset="0"/>
+                <a:ea typeface="Arial" pitchFamily="34" charset="-122"/>
+                <a:cs typeface="Arial" pitchFamily="34" charset="-120"/>
+              </a:rPr>
+              <a:t>?"</a:t>
+            </a:r>
+            <a:pPr algn="l" indent="0" marL="0">
+              <a:lnSpc>
+                <a:spcPts val="1620"/>
+              </a:lnSpc>
+              <a:spcAft>
+                <a:spcPts val="300"/>
+              </a:spcAft>
+              <a:buNone/>
+            </a:pPr>
+            <a:r>
+              <a:rPr lang="en-US" sz="1200" dirty="0">
+                <a:solidFill>
+                  <a:srgbClr val="1C2833"/>
+                </a:solidFill>
+                <a:latin typeface="Arial" pitchFamily="34" charset="0"/>
+                <a:ea typeface="Arial" pitchFamily="34" charset="-122"/>
+                <a:cs typeface="Arial" pitchFamily="34" charset="-120"/>
+              </a:rPr>
+              <a:t> Class answers in chorus.</a:t>
+            </a:r>
+            <a:endParaRPr lang="en-US" sz="1200" dirty="0"/>
+          </a:p>
+          <a:p>
+            <a:pPr algn="l" marL="342900" indent="-342900">
+              <a:lnSpc>
+                <a:spcPts val="1620"/>
+              </a:lnSpc>
+              <a:spcAft>
+                <a:spcPts val="300"/>
+              </a:spcAft>
+              <a:buSzPct val="100000"/>
+              <a:buChar char="•"/>
+            </a:pPr>
+            <a:r>
+              <a:rPr lang="en-US" sz="1200" b="1" dirty="0">
+                <a:solidFill>
+                  <a:srgbClr val="1C2833"/>
+                </a:solidFill>
+                <a:latin typeface="Arial" pitchFamily="34" charset="0"/>
+                <a:ea typeface="Arial" pitchFamily="34" charset="-122"/>
+                <a:cs typeface="Arial" pitchFamily="34" charset="-120"/>
+              </a:rPr>
+              <a:t>Preview Day 5:</a:t>
+            </a:r>
+            <a:pPr algn="l" indent="0" marL="0">
+              <a:lnSpc>
+                <a:spcPts val="1620"/>
+              </a:lnSpc>
+              <a:spcAft>
+                <a:spcPts val="300"/>
+              </a:spcAft>
+              <a:buNone/>
+            </a:pPr>
+            <a:r>
+              <a:rPr lang="en-US" sz="1200" dirty="0">
+                <a:solidFill>
+                  <a:srgbClr val="1C2833"/>
+                </a:solidFill>
+                <a:latin typeface="Arial" pitchFamily="34" charset="0"/>
+                <a:ea typeface="Arial" pitchFamily="34" charset="-122"/>
+                <a:cs typeface="Arial" pitchFamily="34" charset="-120"/>
+              </a:rPr>
+              <a:t> </a:t>
+            </a:r>
+            <a:pPr algn="l" indent="0" marL="0">
+              <a:lnSpc>
+                <a:spcPts val="1620"/>
+              </a:lnSpc>
+              <a:spcAft>
+                <a:spcPts val="300"/>
+              </a:spcAft>
+              <a:buNone/>
+            </a:pPr>
+            <a:r>
+              <a:rPr lang="en-US" sz="1200" i="1" dirty="0">
+                <a:solidFill>
+                  <a:srgbClr val="1C2833"/>
+                </a:solidFill>
+                <a:latin typeface="Arial" pitchFamily="34" charset="0"/>
+                <a:ea typeface="Arial" pitchFamily="34" charset="-122"/>
+                <a:cs typeface="Arial" pitchFamily="34" charset="-120"/>
+              </a:rPr>
+              <a:t>"Tomorrow we name the 12 lunar months and link them to festivals."</a:t>
+            </a:r>
+            <a:endParaRPr lang="en-US" sz="1200" dirty="0"/>
+          </a:p>
+        </p:txBody>
+      </p:sp>
+      <p:sp>
+        <p:nvSpPr>
+          <p:cNvPr id="5" name="Text 3"/>
+          <p:cNvSpPr/>
+          <p:nvPr/>
+        </p:nvSpPr>
+        <p:spPr>
+          <a:xfrm>
+            <a:off x="406301" y="4434929"/>
+            <a:ext cx="8498026" cy="213271"/>
+          </a:xfrm>
+          <a:prstGeom prst="rect">
+            <a:avLst/>
+          </a:prstGeom>
+          <a:noFill/>
+          <a:ln/>
+        </p:spPr>
+        <p:txBody>
+          <a:bodyPr wrap="square" lIns="0" tIns="0" rIns="0" bIns="0" rtlCol="0" anchor="t"/>
+          <a:lstStyle/>
+          <a:p>
             <a:pPr algn="l" indent="0" marL="0">
               <a:lnSpc>
                 <a:spcPts val="1680"/>
@@ -3648,7 +5003,1915 @@
                 <a:ea typeface="Arial" pitchFamily="34" charset="-122"/>
                 <a:cs typeface="Arial" pitchFamily="34" charset="-120"/>
               </a:rPr>
-              <a:t> — paraphrased only; no verse cited.</a:t>
+              <a:t>Middle ·  · IKS Curriculum</a:t>
+            </a:r>
+            <a:endParaRPr lang="en-US" sz="1200" dirty="0"/>
+          </a:p>
+        </p:txBody>
+      </p:sp>
+    </p:spTree>
+  </p:cSld>
+  <p:clrMapOvr>
+    <a:masterClrMapping/>
+  </p:clrMapOvr>
+</p:sld>
+</file>
+
+<file path=ppt/slides/slide16.xml><?xml version="1.0" encoding="utf-8"?>
+<p:sld xmlns:a="http://schemas.openxmlformats.org/drawingml/2006/main" xmlns:r="http://schemas.openxmlformats.org/officeDocument/2006/relationships" xmlns:p="http://schemas.openxmlformats.org/presentationml/2006/main">
+  <p:cSld name="Slide 16">
+    <p:bg>
+      <p:bgPr>
+        <a:solidFill>
+          <a:srgbClr val="FFFFFF"/>
+        </a:solidFill>
+      </p:bgPr>
+    </p:bg>
+    <p:spTree>
+      <p:nvGrpSpPr>
+        <p:cNvPr id="1" name=""/>
+        <p:cNvGrpSpPr/>
+        <p:nvPr/>
+      </p:nvGrpSpPr>
+      <p:grpSpPr>
+        <a:xfrm>
+          <a:off x="0" y="0"/>
+          <a:ext cx="0" cy="0"/>
+          <a:chOff x="0" y="0"/>
+          <a:chExt cx="0" cy="0"/>
+        </a:xfrm>
+      </p:grpSpPr>
+      <p:sp>
+        <p:nvSpPr>
+          <p:cNvPr id="2" name="Text 0"/>
+          <p:cNvSpPr/>
+          <p:nvPr/>
+        </p:nvSpPr>
+        <p:spPr>
+          <a:xfrm>
+            <a:off x="0" y="0"/>
+            <a:ext cx="9144000" cy="101501"/>
+          </a:xfrm>
+          <a:prstGeom prst="rect">
+            <a:avLst/>
+          </a:prstGeom>
+          <a:solidFill>
+            <a:srgbClr val="277884"/>
+          </a:solidFill>
+          <a:ln/>
+        </p:spPr>
+        <p:txBody>
+          <a:bodyPr wrap="square" rtlCol="0" anchor="ctr"/>
+          <a:lstStyle/>
+          <a:p>
+            <a:pPr indent="0" marL="0">
+              <a:buNone/>
+            </a:pPr>
+            <a:endParaRPr lang="en-US" dirty="0"/>
+          </a:p>
+        </p:txBody>
+      </p:sp>
+      <p:sp>
+        <p:nvSpPr>
+          <p:cNvPr id="3" name="Text 1"/>
+          <p:cNvSpPr/>
+          <p:nvPr/>
+        </p:nvSpPr>
+        <p:spPr>
+          <a:xfrm>
+            <a:off x="406301" y="457051"/>
+            <a:ext cx="8498026" cy="274290"/>
+          </a:xfrm>
+          <a:prstGeom prst="rect">
+            <a:avLst/>
+          </a:prstGeom>
+          <a:noFill/>
+          <a:ln/>
+        </p:spPr>
+        <p:txBody>
+          <a:bodyPr wrap="square" lIns="0" tIns="0" rIns="0" bIns="0" rtlCol="0" anchor="t"/>
+          <a:lstStyle/>
+          <a:p>
+            <a:pPr algn="l" indent="0" marL="0">
+              <a:lnSpc>
+                <a:spcPts val="2160"/>
+              </a:lnSpc>
+              <a:spcBef>
+                <a:spcPts val="600"/>
+              </a:spcBef>
+              <a:spcAft>
+                <a:spcPts val="800"/>
+              </a:spcAft>
+              <a:buNone/>
+            </a:pPr>
+            <a:r>
+              <a:rPr lang="en-US" sz="1800" b="1" dirty="0">
+                <a:solidFill>
+                  <a:srgbClr val="FE4447"/>
+                </a:solidFill>
+                <a:latin typeface="Georgia" pitchFamily="34" charset="0"/>
+                <a:ea typeface="Georgia" pitchFamily="34" charset="-122"/>
+                <a:cs typeface="Georgia" pitchFamily="34" charset="-120"/>
+              </a:rPr>
+              <a:t>Student-facing content</a:t>
+            </a:r>
+            <a:endParaRPr lang="en-US" sz="1800" dirty="0"/>
+          </a:p>
+        </p:txBody>
+      </p:sp>
+      <p:sp>
+        <p:nvSpPr>
+          <p:cNvPr id="4" name="Text 2"/>
+          <p:cNvSpPr/>
+          <p:nvPr/>
+        </p:nvSpPr>
+        <p:spPr>
+          <a:xfrm>
+            <a:off x="406301" y="883593"/>
+            <a:ext cx="8331398" cy="3226594"/>
+          </a:xfrm>
+          <a:prstGeom prst="rect">
+            <a:avLst/>
+          </a:prstGeom>
+          <a:solidFill>
+            <a:srgbClr val="F4F8F9"/>
+          </a:solidFill>
+          <a:ln/>
+        </p:spPr>
+        <p:txBody>
+          <a:bodyPr wrap="square" rtlCol="0" anchor="ctr"/>
+          <a:lstStyle/>
+          <a:p>
+            <a:pPr indent="0" marL="0">
+              <a:buNone/>
+            </a:pPr>
+            <a:endParaRPr lang="en-US" dirty="0"/>
+          </a:p>
+        </p:txBody>
+      </p:sp>
+      <p:sp>
+        <p:nvSpPr>
+          <p:cNvPr id="5" name="Shape 3"/>
+          <p:cNvSpPr/>
+          <p:nvPr/>
+        </p:nvSpPr>
+        <p:spPr>
+          <a:xfrm>
+            <a:off x="434876" y="883593"/>
+            <a:ext cx="0" cy="3226594"/>
+          </a:xfrm>
+          <a:prstGeom prst="line">
+            <a:avLst/>
+          </a:prstGeom>
+          <a:noFill/>
+          <a:ln w="57150">
+            <a:solidFill>
+              <a:srgbClr val="FE4447"/>
+            </a:solidFill>
+            <a:prstDash val="solid"/>
+          </a:ln>
+        </p:spPr>
+      </p:sp>
+      <p:sp>
+        <p:nvSpPr>
+          <p:cNvPr id="6" name="Text 4"/>
+          <p:cNvSpPr/>
+          <p:nvPr/>
+        </p:nvSpPr>
+        <p:spPr>
+          <a:xfrm>
+            <a:off x="692051" y="1074093"/>
+            <a:ext cx="7973389" cy="230981"/>
+          </a:xfrm>
+          <a:prstGeom prst="rect">
+            <a:avLst/>
+          </a:prstGeom>
+          <a:noFill/>
+          <a:ln/>
+        </p:spPr>
+        <p:txBody>
+          <a:bodyPr wrap="square" lIns="0" tIns="0" rIns="0" bIns="0" rtlCol="0" anchor="t"/>
+          <a:lstStyle/>
+          <a:p>
+            <a:pPr algn="l" indent="0" marL="0">
+              <a:lnSpc>
+                <a:spcPts val="1820"/>
+              </a:lnSpc>
+              <a:spcBef>
+                <a:spcPts val="300"/>
+              </a:spcBef>
+              <a:spcAft>
+                <a:spcPts val="300"/>
+              </a:spcAft>
+              <a:buNone/>
+            </a:pPr>
+            <a:r>
+              <a:rPr lang="en-US" sz="1300" b="1" i="1" dirty="0">
+                <a:solidFill>
+                  <a:srgbClr val="1C2833"/>
+                </a:solidFill>
+                <a:latin typeface="Georgia" pitchFamily="34" charset="0"/>
+                <a:ea typeface="Georgia" pitchFamily="34" charset="-122"/>
+                <a:cs typeface="Georgia" pitchFamily="34" charset="-120"/>
+              </a:rPr>
+              <a:t>Today you built a tithi calendar.</a:t>
+            </a:r>
+            <a:endParaRPr lang="en-US" sz="1300" dirty="0"/>
+          </a:p>
+        </p:txBody>
+      </p:sp>
+      <p:sp>
+        <p:nvSpPr>
+          <p:cNvPr id="7" name="Text 5"/>
+          <p:cNvSpPr/>
+          <p:nvPr/>
+        </p:nvSpPr>
+        <p:spPr>
+          <a:xfrm>
+            <a:off x="692051" y="1343174"/>
+            <a:ext cx="7973389" cy="230981"/>
+          </a:xfrm>
+          <a:prstGeom prst="rect">
+            <a:avLst/>
+          </a:prstGeom>
+          <a:noFill/>
+          <a:ln/>
+        </p:spPr>
+        <p:txBody>
+          <a:bodyPr wrap="square" lIns="0" tIns="0" rIns="0" bIns="0" rtlCol="0" anchor="t"/>
+          <a:lstStyle/>
+          <a:p>
+            <a:pPr algn="l" indent="0" marL="0">
+              <a:lnSpc>
+                <a:spcPts val="1820"/>
+              </a:lnSpc>
+              <a:spcBef>
+                <a:spcPts val="300"/>
+              </a:spcBef>
+              <a:spcAft>
+                <a:spcPts val="300"/>
+              </a:spcAft>
+              <a:buNone/>
+            </a:pPr>
+            <a:r>
+              <a:rPr lang="en-US" sz="1300" i="1" dirty="0">
+                <a:solidFill>
+                  <a:srgbClr val="1C2833"/>
+                </a:solidFill>
+                <a:latin typeface="Georgia" pitchFamily="34" charset="0"/>
+                <a:ea typeface="Georgia" pitchFamily="34" charset="-122"/>
+                <a:cs typeface="Georgia" pitchFamily="34" charset="-120"/>
+              </a:rPr>
+              <a:t>A tithi calendar links each date in a calendar month to:</a:t>
+            </a:r>
+            <a:endParaRPr lang="en-US" sz="1300" dirty="0"/>
+          </a:p>
+        </p:txBody>
+      </p:sp>
+      <p:sp>
+        <p:nvSpPr>
+          <p:cNvPr id="8" name="Text 6"/>
+          <p:cNvSpPr/>
+          <p:nvPr/>
+        </p:nvSpPr>
+        <p:spPr>
+          <a:xfrm>
+            <a:off x="692051" y="1612255"/>
+            <a:ext cx="7973389" cy="230981"/>
+          </a:xfrm>
+          <a:prstGeom prst="rect">
+            <a:avLst/>
+          </a:prstGeom>
+          <a:noFill/>
+          <a:ln/>
+        </p:spPr>
+        <p:txBody>
+          <a:bodyPr wrap="square" lIns="0" tIns="0" rIns="0" bIns="0" rtlCol="0" anchor="t"/>
+          <a:lstStyle/>
+          <a:p>
+            <a:pPr algn="l" indent="0" marL="0">
+              <a:lnSpc>
+                <a:spcPts val="1820"/>
+              </a:lnSpc>
+              <a:spcBef>
+                <a:spcPts val="300"/>
+              </a:spcBef>
+              <a:spcAft>
+                <a:spcPts val="300"/>
+              </a:spcAft>
+              <a:buNone/>
+            </a:pPr>
+            <a:r>
+              <a:rPr lang="en-US" sz="1300" dirty="0">
+                <a:solidFill>
+                  <a:srgbClr val="1C2833"/>
+                </a:solidFill>
+                <a:latin typeface="Georgia" pitchFamily="34" charset="0"/>
+                <a:ea typeface="Georgia" pitchFamily="34" charset="-122"/>
+                <a:cs typeface="Georgia" pitchFamily="34" charset="-120"/>
+              </a:rPr>
+              <a:t>the </a:t>
+            </a:r>
+            <a:pPr algn="l" indent="0" marL="0">
+              <a:lnSpc>
+                <a:spcPts val="1820"/>
+              </a:lnSpc>
+              <a:spcBef>
+                <a:spcPts val="300"/>
+              </a:spcBef>
+              <a:spcAft>
+                <a:spcPts val="300"/>
+              </a:spcAft>
+              <a:buNone/>
+            </a:pPr>
+            <a:r>
+              <a:rPr lang="en-US" sz="1300" i="1" dirty="0">
+                <a:solidFill>
+                  <a:srgbClr val="1C2833"/>
+                </a:solidFill>
+                <a:latin typeface="Georgia" pitchFamily="34" charset="0"/>
+                <a:ea typeface="Georgia" pitchFamily="34" charset="-122"/>
+                <a:cs typeface="Georgia" pitchFamily="34" charset="-120"/>
+              </a:rPr>
+              <a:t>pakṣa</a:t>
+            </a:r>
+            <a:pPr algn="l" indent="0" marL="0">
+              <a:lnSpc>
+                <a:spcPts val="1820"/>
+              </a:lnSpc>
+              <a:spcBef>
+                <a:spcPts val="300"/>
+              </a:spcBef>
+              <a:spcAft>
+                <a:spcPts val="300"/>
+              </a:spcAft>
+              <a:buNone/>
+            </a:pPr>
+            <a:r>
+              <a:rPr lang="en-US" sz="1300" dirty="0">
+                <a:solidFill>
+                  <a:srgbClr val="1C2833"/>
+                </a:solidFill>
+                <a:latin typeface="Georgia" pitchFamily="34" charset="0"/>
+                <a:ea typeface="Georgia" pitchFamily="34" charset="-122"/>
+                <a:cs typeface="Georgia" pitchFamily="34" charset="-120"/>
+              </a:rPr>
+              <a:t> it falls in</a:t>
+            </a:r>
+            <a:endParaRPr lang="en-US" sz="1300" dirty="0"/>
+          </a:p>
+        </p:txBody>
+      </p:sp>
+      <p:sp>
+        <p:nvSpPr>
+          <p:cNvPr id="9" name="Text 7"/>
+          <p:cNvSpPr/>
+          <p:nvPr/>
+        </p:nvSpPr>
+        <p:spPr>
+          <a:xfrm>
+            <a:off x="692051" y="1881336"/>
+            <a:ext cx="7973389" cy="230981"/>
+          </a:xfrm>
+          <a:prstGeom prst="rect">
+            <a:avLst/>
+          </a:prstGeom>
+          <a:noFill/>
+          <a:ln/>
+        </p:spPr>
+        <p:txBody>
+          <a:bodyPr wrap="square" lIns="0" tIns="0" rIns="0" bIns="0" rtlCol="0" anchor="t"/>
+          <a:lstStyle/>
+          <a:p>
+            <a:pPr algn="l" indent="0" marL="0">
+              <a:lnSpc>
+                <a:spcPts val="1820"/>
+              </a:lnSpc>
+              <a:spcBef>
+                <a:spcPts val="300"/>
+              </a:spcBef>
+              <a:spcAft>
+                <a:spcPts val="300"/>
+              </a:spcAft>
+              <a:buNone/>
+            </a:pPr>
+            <a:r>
+              <a:rPr lang="en-US" sz="1300" dirty="0">
+                <a:solidFill>
+                  <a:srgbClr val="1C2833"/>
+                </a:solidFill>
+                <a:latin typeface="Georgia" pitchFamily="34" charset="0"/>
+                <a:ea typeface="Georgia" pitchFamily="34" charset="-122"/>
+                <a:cs typeface="Georgia" pitchFamily="34" charset="-120"/>
+              </a:rPr>
+              <a:t>the </a:t>
+            </a:r>
+            <a:pPr algn="l" indent="0" marL="0">
+              <a:lnSpc>
+                <a:spcPts val="1820"/>
+              </a:lnSpc>
+              <a:spcBef>
+                <a:spcPts val="300"/>
+              </a:spcBef>
+              <a:spcAft>
+                <a:spcPts val="300"/>
+              </a:spcAft>
+              <a:buNone/>
+            </a:pPr>
+            <a:r>
+              <a:rPr lang="en-US" sz="1300" i="1" dirty="0">
+                <a:solidFill>
+                  <a:srgbClr val="1C2833"/>
+                </a:solidFill>
+                <a:latin typeface="Georgia" pitchFamily="34" charset="0"/>
+                <a:ea typeface="Georgia" pitchFamily="34" charset="-122"/>
+                <a:cs typeface="Georgia" pitchFamily="34" charset="-120"/>
+              </a:rPr>
+              <a:t>tithi</a:t>
+            </a:r>
+            <a:pPr algn="l" indent="0" marL="0">
+              <a:lnSpc>
+                <a:spcPts val="1820"/>
+              </a:lnSpc>
+              <a:spcBef>
+                <a:spcPts val="300"/>
+              </a:spcBef>
+              <a:spcAft>
+                <a:spcPts val="300"/>
+              </a:spcAft>
+              <a:buNone/>
+            </a:pPr>
+            <a:r>
+              <a:rPr lang="en-US" sz="1300" dirty="0">
+                <a:solidFill>
+                  <a:srgbClr val="1C2833"/>
+                </a:solidFill>
+                <a:latin typeface="Georgia" pitchFamily="34" charset="0"/>
+                <a:ea typeface="Georgia" pitchFamily="34" charset="-122"/>
+                <a:cs typeface="Georgia" pitchFamily="34" charset="-120"/>
+              </a:rPr>
+              <a:t> current at sunrise</a:t>
+            </a:r>
+            <a:endParaRPr lang="en-US" sz="1300" dirty="0"/>
+          </a:p>
+        </p:txBody>
+      </p:sp>
+      <p:sp>
+        <p:nvSpPr>
+          <p:cNvPr id="10" name="Text 8"/>
+          <p:cNvSpPr/>
+          <p:nvPr/>
+        </p:nvSpPr>
+        <p:spPr>
+          <a:xfrm>
+            <a:off x="692051" y="2150418"/>
+            <a:ext cx="7973389" cy="230981"/>
+          </a:xfrm>
+          <a:prstGeom prst="rect">
+            <a:avLst/>
+          </a:prstGeom>
+          <a:noFill/>
+          <a:ln/>
+        </p:spPr>
+        <p:txBody>
+          <a:bodyPr wrap="square" lIns="0" tIns="0" rIns="0" bIns="0" rtlCol="0" anchor="t"/>
+          <a:lstStyle/>
+          <a:p>
+            <a:pPr algn="l" indent="0" marL="0">
+              <a:lnSpc>
+                <a:spcPts val="1820"/>
+              </a:lnSpc>
+              <a:spcBef>
+                <a:spcPts val="300"/>
+              </a:spcBef>
+              <a:spcAft>
+                <a:spcPts val="300"/>
+              </a:spcAft>
+              <a:buNone/>
+            </a:pPr>
+            <a:r>
+              <a:rPr lang="en-US" sz="1300" i="1" dirty="0">
+                <a:solidFill>
+                  <a:srgbClr val="1C2833"/>
+                </a:solidFill>
+                <a:latin typeface="Georgia" pitchFamily="34" charset="0"/>
+                <a:ea typeface="Georgia" pitchFamily="34" charset="-122"/>
+                <a:cs typeface="Georgia" pitchFamily="34" charset="-120"/>
+              </a:rPr>
+              <a:t>the time the tithi ends</a:t>
+            </a:r>
+            <a:endParaRPr lang="en-US" sz="1300" dirty="0"/>
+          </a:p>
+        </p:txBody>
+      </p:sp>
+      <p:sp>
+        <p:nvSpPr>
+          <p:cNvPr id="11" name="Text 9"/>
+          <p:cNvSpPr/>
+          <p:nvPr/>
+        </p:nvSpPr>
+        <p:spPr>
+          <a:xfrm>
+            <a:off x="692051" y="2419499"/>
+            <a:ext cx="7973389" cy="230981"/>
+          </a:xfrm>
+          <a:prstGeom prst="rect">
+            <a:avLst/>
+          </a:prstGeom>
+          <a:noFill/>
+          <a:ln/>
+        </p:spPr>
+        <p:txBody>
+          <a:bodyPr wrap="square" lIns="0" tIns="0" rIns="0" bIns="0" rtlCol="0" anchor="t"/>
+          <a:lstStyle/>
+          <a:p>
+            <a:pPr algn="l" indent="0" marL="0">
+              <a:lnSpc>
+                <a:spcPts val="1820"/>
+              </a:lnSpc>
+              <a:spcBef>
+                <a:spcPts val="300"/>
+              </a:spcBef>
+              <a:spcAft>
+                <a:spcPts val="300"/>
+              </a:spcAft>
+              <a:buNone/>
+            </a:pPr>
+            <a:r>
+              <a:rPr lang="en-US" sz="1300" i="1" dirty="0">
+                <a:solidFill>
+                  <a:srgbClr val="1C2833"/>
+                </a:solidFill>
+                <a:latin typeface="Georgia" pitchFamily="34" charset="0"/>
+                <a:ea typeface="Georgia" pitchFamily="34" charset="-122"/>
+                <a:cs typeface="Georgia" pitchFamily="34" charset="-120"/>
+              </a:rPr>
+              <a:t>the expected shape of the Moon</a:t>
+            </a:r>
+            <a:endParaRPr lang="en-US" sz="1300" dirty="0"/>
+          </a:p>
+        </p:txBody>
+      </p:sp>
+      <p:sp>
+        <p:nvSpPr>
+          <p:cNvPr id="12" name="Text 10"/>
+          <p:cNvSpPr/>
+          <p:nvPr/>
+        </p:nvSpPr>
+        <p:spPr>
+          <a:xfrm>
+            <a:off x="692051" y="2688580"/>
+            <a:ext cx="7973389" cy="230981"/>
+          </a:xfrm>
+          <a:prstGeom prst="rect">
+            <a:avLst/>
+          </a:prstGeom>
+          <a:noFill/>
+          <a:ln/>
+        </p:spPr>
+        <p:txBody>
+          <a:bodyPr wrap="square" lIns="0" tIns="0" rIns="0" bIns="0" rtlCol="0" anchor="t"/>
+          <a:lstStyle/>
+          <a:p>
+            <a:pPr algn="l" indent="0" marL="0">
+              <a:lnSpc>
+                <a:spcPts val="1820"/>
+              </a:lnSpc>
+              <a:spcBef>
+                <a:spcPts val="300"/>
+              </a:spcBef>
+              <a:spcAft>
+                <a:spcPts val="300"/>
+              </a:spcAft>
+              <a:buNone/>
+            </a:pPr>
+            <a:r>
+              <a:rPr lang="en-US" sz="1300" i="1" dirty="0">
+                <a:solidFill>
+                  <a:srgbClr val="1C2833"/>
+                </a:solidFill>
+                <a:latin typeface="Georgia" pitchFamily="34" charset="0"/>
+                <a:ea typeface="Georgia" pitchFamily="34" charset="-122"/>
+                <a:cs typeface="Georgia" pitchFamily="34" charset="-120"/>
+              </a:rPr>
+              <a:t>Two patterns to notice:</a:t>
+            </a:r>
+            <a:endParaRPr lang="en-US" sz="1300" dirty="0"/>
+          </a:p>
+        </p:txBody>
+      </p:sp>
+      <p:sp>
+        <p:nvSpPr>
+          <p:cNvPr id="13" name="Text 11"/>
+          <p:cNvSpPr/>
+          <p:nvPr/>
+        </p:nvSpPr>
+        <p:spPr>
+          <a:xfrm>
+            <a:off x="692051" y="2957661"/>
+            <a:ext cx="7973389" cy="461963"/>
+          </a:xfrm>
+          <a:prstGeom prst="rect">
+            <a:avLst/>
+          </a:prstGeom>
+          <a:noFill/>
+          <a:ln/>
+        </p:spPr>
+        <p:txBody>
+          <a:bodyPr wrap="square" lIns="0" tIns="0" rIns="0" bIns="0" rtlCol="0" anchor="t"/>
+          <a:lstStyle/>
+          <a:p>
+            <a:pPr algn="l" indent="0" marL="0">
+              <a:lnSpc>
+                <a:spcPts val="1820"/>
+              </a:lnSpc>
+              <a:spcBef>
+                <a:spcPts val="300"/>
+              </a:spcBef>
+              <a:spcAft>
+                <a:spcPts val="300"/>
+              </a:spcAft>
+              <a:buNone/>
+            </a:pPr>
+            <a:r>
+              <a:rPr lang="en-US" sz="1300" dirty="0">
+                <a:solidFill>
+                  <a:srgbClr val="1C2833"/>
+                </a:solidFill>
+                <a:latin typeface="Georgia" pitchFamily="34" charset="0"/>
+                <a:ea typeface="Georgia" pitchFamily="34" charset="-122"/>
+                <a:cs typeface="Georgia" pitchFamily="34" charset="-120"/>
+              </a:rPr>
+              <a:t>There are usually 1 </a:t>
+            </a:r>
+            <a:pPr algn="l" indent="0" marL="0">
+              <a:lnSpc>
+                <a:spcPts val="1820"/>
+              </a:lnSpc>
+              <a:spcBef>
+                <a:spcPts val="300"/>
+              </a:spcBef>
+              <a:spcAft>
+                <a:spcPts val="300"/>
+              </a:spcAft>
+              <a:buNone/>
+            </a:pPr>
+            <a:r>
+              <a:rPr lang="en-US" sz="1300" i="1" dirty="0">
+                <a:solidFill>
+                  <a:srgbClr val="1C2833"/>
+                </a:solidFill>
+                <a:latin typeface="Georgia" pitchFamily="34" charset="0"/>
+                <a:ea typeface="Georgia" pitchFamily="34" charset="-122"/>
+                <a:cs typeface="Georgia" pitchFamily="34" charset="-120"/>
+              </a:rPr>
+              <a:t>amāvasyā</a:t>
+            </a:r>
+            <a:pPr algn="l" indent="0" marL="0">
+              <a:lnSpc>
+                <a:spcPts val="1820"/>
+              </a:lnSpc>
+              <a:spcBef>
+                <a:spcPts val="300"/>
+              </a:spcBef>
+              <a:spcAft>
+                <a:spcPts val="300"/>
+              </a:spcAft>
+              <a:buNone/>
+            </a:pPr>
+            <a:r>
+              <a:rPr lang="en-US" sz="1300" dirty="0">
+                <a:solidFill>
+                  <a:srgbClr val="1C2833"/>
+                </a:solidFill>
+                <a:latin typeface="Georgia" pitchFamily="34" charset="0"/>
+                <a:ea typeface="Georgia" pitchFamily="34" charset="-122"/>
+                <a:cs typeface="Georgia" pitchFamily="34" charset="-120"/>
+              </a:rPr>
+              <a:t> and 1 </a:t>
+            </a:r>
+            <a:pPr algn="l" indent="0" marL="0">
+              <a:lnSpc>
+                <a:spcPts val="1820"/>
+              </a:lnSpc>
+              <a:spcBef>
+                <a:spcPts val="300"/>
+              </a:spcBef>
+              <a:spcAft>
+                <a:spcPts val="300"/>
+              </a:spcAft>
+              <a:buNone/>
+            </a:pPr>
+            <a:r>
+              <a:rPr lang="en-US" sz="1300" i="1" dirty="0">
+                <a:solidFill>
+                  <a:srgbClr val="1C2833"/>
+                </a:solidFill>
+                <a:latin typeface="Georgia" pitchFamily="34" charset="0"/>
+                <a:ea typeface="Georgia" pitchFamily="34" charset="-122"/>
+                <a:cs typeface="Georgia" pitchFamily="34" charset="-120"/>
+              </a:rPr>
+              <a:t>pūrṇimā</a:t>
+            </a:r>
+            <a:pPr algn="l" indent="0" marL="0">
+              <a:lnSpc>
+                <a:spcPts val="1820"/>
+              </a:lnSpc>
+              <a:spcBef>
+                <a:spcPts val="300"/>
+              </a:spcBef>
+              <a:spcAft>
+                <a:spcPts val="300"/>
+              </a:spcAft>
+              <a:buNone/>
+            </a:pPr>
+            <a:r>
+              <a:rPr lang="en-US" sz="1300" dirty="0">
+                <a:solidFill>
+                  <a:srgbClr val="1C2833"/>
+                </a:solidFill>
+                <a:latin typeface="Georgia" pitchFamily="34" charset="0"/>
+                <a:ea typeface="Georgia" pitchFamily="34" charset="-122"/>
+                <a:cs typeface="Georgia" pitchFamily="34" charset="-120"/>
+              </a:rPr>
+              <a:t> per calendar month — sometimes 0 or 2 depending on month length.</a:t>
+            </a:r>
+            <a:endParaRPr lang="en-US" sz="1300" dirty="0"/>
+          </a:p>
+        </p:txBody>
+      </p:sp>
+      <p:sp>
+        <p:nvSpPr>
+          <p:cNvPr id="14" name="Text 12"/>
+          <p:cNvSpPr/>
+          <p:nvPr/>
+        </p:nvSpPr>
+        <p:spPr>
+          <a:xfrm>
+            <a:off x="692051" y="3457724"/>
+            <a:ext cx="7973389" cy="461963"/>
+          </a:xfrm>
+          <a:prstGeom prst="rect">
+            <a:avLst/>
+          </a:prstGeom>
+          <a:noFill/>
+          <a:ln/>
+        </p:spPr>
+        <p:txBody>
+          <a:bodyPr wrap="square" lIns="0" tIns="0" rIns="0" bIns="0" rtlCol="0" anchor="t"/>
+          <a:lstStyle/>
+          <a:p>
+            <a:pPr algn="l" indent="0" marL="0">
+              <a:lnSpc>
+                <a:spcPts val="1820"/>
+              </a:lnSpc>
+              <a:spcBef>
+                <a:spcPts val="300"/>
+              </a:spcBef>
+              <a:spcAft>
+                <a:spcPts val="300"/>
+              </a:spcAft>
+              <a:buNone/>
+            </a:pPr>
+            <a:r>
+              <a:rPr lang="en-US" sz="1300" dirty="0">
+                <a:solidFill>
+                  <a:srgbClr val="1C2833"/>
+                </a:solidFill>
+                <a:latin typeface="Georgia" pitchFamily="34" charset="0"/>
+                <a:ea typeface="Georgia" pitchFamily="34" charset="-122"/>
+                <a:cs typeface="Georgia" pitchFamily="34" charset="-120"/>
+              </a:rPr>
+              <a:t>A few tithis will have unusual entries — a </a:t>
+            </a:r>
+            <a:pPr algn="l" indent="0" marL="0">
+              <a:lnSpc>
+                <a:spcPts val="1820"/>
+              </a:lnSpc>
+              <a:spcBef>
+                <a:spcPts val="300"/>
+              </a:spcBef>
+              <a:spcAft>
+                <a:spcPts val="300"/>
+              </a:spcAft>
+              <a:buNone/>
+            </a:pPr>
+            <a:r>
+              <a:rPr lang="en-US" sz="1300" i="1" dirty="0">
+                <a:solidFill>
+                  <a:srgbClr val="1C2833"/>
+                </a:solidFill>
+                <a:latin typeface="Georgia" pitchFamily="34" charset="0"/>
+                <a:ea typeface="Georgia" pitchFamily="34" charset="-122"/>
+                <a:cs typeface="Georgia" pitchFamily="34" charset="-120"/>
+              </a:rPr>
+              <a:t>kṣaya</a:t>
+            </a:r>
+            <a:pPr algn="l" indent="0" marL="0">
+              <a:lnSpc>
+                <a:spcPts val="1820"/>
+              </a:lnSpc>
+              <a:spcBef>
+                <a:spcPts val="300"/>
+              </a:spcBef>
+              <a:spcAft>
+                <a:spcPts val="300"/>
+              </a:spcAft>
+              <a:buNone/>
+            </a:pPr>
+            <a:r>
+              <a:rPr lang="en-US" sz="1300" dirty="0">
+                <a:solidFill>
+                  <a:srgbClr val="1C2833"/>
+                </a:solidFill>
+                <a:latin typeface="Georgia" pitchFamily="34" charset="0"/>
+                <a:ea typeface="Georgia" pitchFamily="34" charset="-122"/>
+                <a:cs typeface="Georgia" pitchFamily="34" charset="-120"/>
+              </a:rPr>
+              <a:t> (skipped) or </a:t>
+            </a:r>
+            <a:pPr algn="l" indent="0" marL="0">
+              <a:lnSpc>
+                <a:spcPts val="1820"/>
+              </a:lnSpc>
+              <a:spcBef>
+                <a:spcPts val="300"/>
+              </a:spcBef>
+              <a:spcAft>
+                <a:spcPts val="300"/>
+              </a:spcAft>
+              <a:buNone/>
+            </a:pPr>
+            <a:r>
+              <a:rPr lang="en-US" sz="1300" i="1" dirty="0">
+                <a:solidFill>
+                  <a:srgbClr val="1C2833"/>
+                </a:solidFill>
+                <a:latin typeface="Georgia" pitchFamily="34" charset="0"/>
+                <a:ea typeface="Georgia" pitchFamily="34" charset="-122"/>
+                <a:cs typeface="Georgia" pitchFamily="34" charset="-120"/>
+              </a:rPr>
+              <a:t>vṛddhi</a:t>
+            </a:r>
+            <a:pPr algn="l" indent="0" marL="0">
+              <a:lnSpc>
+                <a:spcPts val="1820"/>
+              </a:lnSpc>
+              <a:spcBef>
+                <a:spcPts val="300"/>
+              </a:spcBef>
+              <a:spcAft>
+                <a:spcPts val="300"/>
+              </a:spcAft>
+              <a:buNone/>
+            </a:pPr>
+            <a:r>
+              <a:rPr lang="en-US" sz="1300" dirty="0">
+                <a:solidFill>
+                  <a:srgbClr val="1C2833"/>
+                </a:solidFill>
+                <a:latin typeface="Georgia" pitchFamily="34" charset="0"/>
+                <a:ea typeface="Georgia" pitchFamily="34" charset="-122"/>
+                <a:cs typeface="Georgia" pitchFamily="34" charset="-120"/>
+              </a:rPr>
+              <a:t> (spanning two days). Note them; they are the system working as designed.</a:t>
+            </a:r>
+            <a:endParaRPr lang="en-US" sz="1300" dirty="0"/>
+          </a:p>
+        </p:txBody>
+      </p:sp>
+      <p:sp>
+        <p:nvSpPr>
+          <p:cNvPr id="15" name="Text 13"/>
+          <p:cNvSpPr/>
+          <p:nvPr/>
+        </p:nvSpPr>
+        <p:spPr>
+          <a:xfrm>
+            <a:off x="406301" y="4434929"/>
+            <a:ext cx="8498026" cy="213271"/>
+          </a:xfrm>
+          <a:prstGeom prst="rect">
+            <a:avLst/>
+          </a:prstGeom>
+          <a:noFill/>
+          <a:ln/>
+        </p:spPr>
+        <p:txBody>
+          <a:bodyPr wrap="square" lIns="0" tIns="0" rIns="0" bIns="0" rtlCol="0" anchor="t"/>
+          <a:lstStyle/>
+          <a:p>
+            <a:pPr algn="l" indent="0" marL="0">
+              <a:lnSpc>
+                <a:spcPts val="1680"/>
+              </a:lnSpc>
+              <a:spcBef>
+                <a:spcPts val="300"/>
+              </a:spcBef>
+              <a:spcAft>
+                <a:spcPts val="300"/>
+              </a:spcAft>
+              <a:buNone/>
+            </a:pPr>
+            <a:r>
+              <a:rPr lang="en-US" sz="1200" dirty="0">
+                <a:solidFill>
+                  <a:srgbClr val="1C2833"/>
+                </a:solidFill>
+                <a:latin typeface="Arial" pitchFamily="34" charset="0"/>
+                <a:ea typeface="Arial" pitchFamily="34" charset="-122"/>
+                <a:cs typeface="Arial" pitchFamily="34" charset="-120"/>
+              </a:rPr>
+              <a:t>Middle ·  · IKS Curriculum</a:t>
+            </a:r>
+            <a:endParaRPr lang="en-US" sz="1200" dirty="0"/>
+          </a:p>
+        </p:txBody>
+      </p:sp>
+    </p:spTree>
+  </p:cSld>
+  <p:clrMapOvr>
+    <a:masterClrMapping/>
+  </p:clrMapOvr>
+</p:sld>
+</file>
+
+<file path=ppt/slides/slide17.xml><?xml version="1.0" encoding="utf-8"?>
+<p:sld xmlns:a="http://schemas.openxmlformats.org/drawingml/2006/main" xmlns:r="http://schemas.openxmlformats.org/officeDocument/2006/relationships" xmlns:p="http://schemas.openxmlformats.org/presentationml/2006/main">
+  <p:cSld name="Slide 17">
+    <p:bg>
+      <p:bgPr>
+        <a:solidFill>
+          <a:srgbClr val="FFFFFF"/>
+        </a:solidFill>
+      </p:bgPr>
+    </p:bg>
+    <p:spTree>
+      <p:nvGrpSpPr>
+        <p:cNvPr id="1" name=""/>
+        <p:cNvGrpSpPr/>
+        <p:nvPr/>
+      </p:nvGrpSpPr>
+      <p:grpSpPr>
+        <a:xfrm>
+          <a:off x="0" y="0"/>
+          <a:ext cx="0" cy="0"/>
+          <a:chOff x="0" y="0"/>
+          <a:chExt cx="0" cy="0"/>
+        </a:xfrm>
+      </p:grpSpPr>
+      <p:sp>
+        <p:nvSpPr>
+          <p:cNvPr id="2" name="Text 0"/>
+          <p:cNvSpPr/>
+          <p:nvPr/>
+        </p:nvSpPr>
+        <p:spPr>
+          <a:xfrm>
+            <a:off x="0" y="0"/>
+            <a:ext cx="9144000" cy="101501"/>
+          </a:xfrm>
+          <a:prstGeom prst="rect">
+            <a:avLst/>
+          </a:prstGeom>
+          <a:solidFill>
+            <a:srgbClr val="277884"/>
+          </a:solidFill>
+          <a:ln/>
+        </p:spPr>
+        <p:txBody>
+          <a:bodyPr wrap="square" rtlCol="0" anchor="ctr"/>
+          <a:lstStyle/>
+          <a:p>
+            <a:pPr indent="0" marL="0">
+              <a:buNone/>
+            </a:pPr>
+            <a:endParaRPr lang="en-US" dirty="0"/>
+          </a:p>
+        </p:txBody>
+      </p:sp>
+      <p:sp>
+        <p:nvSpPr>
+          <p:cNvPr id="3" name="Text 1"/>
+          <p:cNvSpPr/>
+          <p:nvPr/>
+        </p:nvSpPr>
+        <p:spPr>
+          <a:xfrm>
+            <a:off x="406301" y="457051"/>
+            <a:ext cx="8498026" cy="274290"/>
+          </a:xfrm>
+          <a:prstGeom prst="rect">
+            <a:avLst/>
+          </a:prstGeom>
+          <a:noFill/>
+          <a:ln/>
+        </p:spPr>
+        <p:txBody>
+          <a:bodyPr wrap="square" lIns="0" tIns="0" rIns="0" bIns="0" rtlCol="0" anchor="t"/>
+          <a:lstStyle/>
+          <a:p>
+            <a:pPr algn="l" indent="0" marL="0">
+              <a:lnSpc>
+                <a:spcPts val="2160"/>
+              </a:lnSpc>
+              <a:spcBef>
+                <a:spcPts val="600"/>
+              </a:spcBef>
+              <a:spcAft>
+                <a:spcPts val="800"/>
+              </a:spcAft>
+              <a:buNone/>
+            </a:pPr>
+            <a:r>
+              <a:rPr lang="en-US" sz="1800" b="1" dirty="0">
+                <a:solidFill>
+                  <a:srgbClr val="FE4447"/>
+                </a:solidFill>
+                <a:latin typeface="Georgia" pitchFamily="34" charset="0"/>
+                <a:ea typeface="Georgia" pitchFamily="34" charset="-122"/>
+                <a:cs typeface="Georgia" pitchFamily="34" charset="-120"/>
+              </a:rPr>
+              <a:t>Homework</a:t>
+            </a:r>
+            <a:endParaRPr lang="en-US" sz="1800" dirty="0"/>
+          </a:p>
+        </p:txBody>
+      </p:sp>
+      <p:sp>
+        <p:nvSpPr>
+          <p:cNvPr id="4" name="Text 2"/>
+          <p:cNvSpPr/>
+          <p:nvPr/>
+        </p:nvSpPr>
+        <p:spPr>
+          <a:xfrm>
+            <a:off x="634901" y="883593"/>
+            <a:ext cx="8102798" cy="731341"/>
+          </a:xfrm>
+          <a:prstGeom prst="rect">
+            <a:avLst/>
+          </a:prstGeom>
+          <a:noFill/>
+          <a:ln/>
+        </p:spPr>
+        <p:txBody>
+          <a:bodyPr wrap="square" lIns="0" tIns="0" rIns="0" bIns="0" rtlCol="0" anchor="t"/>
+          <a:lstStyle/>
+          <a:p>
+            <a:pPr algn="l" marL="342900" indent="-342900">
+              <a:lnSpc>
+                <a:spcPts val="1620"/>
+              </a:lnSpc>
+              <a:spcAft>
+                <a:spcPts val="300"/>
+              </a:spcAft>
+              <a:buSzPct val="100000"/>
+              <a:buChar char="•"/>
+            </a:pPr>
+            <a:r>
+              <a:rPr lang="en-US" sz="1200" dirty="0">
+                <a:solidFill>
+                  <a:srgbClr val="1C2833"/>
+                </a:solidFill>
+                <a:latin typeface="Arial" pitchFamily="34" charset="0"/>
+                <a:ea typeface="Arial" pitchFamily="34" charset="-122"/>
+                <a:cs typeface="Arial" pitchFamily="34" charset="-120"/>
+              </a:rPr>
+              <a:t>Continue the Moon diary. Compare last night's sketch with the calendar you built today — does the shape match the predicted shape for that tithi?</a:t>
+            </a:r>
+            <a:endParaRPr lang="en-US" sz="1200" dirty="0"/>
+          </a:p>
+          <a:p>
+            <a:pPr algn="l" marL="342900" indent="-342900">
+              <a:lnSpc>
+                <a:spcPts val="1620"/>
+              </a:lnSpc>
+              <a:spcAft>
+                <a:spcPts val="300"/>
+              </a:spcAft>
+              <a:buSzPct val="100000"/>
+              <a:buChar char="•"/>
+            </a:pPr>
+            <a:r>
+              <a:rPr lang="en-US" sz="1200" dirty="0">
+                <a:solidFill>
+                  <a:srgbClr val="1C2833"/>
+                </a:solidFill>
+                <a:latin typeface="Arial" pitchFamily="34" charset="0"/>
+                <a:ea typeface="Arial" pitchFamily="34" charset="-122"/>
+                <a:cs typeface="Arial" pitchFamily="34" charset="-120"/>
+              </a:rPr>
+              <a:t>For Day 5: be ready to name </a:t>
+            </a:r>
+            <a:pPr algn="l" indent="0" marL="0">
+              <a:lnSpc>
+                <a:spcPts val="1620"/>
+              </a:lnSpc>
+              <a:spcAft>
+                <a:spcPts val="300"/>
+              </a:spcAft>
+              <a:buNone/>
+            </a:pPr>
+            <a:r>
+              <a:rPr lang="en-US" sz="1200" b="1" dirty="0">
+                <a:solidFill>
+                  <a:srgbClr val="1C2833"/>
+                </a:solidFill>
+                <a:latin typeface="Arial" pitchFamily="34" charset="0"/>
+                <a:ea typeface="Arial" pitchFamily="34" charset="-122"/>
+                <a:cs typeface="Arial" pitchFamily="34" charset="-120"/>
+              </a:rPr>
+              <a:t>one festival in your family</a:t>
+            </a:r>
+            <a:pPr algn="l" indent="0" marL="0">
+              <a:lnSpc>
+                <a:spcPts val="1620"/>
+              </a:lnSpc>
+              <a:spcAft>
+                <a:spcPts val="300"/>
+              </a:spcAft>
+              <a:buNone/>
+            </a:pPr>
+            <a:r>
+              <a:rPr lang="en-US" sz="1200" dirty="0">
+                <a:solidFill>
+                  <a:srgbClr val="1C2833"/>
+                </a:solidFill>
+                <a:latin typeface="Arial" pitchFamily="34" charset="0"/>
+                <a:ea typeface="Arial" pitchFamily="34" charset="-122"/>
+                <a:cs typeface="Arial" pitchFamily="34" charset="-120"/>
+              </a:rPr>
+              <a:t> (or community) that you know is tied to a specific tithi.</a:t>
+            </a:r>
+            <a:endParaRPr lang="en-US" sz="1200" dirty="0"/>
+          </a:p>
+        </p:txBody>
+      </p:sp>
+      <p:sp>
+        <p:nvSpPr>
+          <p:cNvPr id="5" name="Text 3"/>
+          <p:cNvSpPr/>
+          <p:nvPr/>
+        </p:nvSpPr>
+        <p:spPr>
+          <a:xfrm>
+            <a:off x="406301" y="4434929"/>
+            <a:ext cx="8498026" cy="213271"/>
+          </a:xfrm>
+          <a:prstGeom prst="rect">
+            <a:avLst/>
+          </a:prstGeom>
+          <a:noFill/>
+          <a:ln/>
+        </p:spPr>
+        <p:txBody>
+          <a:bodyPr wrap="square" lIns="0" tIns="0" rIns="0" bIns="0" rtlCol="0" anchor="t"/>
+          <a:lstStyle/>
+          <a:p>
+            <a:pPr algn="l" indent="0" marL="0">
+              <a:lnSpc>
+                <a:spcPts val="1680"/>
+              </a:lnSpc>
+              <a:spcBef>
+                <a:spcPts val="300"/>
+              </a:spcBef>
+              <a:spcAft>
+                <a:spcPts val="300"/>
+              </a:spcAft>
+              <a:buNone/>
+            </a:pPr>
+            <a:r>
+              <a:rPr lang="en-US" sz="1200" dirty="0">
+                <a:solidFill>
+                  <a:srgbClr val="1C2833"/>
+                </a:solidFill>
+                <a:latin typeface="Arial" pitchFamily="34" charset="0"/>
+                <a:ea typeface="Arial" pitchFamily="34" charset="-122"/>
+                <a:cs typeface="Arial" pitchFamily="34" charset="-120"/>
+              </a:rPr>
+              <a:t>Middle ·  · IKS Curriculum</a:t>
+            </a:r>
+            <a:endParaRPr lang="en-US" sz="1200" dirty="0"/>
+          </a:p>
+        </p:txBody>
+      </p:sp>
+    </p:spTree>
+  </p:cSld>
+  <p:clrMapOvr>
+    <a:masterClrMapping/>
+  </p:clrMapOvr>
+</p:sld>
+</file>
+
+<file path=ppt/slides/slide18.xml><?xml version="1.0" encoding="utf-8"?>
+<p:sld xmlns:a="http://schemas.openxmlformats.org/drawingml/2006/main" xmlns:r="http://schemas.openxmlformats.org/officeDocument/2006/relationships" xmlns:p="http://schemas.openxmlformats.org/presentationml/2006/main">
+  <p:cSld name="Slide 18">
+    <p:bg>
+      <p:bgPr>
+        <a:solidFill>
+          <a:srgbClr val="FFFFFF"/>
+        </a:solidFill>
+      </p:bgPr>
+    </p:bg>
+    <p:spTree>
+      <p:nvGrpSpPr>
+        <p:cNvPr id="1" name=""/>
+        <p:cNvGrpSpPr/>
+        <p:nvPr/>
+      </p:nvGrpSpPr>
+      <p:grpSpPr>
+        <a:xfrm>
+          <a:off x="0" y="0"/>
+          <a:ext cx="0" cy="0"/>
+          <a:chOff x="0" y="0"/>
+          <a:chExt cx="0" cy="0"/>
+        </a:xfrm>
+      </p:grpSpPr>
+      <p:sp>
+        <p:nvSpPr>
+          <p:cNvPr id="2" name="Text 0"/>
+          <p:cNvSpPr/>
+          <p:nvPr/>
+        </p:nvSpPr>
+        <p:spPr>
+          <a:xfrm>
+            <a:off x="0" y="0"/>
+            <a:ext cx="9144000" cy="101501"/>
+          </a:xfrm>
+          <a:prstGeom prst="rect">
+            <a:avLst/>
+          </a:prstGeom>
+          <a:solidFill>
+            <a:srgbClr val="277884"/>
+          </a:solidFill>
+          <a:ln/>
+        </p:spPr>
+        <p:txBody>
+          <a:bodyPr wrap="square" rtlCol="0" anchor="ctr"/>
+          <a:lstStyle/>
+          <a:p>
+            <a:pPr indent="0" marL="0">
+              <a:buNone/>
+            </a:pPr>
+            <a:endParaRPr lang="en-US" dirty="0"/>
+          </a:p>
+        </p:txBody>
+      </p:sp>
+      <p:sp>
+        <p:nvSpPr>
+          <p:cNvPr id="3" name="Text 1"/>
+          <p:cNvSpPr/>
+          <p:nvPr/>
+        </p:nvSpPr>
+        <p:spPr>
+          <a:xfrm>
+            <a:off x="406301" y="457051"/>
+            <a:ext cx="8498026" cy="274290"/>
+          </a:xfrm>
+          <a:prstGeom prst="rect">
+            <a:avLst/>
+          </a:prstGeom>
+          <a:noFill/>
+          <a:ln/>
+        </p:spPr>
+        <p:txBody>
+          <a:bodyPr wrap="square" lIns="0" tIns="0" rIns="0" bIns="0" rtlCol="0" anchor="t"/>
+          <a:lstStyle/>
+          <a:p>
+            <a:pPr algn="l" indent="0" marL="0">
+              <a:lnSpc>
+                <a:spcPts val="2160"/>
+              </a:lnSpc>
+              <a:spcBef>
+                <a:spcPts val="600"/>
+              </a:spcBef>
+              <a:spcAft>
+                <a:spcPts val="800"/>
+              </a:spcAft>
+              <a:buNone/>
+            </a:pPr>
+            <a:r>
+              <a:rPr lang="en-US" sz="1800" b="1" dirty="0">
+                <a:solidFill>
+                  <a:srgbClr val="FE4447"/>
+                </a:solidFill>
+                <a:latin typeface="Georgia" pitchFamily="34" charset="0"/>
+                <a:ea typeface="Georgia" pitchFamily="34" charset="-122"/>
+                <a:cs typeface="Georgia" pitchFamily="34" charset="-120"/>
+              </a:rPr>
+              <a:t>Differentiation</a:t>
+            </a:r>
+            <a:endParaRPr lang="en-US" sz="1800" dirty="0"/>
+          </a:p>
+        </p:txBody>
+      </p:sp>
+      <p:sp>
+        <p:nvSpPr>
+          <p:cNvPr id="4" name="Text 2"/>
+          <p:cNvSpPr/>
+          <p:nvPr/>
+        </p:nvSpPr>
+        <p:spPr>
+          <a:xfrm>
+            <a:off x="634901" y="883593"/>
+            <a:ext cx="8102798" cy="1142702"/>
+          </a:xfrm>
+          <a:prstGeom prst="rect">
+            <a:avLst/>
+          </a:prstGeom>
+          <a:noFill/>
+          <a:ln/>
+        </p:spPr>
+        <p:txBody>
+          <a:bodyPr wrap="square" lIns="0" tIns="0" rIns="0" bIns="0" rtlCol="0" anchor="t"/>
+          <a:lstStyle/>
+          <a:p>
+            <a:pPr algn="l" marL="342900" indent="-342900">
+              <a:lnSpc>
+                <a:spcPts val="1620"/>
+              </a:lnSpc>
+              <a:spcAft>
+                <a:spcPts val="300"/>
+              </a:spcAft>
+              <a:buSzPct val="100000"/>
+              <a:buChar char="•"/>
+            </a:pPr>
+            <a:r>
+              <a:rPr lang="en-US" sz="1200" b="1" dirty="0">
+                <a:solidFill>
+                  <a:srgbClr val="1C2833"/>
+                </a:solidFill>
+                <a:latin typeface="Arial" pitchFamily="34" charset="0"/>
+                <a:ea typeface="Arial" pitchFamily="34" charset="-122"/>
+                <a:cs typeface="Arial" pitchFamily="34" charset="-120"/>
+              </a:rPr>
+              <a:t>One tier up:</a:t>
+            </a:r>
+            <a:pPr algn="l" indent="0" marL="0">
+              <a:lnSpc>
+                <a:spcPts val="1620"/>
+              </a:lnSpc>
+              <a:spcAft>
+                <a:spcPts val="300"/>
+              </a:spcAft>
+              <a:buNone/>
+            </a:pPr>
+            <a:r>
+              <a:rPr lang="en-US" sz="1200" dirty="0">
+                <a:solidFill>
+                  <a:srgbClr val="1C2833"/>
+                </a:solidFill>
+                <a:latin typeface="Arial" pitchFamily="34" charset="0"/>
+                <a:ea typeface="Arial" pitchFamily="34" charset="-122"/>
+                <a:cs typeface="Arial" pitchFamily="34" charset="-120"/>
+              </a:rPr>
+              <a:t> Look at the </a:t>
+            </a:r>
+            <a:pPr algn="l" indent="0" marL="0">
+              <a:lnSpc>
+                <a:spcPts val="1620"/>
+              </a:lnSpc>
+              <a:spcAft>
+                <a:spcPts val="300"/>
+              </a:spcAft>
+              <a:buNone/>
+            </a:pPr>
+            <a:r>
+              <a:rPr lang="en-US" sz="1200" i="1" dirty="0">
+                <a:solidFill>
+                  <a:srgbClr val="1C2833"/>
+                </a:solidFill>
+                <a:latin typeface="Arial" pitchFamily="34" charset="0"/>
+                <a:ea typeface="Arial" pitchFamily="34" charset="-122"/>
+                <a:cs typeface="Arial" pitchFamily="34" charset="-120"/>
+              </a:rPr>
+              <a:t>pañcāṅga</a:t>
+            </a:r>
+            <a:pPr algn="l" indent="0" marL="0">
+              <a:lnSpc>
+                <a:spcPts val="1620"/>
+              </a:lnSpc>
+              <a:spcAft>
+                <a:spcPts val="300"/>
+              </a:spcAft>
+              <a:buNone/>
+            </a:pPr>
+            <a:r>
+              <a:rPr lang="en-US" sz="1200" dirty="0">
+                <a:solidFill>
+                  <a:srgbClr val="1C2833"/>
+                </a:solidFill>
+                <a:latin typeface="Arial" pitchFamily="34" charset="0"/>
+                <a:ea typeface="Arial" pitchFamily="34" charset="-122"/>
+                <a:cs typeface="Arial" pitchFamily="34" charset="-120"/>
+              </a:rPr>
+              <a:t> for the month BEFORE this one. Find a tithi that was </a:t>
+            </a:r>
+            <a:pPr algn="l" indent="0" marL="0">
+              <a:lnSpc>
+                <a:spcPts val="1620"/>
+              </a:lnSpc>
+              <a:spcAft>
+                <a:spcPts val="300"/>
+              </a:spcAft>
+              <a:buNone/>
+            </a:pPr>
+            <a:r>
+              <a:rPr lang="en-US" sz="1200" i="1" dirty="0">
+                <a:solidFill>
+                  <a:srgbClr val="1C2833"/>
+                </a:solidFill>
+                <a:latin typeface="Arial" pitchFamily="34" charset="0"/>
+                <a:ea typeface="Arial" pitchFamily="34" charset="-122"/>
+                <a:cs typeface="Arial" pitchFamily="34" charset="-120"/>
+              </a:rPr>
+              <a:t>kṣaya</a:t>
+            </a:r>
+            <a:pPr algn="l" indent="0" marL="0">
+              <a:lnSpc>
+                <a:spcPts val="1620"/>
+              </a:lnSpc>
+              <a:spcAft>
+                <a:spcPts val="300"/>
+              </a:spcAft>
+              <a:buNone/>
+            </a:pPr>
+            <a:r>
+              <a:rPr lang="en-US" sz="1200" dirty="0">
+                <a:solidFill>
+                  <a:srgbClr val="1C2833"/>
+                </a:solidFill>
+                <a:latin typeface="Arial" pitchFamily="34" charset="0"/>
+                <a:ea typeface="Arial" pitchFamily="34" charset="-122"/>
+                <a:cs typeface="Arial" pitchFamily="34" charset="-120"/>
+              </a:rPr>
+              <a:t> (skipped). Explain in writing what happened on that date — the previous tithi was running at sunrise, then the next tithi started after sunrise and ended before the next sunrise. So the "skipped" tithi never had its own sunrise.</a:t>
+            </a:r>
+            <a:endParaRPr lang="en-US" sz="1200" dirty="0"/>
+          </a:p>
+          <a:p>
+            <a:pPr algn="l" marL="342900" indent="-342900">
+              <a:lnSpc>
+                <a:spcPts val="1620"/>
+              </a:lnSpc>
+              <a:spcAft>
+                <a:spcPts val="300"/>
+              </a:spcAft>
+              <a:buSzPct val="100000"/>
+              <a:buChar char="•"/>
+            </a:pPr>
+            <a:r>
+              <a:rPr lang="en-US" sz="1200" b="1" dirty="0">
+                <a:solidFill>
+                  <a:srgbClr val="1C2833"/>
+                </a:solidFill>
+                <a:latin typeface="Arial" pitchFamily="34" charset="0"/>
+                <a:ea typeface="Arial" pitchFamily="34" charset="-122"/>
+                <a:cs typeface="Arial" pitchFamily="34" charset="-120"/>
+              </a:rPr>
+              <a:t>One tier down:</a:t>
+            </a:r>
+            <a:pPr algn="l" indent="0" marL="0">
+              <a:lnSpc>
+                <a:spcPts val="1620"/>
+              </a:lnSpc>
+              <a:spcAft>
+                <a:spcPts val="300"/>
+              </a:spcAft>
+              <a:buNone/>
+            </a:pPr>
+            <a:r>
+              <a:rPr lang="en-US" sz="1200" dirty="0">
+                <a:solidFill>
+                  <a:srgbClr val="1C2833"/>
+                </a:solidFill>
+                <a:latin typeface="Arial" pitchFamily="34" charset="0"/>
+                <a:ea typeface="Arial" pitchFamily="34" charset="-122"/>
+                <a:cs typeface="Arial" pitchFamily="34" charset="-120"/>
+              </a:rPr>
+              <a:t> Fill in the date column and the tithi-name column only. Skip the end-times and the Moon shapes for this lesson.</a:t>
+            </a:r>
+            <a:endParaRPr lang="en-US" sz="1200" dirty="0"/>
+          </a:p>
+        </p:txBody>
+      </p:sp>
+      <p:sp>
+        <p:nvSpPr>
+          <p:cNvPr id="5" name="Text 3"/>
+          <p:cNvSpPr/>
+          <p:nvPr/>
+        </p:nvSpPr>
+        <p:spPr>
+          <a:xfrm>
+            <a:off x="406301" y="4434929"/>
+            <a:ext cx="8498026" cy="213271"/>
+          </a:xfrm>
+          <a:prstGeom prst="rect">
+            <a:avLst/>
+          </a:prstGeom>
+          <a:noFill/>
+          <a:ln/>
+        </p:spPr>
+        <p:txBody>
+          <a:bodyPr wrap="square" lIns="0" tIns="0" rIns="0" bIns="0" rtlCol="0" anchor="t"/>
+          <a:lstStyle/>
+          <a:p>
+            <a:pPr algn="l" indent="0" marL="0">
+              <a:lnSpc>
+                <a:spcPts val="1680"/>
+              </a:lnSpc>
+              <a:spcBef>
+                <a:spcPts val="300"/>
+              </a:spcBef>
+              <a:spcAft>
+                <a:spcPts val="300"/>
+              </a:spcAft>
+              <a:buNone/>
+            </a:pPr>
+            <a:r>
+              <a:rPr lang="en-US" sz="1200" dirty="0">
+                <a:solidFill>
+                  <a:srgbClr val="1C2833"/>
+                </a:solidFill>
+                <a:latin typeface="Arial" pitchFamily="34" charset="0"/>
+                <a:ea typeface="Arial" pitchFamily="34" charset="-122"/>
+                <a:cs typeface="Arial" pitchFamily="34" charset="-120"/>
+              </a:rPr>
+              <a:t>Middle ·  · IKS Curriculum</a:t>
+            </a:r>
+            <a:endParaRPr lang="en-US" sz="1200" dirty="0"/>
+          </a:p>
+        </p:txBody>
+      </p:sp>
+    </p:spTree>
+  </p:cSld>
+  <p:clrMapOvr>
+    <a:masterClrMapping/>
+  </p:clrMapOvr>
+</p:sld>
+</file>
+
+<file path=ppt/slides/slide19.xml><?xml version="1.0" encoding="utf-8"?>
+<p:sld xmlns:a="http://schemas.openxmlformats.org/drawingml/2006/main" xmlns:r="http://schemas.openxmlformats.org/officeDocument/2006/relationships" xmlns:p="http://schemas.openxmlformats.org/presentationml/2006/main">
+  <p:cSld name="Slide 19">
+    <p:bg>
+      <p:bgPr>
+        <a:solidFill>
+          <a:srgbClr val="FFFFFF"/>
+        </a:solidFill>
+      </p:bgPr>
+    </p:bg>
+    <p:spTree>
+      <p:nvGrpSpPr>
+        <p:cNvPr id="1" name=""/>
+        <p:cNvGrpSpPr/>
+        <p:nvPr/>
+      </p:nvGrpSpPr>
+      <p:grpSpPr>
+        <a:xfrm>
+          <a:off x="0" y="0"/>
+          <a:ext cx="0" cy="0"/>
+          <a:chOff x="0" y="0"/>
+          <a:chExt cx="0" cy="0"/>
+        </a:xfrm>
+      </p:grpSpPr>
+      <p:sp>
+        <p:nvSpPr>
+          <p:cNvPr id="2" name="Text 0"/>
+          <p:cNvSpPr/>
+          <p:nvPr/>
+        </p:nvSpPr>
+        <p:spPr>
+          <a:xfrm>
+            <a:off x="0" y="0"/>
+            <a:ext cx="9144000" cy="101501"/>
+          </a:xfrm>
+          <a:prstGeom prst="rect">
+            <a:avLst/>
+          </a:prstGeom>
+          <a:solidFill>
+            <a:srgbClr val="277884"/>
+          </a:solidFill>
+          <a:ln/>
+        </p:spPr>
+        <p:txBody>
+          <a:bodyPr wrap="square" rtlCol="0" anchor="ctr"/>
+          <a:lstStyle/>
+          <a:p>
+            <a:pPr indent="0" marL="0">
+              <a:buNone/>
+            </a:pPr>
+            <a:endParaRPr lang="en-US" dirty="0"/>
+          </a:p>
+        </p:txBody>
+      </p:sp>
+      <p:sp>
+        <p:nvSpPr>
+          <p:cNvPr id="3" name="Text 1"/>
+          <p:cNvSpPr/>
+          <p:nvPr/>
+        </p:nvSpPr>
+        <p:spPr>
+          <a:xfrm>
+            <a:off x="406301" y="457051"/>
+            <a:ext cx="8498026" cy="274290"/>
+          </a:xfrm>
+          <a:prstGeom prst="rect">
+            <a:avLst/>
+          </a:prstGeom>
+          <a:noFill/>
+          <a:ln/>
+        </p:spPr>
+        <p:txBody>
+          <a:bodyPr wrap="square" lIns="0" tIns="0" rIns="0" bIns="0" rtlCol="0" anchor="t"/>
+          <a:lstStyle/>
+          <a:p>
+            <a:pPr algn="l" indent="0" marL="0">
+              <a:lnSpc>
+                <a:spcPts val="2160"/>
+              </a:lnSpc>
+              <a:spcBef>
+                <a:spcPts val="600"/>
+              </a:spcBef>
+              <a:spcAft>
+                <a:spcPts val="800"/>
+              </a:spcAft>
+              <a:buNone/>
+            </a:pPr>
+            <a:r>
+              <a:rPr lang="en-US" sz="1800" b="1" dirty="0">
+                <a:solidFill>
+                  <a:srgbClr val="FE4447"/>
+                </a:solidFill>
+                <a:latin typeface="Georgia" pitchFamily="34" charset="0"/>
+                <a:ea typeface="Georgia" pitchFamily="34" charset="-122"/>
+                <a:cs typeface="Georgia" pitchFamily="34" charset="-120"/>
+              </a:rPr>
+              <a:t>Teacher notes</a:t>
+            </a:r>
+            <a:endParaRPr lang="en-US" sz="1800" dirty="0"/>
+          </a:p>
+        </p:txBody>
+      </p:sp>
+      <p:sp>
+        <p:nvSpPr>
+          <p:cNvPr id="4" name="Text 2"/>
+          <p:cNvSpPr/>
+          <p:nvPr/>
+        </p:nvSpPr>
+        <p:spPr>
+          <a:xfrm>
+            <a:off x="634901" y="883593"/>
+            <a:ext cx="8102798" cy="1386483"/>
+          </a:xfrm>
+          <a:prstGeom prst="rect">
+            <a:avLst/>
+          </a:prstGeom>
+          <a:noFill/>
+          <a:ln/>
+        </p:spPr>
+        <p:txBody>
+          <a:bodyPr wrap="square" lIns="0" tIns="0" rIns="0" bIns="0" rtlCol="0" anchor="t"/>
+          <a:lstStyle/>
+          <a:p>
+            <a:pPr algn="l" marL="342900" indent="-342900">
+              <a:lnSpc>
+                <a:spcPts val="1620"/>
+              </a:lnSpc>
+              <a:spcAft>
+                <a:spcPts val="300"/>
+              </a:spcAft>
+              <a:buSzPct val="100000"/>
+              <a:buChar char="•"/>
+            </a:pPr>
+            <a:pPr algn="l" indent="0" marL="0">
+              <a:lnSpc>
+                <a:spcPts val="1620"/>
+              </a:lnSpc>
+              <a:spcAft>
+                <a:spcPts val="300"/>
+              </a:spcAft>
+              <a:buNone/>
+            </a:pPr>
+            <a:r>
+              <a:rPr lang="en-US" sz="1200" i="1" dirty="0">
+                <a:solidFill>
+                  <a:srgbClr val="1C2833"/>
+                </a:solidFill>
+                <a:latin typeface="Arial" pitchFamily="34" charset="0"/>
+                <a:ea typeface="Arial" pitchFamily="34" charset="-122"/>
+                <a:cs typeface="Arial" pitchFamily="34" charset="-120"/>
+              </a:rPr>
+              <a:t>Choose ONE</a:t>
+            </a:r>
+            <a:pPr algn="l" indent="0" marL="0">
+              <a:lnSpc>
+                <a:spcPts val="1620"/>
+              </a:lnSpc>
+              <a:spcAft>
+                <a:spcPts val="300"/>
+              </a:spcAft>
+              <a:buNone/>
+            </a:pPr>
+            <a:r>
+              <a:rPr lang="en-US" sz="1200" dirty="0">
+                <a:solidFill>
+                  <a:srgbClr val="1C2833"/>
+                </a:solidFill>
+                <a:latin typeface="Arial" pitchFamily="34" charset="0"/>
+                <a:ea typeface="Arial" pitchFamily="34" charset="-122"/>
+                <a:cs typeface="Arial" pitchFamily="34" charset="-120"/>
+              </a:rPr>
+              <a:t>pañcāṅga</a:t>
+            </a:r>
+            <a:pPr algn="l" indent="0" marL="0">
+              <a:lnSpc>
+                <a:spcPts val="1620"/>
+              </a:lnSpc>
+              <a:spcAft>
+                <a:spcPts val="300"/>
+              </a:spcAft>
+              <a:buNone/>
+            </a:pPr>
+            <a:r>
+              <a:rPr lang="en-US" sz="1200" i="1" dirty="0">
+                <a:solidFill>
+                  <a:srgbClr val="1C2833"/>
+                </a:solidFill>
+                <a:latin typeface="Arial" pitchFamily="34" charset="0"/>
+                <a:ea typeface="Arial" pitchFamily="34" charset="-122"/>
+                <a:cs typeface="Arial" pitchFamily="34" charset="-120"/>
+              </a:rPr>
+              <a:t> source for the entire class.</a:t>
+            </a:r>
+            <a:pPr algn="l" indent="0" marL="0">
+              <a:lnSpc>
+                <a:spcPts val="1620"/>
+              </a:lnSpc>
+              <a:spcAft>
+                <a:spcPts val="300"/>
+              </a:spcAft>
+              <a:buNone/>
+            </a:pPr>
+            <a:r>
+              <a:rPr lang="en-US" sz="1200" i="1" dirty="0">
+                <a:solidFill>
+                  <a:srgbClr val="1C2833"/>
+                </a:solidFill>
+                <a:latin typeface="Arial" pitchFamily="34" charset="0"/>
+                <a:ea typeface="Arial" pitchFamily="34" charset="-122"/>
+                <a:cs typeface="Arial" pitchFamily="34" charset="-120"/>
+              </a:rPr>
+              <a:t> Different</a:t>
+            </a:r>
+            <a:pPr algn="l" indent="0" marL="0">
+              <a:lnSpc>
+                <a:spcPts val="1620"/>
+              </a:lnSpc>
+              <a:spcAft>
+                <a:spcPts val="300"/>
+              </a:spcAft>
+              <a:buNone/>
+            </a:pPr>
+            <a:r>
+              <a:rPr lang="en-US" sz="1200" dirty="0">
+                <a:solidFill>
+                  <a:srgbClr val="1C2833"/>
+                </a:solidFill>
+                <a:latin typeface="Arial" pitchFamily="34" charset="0"/>
+                <a:ea typeface="Arial" pitchFamily="34" charset="-122"/>
+                <a:cs typeface="Arial" pitchFamily="34" charset="-120"/>
+              </a:rPr>
+              <a:t>pañcāṅgas* may use different sunrise locations or computational systems and give slightly different tithi names for borderline dates. Pick one (Drik Panchang is well-known; Mypanchang.com is also reliable) and stick to it for the whole module.</a:t>
+            </a:r>
+            <a:endParaRPr lang="en-US" sz="1200" dirty="0"/>
+          </a:p>
+          <a:p>
+            <a:pPr algn="l" marL="342900" indent="-342900">
+              <a:lnSpc>
+                <a:spcPts val="1620"/>
+              </a:lnSpc>
+              <a:spcAft>
+                <a:spcPts val="300"/>
+              </a:spcAft>
+              <a:buSzPct val="100000"/>
+              <a:buChar char="•"/>
+            </a:pPr>
+            <a:r>
+              <a:rPr lang="en-US" sz="1200" dirty="0">
+                <a:solidFill>
+                  <a:srgbClr val="1C2833"/>
+                </a:solidFill>
+                <a:latin typeface="Arial" pitchFamily="34" charset="0"/>
+                <a:ea typeface="Arial" pitchFamily="34" charset="-122"/>
+                <a:cs typeface="Arial" pitchFamily="34" charset="-120"/>
+              </a:rPr>
+              <a:t>Some calendars list two tithis on a single date (e.g. "Caturthī upto 14:37, then Pañcamī"). This is normal. Have students enter the tithi at sunrise, then note the transition.</a:t>
+            </a:r>
+            <a:endParaRPr lang="en-US" sz="1200" dirty="0"/>
+          </a:p>
+          <a:p>
+            <a:pPr algn="l" marL="342900" indent="-342900">
+              <a:lnSpc>
+                <a:spcPts val="1620"/>
+              </a:lnSpc>
+              <a:spcAft>
+                <a:spcPts val="300"/>
+              </a:spcAft>
+              <a:buSzPct val="100000"/>
+              <a:buChar char="•"/>
+            </a:pPr>
+            <a:r>
+              <a:rPr lang="en-US" sz="1200" dirty="0">
+                <a:solidFill>
+                  <a:srgbClr val="1C2833"/>
+                </a:solidFill>
+                <a:latin typeface="Arial" pitchFamily="34" charset="0"/>
+                <a:ea typeface="Arial" pitchFamily="34" charset="-122"/>
+                <a:cs typeface="Arial" pitchFamily="34" charset="-120"/>
+              </a:rPr>
+              <a:t>The colour-coding (yellow for </a:t>
+            </a:r>
+            <a:pPr algn="l" indent="0" marL="0">
+              <a:lnSpc>
+                <a:spcPts val="1620"/>
+              </a:lnSpc>
+              <a:spcAft>
+                <a:spcPts val="300"/>
+              </a:spcAft>
+              <a:buNone/>
+            </a:pPr>
+            <a:r>
+              <a:rPr lang="en-US" sz="1200" i="1" dirty="0">
+                <a:solidFill>
+                  <a:srgbClr val="1C2833"/>
+                </a:solidFill>
+                <a:latin typeface="Arial" pitchFamily="34" charset="0"/>
+                <a:ea typeface="Arial" pitchFamily="34" charset="-122"/>
+                <a:cs typeface="Arial" pitchFamily="34" charset="-120"/>
+              </a:rPr>
+              <a:t>śukla</a:t>
+            </a:r>
+            <a:pPr algn="l" indent="0" marL="0">
+              <a:lnSpc>
+                <a:spcPts val="1620"/>
+              </a:lnSpc>
+              <a:spcAft>
+                <a:spcPts val="300"/>
+              </a:spcAft>
+              <a:buNone/>
+            </a:pPr>
+            <a:r>
+              <a:rPr lang="en-US" sz="1200" dirty="0">
+                <a:solidFill>
+                  <a:srgbClr val="1C2833"/>
+                </a:solidFill>
+                <a:latin typeface="Arial" pitchFamily="34" charset="0"/>
+                <a:ea typeface="Arial" pitchFamily="34" charset="-122"/>
+                <a:cs typeface="Arial" pitchFamily="34" charset="-120"/>
+              </a:rPr>
+              <a:t>, blue/grey for </a:t>
+            </a:r>
+            <a:pPr algn="l" indent="0" marL="0">
+              <a:lnSpc>
+                <a:spcPts val="1620"/>
+              </a:lnSpc>
+              <a:spcAft>
+                <a:spcPts val="300"/>
+              </a:spcAft>
+              <a:buNone/>
+            </a:pPr>
+            <a:r>
+              <a:rPr lang="en-US" sz="1200" i="1" dirty="0">
+                <a:solidFill>
+                  <a:srgbClr val="1C2833"/>
+                </a:solidFill>
+                <a:latin typeface="Arial" pitchFamily="34" charset="0"/>
+                <a:ea typeface="Arial" pitchFamily="34" charset="-122"/>
+                <a:cs typeface="Arial" pitchFamily="34" charset="-120"/>
+              </a:rPr>
+              <a:t>kṛṣṇa</a:t>
+            </a:r>
+            <a:pPr algn="l" indent="0" marL="0">
+              <a:lnSpc>
+                <a:spcPts val="1620"/>
+              </a:lnSpc>
+              <a:spcAft>
+                <a:spcPts val="300"/>
+              </a:spcAft>
+              <a:buNone/>
+            </a:pPr>
+            <a:r>
+              <a:rPr lang="en-US" sz="1200" dirty="0">
+                <a:solidFill>
+                  <a:srgbClr val="1C2833"/>
+                </a:solidFill>
+                <a:latin typeface="Arial" pitchFamily="34" charset="0"/>
+                <a:ea typeface="Arial" pitchFamily="34" charset="-122"/>
+                <a:cs typeface="Arial" pitchFamily="34" charset="-120"/>
+              </a:rPr>
+              <a:t>) makes the calendar legible at a glance. Insist on it.</a:t>
             </a:r>
             <a:endParaRPr lang="en-US" sz="1200" dirty="0"/>
           </a:p>
@@ -3806,7 +7069,7 @@
                 <a:ea typeface="Georgia" pitchFamily="34" charset="-122"/>
                 <a:cs typeface="Georgia" pitchFamily="34" charset="-120"/>
               </a:rPr>
-              <a:t>Materials</a:t>
+              <a:t>Learning objective</a:t>
             </a:r>
             <a:endParaRPr lang="en-US" sz="1800" dirty="0"/>
           </a:p>
@@ -3821,7 +7084,7 @@
         <p:spPr>
           <a:xfrm>
             <a:off x="406301" y="870942"/>
-            <a:ext cx="8498026" cy="639812"/>
+            <a:ext cx="8498026" cy="426541"/>
           </a:xfrm>
           <a:prstGeom prst="rect">
             <a:avLst/>
@@ -3854,8 +7117,33 @@
                 <a:ea typeface="Arial" pitchFamily="34" charset="-122"/>
                 <a:cs typeface="Arial" pitchFamily="34" charset="-120"/>
               </a:rPr>
-              <a:t>– One printed page of a current-month </a:t>
-            </a:r>
+              <a:t>Each student (or pair) will build a tithi calendar for the current calendar month — labelling each date with its tithi name, pakṣa, and expected Moon shape.</a:t>
+            </a:r>
+            <a:endParaRPr lang="en-US" sz="1200" dirty="0"/>
+          </a:p>
+        </p:txBody>
+      </p:sp>
+      <p:sp>
+        <p:nvSpPr>
+          <p:cNvPr id="5" name="Text 3"/>
+          <p:cNvSpPr/>
+          <p:nvPr/>
+        </p:nvSpPr>
+        <p:spPr>
+          <a:xfrm>
+            <a:off x="406301" y="4434929"/>
+            <a:ext cx="8498026" cy="213271"/>
+          </a:xfrm>
+          <a:prstGeom prst="rect">
+            <a:avLst/>
+          </a:prstGeom>
+          <a:noFill/>
+          <a:ln/>
+        </p:spPr>
+        <p:txBody>
+          <a:bodyPr wrap="square" lIns="0" tIns="0" rIns="0" bIns="0" rtlCol="0" anchor="t"/>
+          <a:lstStyle/>
+          <a:p>
             <a:pPr algn="l" indent="0" marL="0">
               <a:lnSpc>
                 <a:spcPts val="1680"/>
@@ -3869,6 +7157,182 @@
               <a:buNone/>
             </a:pPr>
             <a:r>
+              <a:rPr lang="en-US" sz="1200" dirty="0">
+                <a:solidFill>
+                  <a:srgbClr val="1C2833"/>
+                </a:solidFill>
+                <a:latin typeface="Arial" pitchFamily="34" charset="0"/>
+                <a:ea typeface="Arial" pitchFamily="34" charset="-122"/>
+                <a:cs typeface="Arial" pitchFamily="34" charset="-120"/>
+              </a:rPr>
+              <a:t>Middle ·  · IKS Curriculum</a:t>
+            </a:r>
+            <a:endParaRPr lang="en-US" sz="1200" dirty="0"/>
+          </a:p>
+        </p:txBody>
+      </p:sp>
+    </p:spTree>
+  </p:cSld>
+  <p:clrMapOvr>
+    <a:masterClrMapping/>
+  </p:clrMapOvr>
+</p:sld>
+</file>
+
+<file path=ppt/slides/slide20.xml><?xml version="1.0" encoding="utf-8"?>
+<p:sld xmlns:a="http://schemas.openxmlformats.org/drawingml/2006/main" xmlns:r="http://schemas.openxmlformats.org/officeDocument/2006/relationships" xmlns:p="http://schemas.openxmlformats.org/presentationml/2006/main">
+  <p:cSld name="Slide 20">
+    <p:bg>
+      <p:bgPr>
+        <a:solidFill>
+          <a:srgbClr val="FFFFFF"/>
+        </a:solidFill>
+      </p:bgPr>
+    </p:bg>
+    <p:spTree>
+      <p:nvGrpSpPr>
+        <p:cNvPr id="1" name=""/>
+        <p:cNvGrpSpPr/>
+        <p:nvPr/>
+      </p:nvGrpSpPr>
+      <p:grpSpPr>
+        <a:xfrm>
+          <a:off x="0" y="0"/>
+          <a:ext cx="0" cy="0"/>
+          <a:chOff x="0" y="0"/>
+          <a:chExt cx="0" cy="0"/>
+        </a:xfrm>
+      </p:grpSpPr>
+      <p:sp>
+        <p:nvSpPr>
+          <p:cNvPr id="2" name="Text 0"/>
+          <p:cNvSpPr/>
+          <p:nvPr/>
+        </p:nvSpPr>
+        <p:spPr>
+          <a:xfrm>
+            <a:off x="0" y="0"/>
+            <a:ext cx="9144000" cy="101501"/>
+          </a:xfrm>
+          <a:prstGeom prst="rect">
+            <a:avLst/>
+          </a:prstGeom>
+          <a:solidFill>
+            <a:srgbClr val="277884"/>
+          </a:solidFill>
+          <a:ln/>
+        </p:spPr>
+        <p:txBody>
+          <a:bodyPr wrap="square" rtlCol="0" anchor="ctr"/>
+          <a:lstStyle/>
+          <a:p>
+            <a:pPr indent="0" marL="0">
+              <a:buNone/>
+            </a:pPr>
+            <a:endParaRPr lang="en-US" dirty="0"/>
+          </a:p>
+        </p:txBody>
+      </p:sp>
+      <p:sp>
+        <p:nvSpPr>
+          <p:cNvPr id="3" name="Text 1"/>
+          <p:cNvSpPr/>
+          <p:nvPr/>
+        </p:nvSpPr>
+        <p:spPr>
+          <a:xfrm>
+            <a:off x="406301" y="457051"/>
+            <a:ext cx="8498026" cy="274290"/>
+          </a:xfrm>
+          <a:prstGeom prst="rect">
+            <a:avLst/>
+          </a:prstGeom>
+          <a:noFill/>
+          <a:ln/>
+        </p:spPr>
+        <p:txBody>
+          <a:bodyPr wrap="square" lIns="0" tIns="0" rIns="0" bIns="0" rtlCol="0" anchor="t"/>
+          <a:lstStyle/>
+          <a:p>
+            <a:pPr algn="l" indent="0" marL="0">
+              <a:lnSpc>
+                <a:spcPts val="2160"/>
+              </a:lnSpc>
+              <a:spcBef>
+                <a:spcPts val="600"/>
+              </a:spcBef>
+              <a:spcAft>
+                <a:spcPts val="800"/>
+              </a:spcAft>
+              <a:buNone/>
+            </a:pPr>
+            <a:r>
+              <a:rPr lang="en-US" sz="1800" b="1" dirty="0">
+                <a:solidFill>
+                  <a:srgbClr val="FE4447"/>
+                </a:solidFill>
+                <a:latin typeface="Georgia" pitchFamily="34" charset="0"/>
+                <a:ea typeface="Georgia" pitchFamily="34" charset="-122"/>
+                <a:cs typeface="Georgia" pitchFamily="34" charset="-120"/>
+              </a:rPr>
+              <a:t>Teacher notes (cont.)</a:t>
+            </a:r>
+            <a:endParaRPr lang="en-US" sz="1800" dirty="0"/>
+          </a:p>
+        </p:txBody>
+      </p:sp>
+      <p:sp>
+        <p:nvSpPr>
+          <p:cNvPr id="4" name="Text 2"/>
+          <p:cNvSpPr/>
+          <p:nvPr/>
+        </p:nvSpPr>
+        <p:spPr>
+          <a:xfrm>
+            <a:off x="634901" y="883593"/>
+            <a:ext cx="8102798" cy="281880"/>
+          </a:xfrm>
+          <a:prstGeom prst="rect">
+            <a:avLst/>
+          </a:prstGeom>
+          <a:noFill/>
+          <a:ln/>
+        </p:spPr>
+        <p:txBody>
+          <a:bodyPr wrap="square" lIns="0" tIns="0" rIns="0" bIns="0" rtlCol="0" anchor="t"/>
+          <a:lstStyle/>
+          <a:p>
+            <a:pPr algn="l" marL="342900" indent="-342900">
+              <a:lnSpc>
+                <a:spcPts val="1620"/>
+              </a:lnSpc>
+              <a:spcAft>
+                <a:spcPts val="300"/>
+              </a:spcAft>
+              <a:buSzPct val="100000"/>
+              <a:buChar char="•"/>
+            </a:pPr>
+            <a:r>
+              <a:rPr lang="en-US" sz="1200" dirty="0">
+                <a:solidFill>
+                  <a:srgbClr val="1C2833"/>
+                </a:solidFill>
+                <a:latin typeface="Arial" pitchFamily="34" charset="0"/>
+                <a:ea typeface="Arial" pitchFamily="34" charset="-122"/>
+                <a:cs typeface="Arial" pitchFamily="34" charset="-120"/>
+              </a:rPr>
+              <a:t>Bring a backup: if printing fails, project the </a:t>
+            </a:r>
+            <a:pPr algn="l" indent="0" marL="0">
+              <a:lnSpc>
+                <a:spcPts val="1620"/>
+              </a:lnSpc>
+              <a:spcAft>
+                <a:spcPts val="300"/>
+              </a:spcAft>
+              <a:buNone/>
+            </a:pPr>
+            <a:r>
               <a:rPr lang="en-US" sz="1200" i="1" dirty="0">
                 <a:solidFill>
                   <a:srgbClr val="1C2833"/>
@@ -3881,6 +7345,51 @@
             </a:r>
             <a:pPr algn="l" indent="0" marL="0">
               <a:lnSpc>
+                <a:spcPts val="1620"/>
+              </a:lnSpc>
+              <a:spcAft>
+                <a:spcPts val="300"/>
+              </a:spcAft>
+              <a:buNone/>
+            </a:pPr>
+            <a:r>
+              <a:rPr lang="en-US" sz="1200" dirty="0">
+                <a:solidFill>
+                  <a:srgbClr val="1C2833"/>
+                </a:solidFill>
+                <a:latin typeface="Arial" pitchFamily="34" charset="0"/>
+                <a:ea typeface="Arial" pitchFamily="34" charset="-122"/>
+                <a:cs typeface="Arial" pitchFamily="34" charset="-120"/>
+              </a:rPr>
+              <a:t> for the whole class to read together. Less efficient but workable.</a:t>
+            </a:r>
+            <a:endParaRPr lang="en-US" sz="1200" dirty="0"/>
+          </a:p>
+        </p:txBody>
+      </p:sp>
+      <p:sp>
+        <p:nvSpPr>
+          <p:cNvPr id="5" name="Text 3"/>
+          <p:cNvSpPr/>
+          <p:nvPr/>
+        </p:nvSpPr>
+        <p:spPr>
+          <a:xfrm>
+            <a:off x="406301" y="4434929"/>
+            <a:ext cx="8498026" cy="213271"/>
+          </a:xfrm>
+          <a:prstGeom prst="rect">
+            <a:avLst/>
+          </a:prstGeom>
+          <a:noFill/>
+          <a:ln/>
+        </p:spPr>
+        <p:txBody>
+          <a:bodyPr wrap="square" lIns="0" tIns="0" rIns="0" bIns="0" rtlCol="0" anchor="t"/>
+          <a:lstStyle/>
+          <a:p>
+            <a:pPr algn="l" indent="0" marL="0">
+              <a:lnSpc>
                 <a:spcPts val="1680"/>
               </a:lnSpc>
               <a:spcBef>
@@ -3900,16 +7409,169 @@
                 <a:ea typeface="Arial" pitchFamily="34" charset="-122"/>
                 <a:cs typeface="Arial" pitchFamily="34" charset="-120"/>
               </a:rPr>
-              <a:t> per pair (Drik Panchang, Mypanchang, or any standard source). Confirm the source and timezone before printing. – A blank monthly calendar grid (printed handout — see activity-01) – Coloured pencils or markers (two colours — one for </a:t>
-            </a:r>
-            <a:pPr algn="l" indent="0" marL="0">
-              <a:lnSpc>
-                <a:spcPts val="1680"/>
+              <a:t>Middle ·  · IKS Curriculum</a:t>
+            </a:r>
+            <a:endParaRPr lang="en-US" sz="1200" dirty="0"/>
+          </a:p>
+        </p:txBody>
+      </p:sp>
+    </p:spTree>
+  </p:cSld>
+  <p:clrMapOvr>
+    <a:masterClrMapping/>
+  </p:clrMapOvr>
+</p:sld>
+</file>
+
+<file path=ppt/slides/slide21.xml><?xml version="1.0" encoding="utf-8"?>
+<p:sld xmlns:a="http://schemas.openxmlformats.org/drawingml/2006/main" xmlns:r="http://schemas.openxmlformats.org/officeDocument/2006/relationships" xmlns:p="http://schemas.openxmlformats.org/presentationml/2006/main">
+  <p:cSld name="Slide 21">
+    <p:bg>
+      <p:bgPr>
+        <a:solidFill>
+          <a:srgbClr val="FFFFFF"/>
+        </a:solidFill>
+      </p:bgPr>
+    </p:bg>
+    <p:spTree>
+      <p:nvGrpSpPr>
+        <p:cNvPr id="1" name=""/>
+        <p:cNvGrpSpPr/>
+        <p:nvPr/>
+      </p:nvGrpSpPr>
+      <p:grpSpPr>
+        <a:xfrm>
+          <a:off x="0" y="0"/>
+          <a:ext cx="0" cy="0"/>
+          <a:chOff x="0" y="0"/>
+          <a:chExt cx="0" cy="0"/>
+        </a:xfrm>
+      </p:grpSpPr>
+      <p:sp>
+        <p:nvSpPr>
+          <p:cNvPr id="2" name="Text 0"/>
+          <p:cNvSpPr/>
+          <p:nvPr/>
+        </p:nvSpPr>
+        <p:spPr>
+          <a:xfrm>
+            <a:off x="0" y="0"/>
+            <a:ext cx="9144000" cy="101501"/>
+          </a:xfrm>
+          <a:prstGeom prst="rect">
+            <a:avLst/>
+          </a:prstGeom>
+          <a:solidFill>
+            <a:srgbClr val="277884"/>
+          </a:solidFill>
+          <a:ln/>
+        </p:spPr>
+        <p:txBody>
+          <a:bodyPr wrap="square" rtlCol="0" anchor="ctr"/>
+          <a:lstStyle/>
+          <a:p>
+            <a:pPr indent="0" marL="0">
+              <a:buNone/>
+            </a:pPr>
+            <a:endParaRPr lang="en-US" dirty="0"/>
+          </a:p>
+        </p:txBody>
+      </p:sp>
+      <p:sp>
+        <p:nvSpPr>
+          <p:cNvPr id="3" name="Text 1"/>
+          <p:cNvSpPr/>
+          <p:nvPr/>
+        </p:nvSpPr>
+        <p:spPr>
+          <a:xfrm>
+            <a:off x="406301" y="457051"/>
+            <a:ext cx="8498026" cy="274290"/>
+          </a:xfrm>
+          <a:prstGeom prst="rect">
+            <a:avLst/>
+          </a:prstGeom>
+          <a:noFill/>
+          <a:ln/>
+        </p:spPr>
+        <p:txBody>
+          <a:bodyPr wrap="square" lIns="0" tIns="0" rIns="0" bIns="0" rtlCol="0" anchor="t"/>
+          <a:lstStyle/>
+          <a:p>
+            <a:pPr algn="l" indent="0" marL="0">
+              <a:lnSpc>
+                <a:spcPts val="2160"/>
               </a:lnSpc>
               <a:spcBef>
-                <a:spcPts val="300"/>
+                <a:spcPts val="600"/>
               </a:spcBef>
               <a:spcAft>
+                <a:spcPts val="800"/>
+              </a:spcAft>
+              <a:buNone/>
+            </a:pPr>
+            <a:r>
+              <a:rPr lang="en-US" sz="1800" b="1" dirty="0">
+                <a:solidFill>
+                  <a:srgbClr val="FE4447"/>
+                </a:solidFill>
+                <a:latin typeface="Georgia" pitchFamily="34" charset="0"/>
+                <a:ea typeface="Georgia" pitchFamily="34" charset="-122"/>
+                <a:cs typeface="Georgia" pitchFamily="34" charset="-120"/>
+              </a:rPr>
+              <a:t>Citation(s) used in this lesson</a:t>
+            </a:r>
+            <a:endParaRPr lang="en-US" sz="1800" dirty="0"/>
+          </a:p>
+        </p:txBody>
+      </p:sp>
+      <p:sp>
+        <p:nvSpPr>
+          <p:cNvPr id="4" name="Text 2"/>
+          <p:cNvSpPr/>
+          <p:nvPr/>
+        </p:nvSpPr>
+        <p:spPr>
+          <a:xfrm>
+            <a:off x="634901" y="883593"/>
+            <a:ext cx="8102798" cy="487561"/>
+          </a:xfrm>
+          <a:prstGeom prst="rect">
+            <a:avLst/>
+          </a:prstGeom>
+          <a:noFill/>
+          <a:ln/>
+        </p:spPr>
+        <p:txBody>
+          <a:bodyPr wrap="square" lIns="0" tIns="0" rIns="0" bIns="0" rtlCol="0" anchor="t"/>
+          <a:lstStyle/>
+          <a:p>
+            <a:pPr algn="l" marL="342900" indent="-342900">
+              <a:lnSpc>
+                <a:spcPts val="1620"/>
+              </a:lnSpc>
+              <a:spcAft>
+                <a:spcPts val="300"/>
+              </a:spcAft>
+              <a:buSzPct val="100000"/>
+              <a:buChar char="•"/>
+            </a:pPr>
+            <a:r>
+              <a:rPr lang="en-US" sz="1200" dirty="0">
+                <a:solidFill>
+                  <a:srgbClr val="1C2833"/>
+                </a:solidFill>
+                <a:latin typeface="Arial" pitchFamily="34" charset="0"/>
+                <a:ea typeface="Arial" pitchFamily="34" charset="-122"/>
+                <a:cs typeface="Arial" pitchFamily="34" charset="-120"/>
+              </a:rPr>
+              <a:t>The class </a:t>
+            </a:r>
+            <a:pPr algn="l" indent="0" marL="0">
+              <a:lnSpc>
+                <a:spcPts val="1620"/>
+              </a:lnSpc>
+              <a:spcAft>
                 <a:spcPts val="300"/>
               </a:spcAft>
               <a:buNone/>
@@ -3923,38 +7585,32 @@
                 <a:ea typeface="Arial" pitchFamily="34" charset="-122"/>
                 <a:cs typeface="Arial" pitchFamily="34" charset="-120"/>
               </a:rPr>
-              <a:t>śukla</a:t>
-            </a:r>
-            <a:pPr algn="l" indent="0" marL="0">
-              <a:lnSpc>
-                <a:spcPts val="1680"/>
-              </a:lnSpc>
-              <a:spcBef>
-                <a:spcPts val="300"/>
-              </a:spcBef>
-              <a:spcAft>
-                <a:spcPts val="300"/>
-              </a:spcAft>
-              <a:buNone/>
-            </a:pPr>
-            <a:r>
-              <a:rPr lang="en-US" sz="1200" dirty="0">
-                <a:solidFill>
-                  <a:srgbClr val="1C2833"/>
-                </a:solidFill>
-                <a:latin typeface="Arial" pitchFamily="34" charset="0"/>
-                <a:ea typeface="Arial" pitchFamily="34" charset="-122"/>
-                <a:cs typeface="Arial" pitchFamily="34" charset="-120"/>
-              </a:rPr>
-              <a:t>, one for </a:t>
-            </a:r>
-            <a:pPr algn="l" indent="0" marL="0">
-              <a:lnSpc>
-                <a:spcPts val="1680"/>
-              </a:lnSpc>
-              <a:spcBef>
-                <a:spcPts val="300"/>
-              </a:spcBef>
+              <a:t>pañcāṅga</a:t>
+            </a:r>
+            <a:pPr algn="l" indent="0" marL="0">
+              <a:lnSpc>
+                <a:spcPts val="1620"/>
+              </a:lnSpc>
+              <a:spcAft>
+                <a:spcPts val="300"/>
+              </a:spcAft>
+              <a:buNone/>
+            </a:pPr>
+            <a:r>
+              <a:rPr lang="en-US" sz="1200" dirty="0">
+                <a:solidFill>
+                  <a:srgbClr val="1C2833"/>
+                </a:solidFill>
+                <a:latin typeface="Arial" pitchFamily="34" charset="0"/>
+                <a:ea typeface="Arial" pitchFamily="34" charset="-122"/>
+                <a:cs typeface="Arial" pitchFamily="34" charset="-120"/>
+              </a:rPr>
+              <a:t> source (named on the board): use this consistently. The data is computed using the same astronomical principles described in the </a:t>
+            </a:r>
+            <a:pPr algn="l" indent="0" marL="0">
+              <a:lnSpc>
+                <a:spcPts val="1620"/>
+              </a:lnSpc>
               <a:spcAft>
                 <a:spcPts val="300"/>
               </a:spcAft>
@@ -3969,30 +7625,27 @@
                 <a:ea typeface="Arial" pitchFamily="34" charset="-122"/>
                 <a:cs typeface="Arial" pitchFamily="34" charset="-120"/>
               </a:rPr>
-              <a:t>kṛṣṇa</a:t>
-            </a:r>
-            <a:pPr algn="l" indent="0" marL="0">
-              <a:lnSpc>
-                <a:spcPts val="1680"/>
-              </a:lnSpc>
-              <a:spcBef>
-                <a:spcPts val="300"/>
-              </a:spcBef>
-              <a:spcAft>
-                <a:spcPts val="300"/>
-              </a:spcAft>
-              <a:buNone/>
-            </a:pPr>
-            <a:r>
-              <a:rPr lang="en-US" sz="1200" dirty="0">
-                <a:solidFill>
-                  <a:srgbClr val="1C2833"/>
-                </a:solidFill>
-                <a:latin typeface="Arial" pitchFamily="34" charset="0"/>
-                <a:ea typeface="Arial" pitchFamily="34" charset="-122"/>
-                <a:cs typeface="Arial" pitchFamily="34" charset="-120"/>
-              </a:rPr>
-              <a:t>) – Notebooks</a:t>
+              <a:t>Sūrya-siddhānta</a:t>
+            </a:r>
+            <a:pPr algn="l" indent="0" marL="0">
+              <a:lnSpc>
+                <a:spcPts val="1620"/>
+              </a:lnSpc>
+              <a:spcAft>
+                <a:spcPts val="300"/>
+              </a:spcAft>
+              <a:buNone/>
+            </a:pPr>
+            <a:r>
+              <a:rPr lang="en-US" sz="1200" dirty="0">
+                <a:solidFill>
+                  <a:srgbClr val="1C2833"/>
+                </a:solidFill>
+                <a:latin typeface="Arial" pitchFamily="34" charset="0"/>
+                <a:ea typeface="Arial" pitchFamily="34" charset="-122"/>
+                <a:cs typeface="Arial" pitchFamily="34" charset="-120"/>
+              </a:rPr>
+              <a:t> — paraphrased only; no verse cited.</a:t>
             </a:r>
             <a:endParaRPr lang="en-US" sz="1200" dirty="0"/>
           </a:p>
@@ -4150,7 +7803,7 @@
                 <a:ea typeface="Georgia" pitchFamily="34" charset="-122"/>
                 <a:cs typeface="Georgia" pitchFamily="34" charset="-120"/>
               </a:rPr>
-              <a:t>Vocabulary reused today</a:t>
+              <a:t>Materials</a:t>
             </a:r>
             <a:endParaRPr lang="en-US" sz="1800" dirty="0"/>
           </a:p>
@@ -4165,7 +7818,7 @@
         <p:spPr>
           <a:xfrm>
             <a:off x="634901" y="883593"/>
-            <a:ext cx="8102798" cy="281880"/>
+            <a:ext cx="8102798" cy="1218902"/>
           </a:xfrm>
           <a:prstGeom prst="rect">
             <a:avLst/>
@@ -4188,6 +7841,26 @@
               <a:buChar char="•"/>
             </a:pPr>
             <a:r>
+              <a:rPr lang="en-US" sz="1200" dirty="0">
+                <a:solidFill>
+                  <a:srgbClr val="1C2833"/>
+                </a:solidFill>
+                <a:latin typeface="Arial" pitchFamily="34" charset="0"/>
+                <a:ea typeface="Arial" pitchFamily="34" charset="-122"/>
+                <a:cs typeface="Arial" pitchFamily="34" charset="-120"/>
+              </a:rPr>
+              <a:t>One printed page of a current-month </a:t>
+            </a:r>
+            <a:pPr algn="l" indent="0" marL="0">
+              <a:lnSpc>
+                <a:spcPts val="1620"/>
+              </a:lnSpc>
+              <a:spcAft>
+                <a:spcPts val="300"/>
+              </a:spcAft>
+              <a:buNone/>
+            </a:pPr>
+            <a:r>
               <a:rPr lang="en-US" sz="1200" i="1" dirty="0">
                 <a:solidFill>
                   <a:srgbClr val="1C2833"/>
@@ -4196,27 +7869,75 @@
                 <a:ea typeface="Arial" pitchFamily="34" charset="-122"/>
                 <a:cs typeface="Arial" pitchFamily="34" charset="-120"/>
               </a:rPr>
-              <a:t>tithi</a:t>
-            </a:r>
-            <a:pPr algn="l" indent="0" marL="0">
-              <a:lnSpc>
-                <a:spcPts val="1620"/>
-              </a:lnSpc>
-              <a:spcAft>
-                <a:spcPts val="300"/>
-              </a:spcAft>
-              <a:buNone/>
-            </a:pPr>
-            <a:r>
-              <a:rPr lang="en-US" sz="1200" dirty="0">
-                <a:solidFill>
-                  <a:srgbClr val="1C2833"/>
-                </a:solidFill>
-                <a:latin typeface="Arial" pitchFamily="34" charset="0"/>
-                <a:ea typeface="Arial" pitchFamily="34" charset="-122"/>
-                <a:cs typeface="Arial" pitchFamily="34" charset="-120"/>
-              </a:rPr>
-              <a:t>, </a:t>
+              <a:t>pañcāṅga</a:t>
+            </a:r>
+            <a:pPr algn="l" indent="0" marL="0">
+              <a:lnSpc>
+                <a:spcPts val="1620"/>
+              </a:lnSpc>
+              <a:spcAft>
+                <a:spcPts val="300"/>
+              </a:spcAft>
+              <a:buNone/>
+            </a:pPr>
+            <a:r>
+              <a:rPr lang="en-US" sz="1200" dirty="0">
+                <a:solidFill>
+                  <a:srgbClr val="1C2833"/>
+                </a:solidFill>
+                <a:latin typeface="Arial" pitchFamily="34" charset="0"/>
+                <a:ea typeface="Arial" pitchFamily="34" charset="-122"/>
+                <a:cs typeface="Arial" pitchFamily="34" charset="-120"/>
+              </a:rPr>
+              <a:t> per pair (Drik Panchang, Mypanchang, or any standard source). Confirm the source and timezone before printing.</a:t>
+            </a:r>
+            <a:endParaRPr lang="en-US" sz="1200" dirty="0"/>
+          </a:p>
+          <a:p>
+            <a:pPr algn="l" marL="342900" indent="-342900">
+              <a:lnSpc>
+                <a:spcPts val="1620"/>
+              </a:lnSpc>
+              <a:spcAft>
+                <a:spcPts val="300"/>
+              </a:spcAft>
+              <a:buSzPct val="100000"/>
+              <a:buChar char="•"/>
+            </a:pPr>
+            <a:r>
+              <a:rPr lang="en-US" sz="1200" dirty="0">
+                <a:solidFill>
+                  <a:srgbClr val="1C2833"/>
+                </a:solidFill>
+                <a:latin typeface="Arial" pitchFamily="34" charset="0"/>
+                <a:ea typeface="Arial" pitchFamily="34" charset="-122"/>
+                <a:cs typeface="Arial" pitchFamily="34" charset="-120"/>
+              </a:rPr>
+              <a:t>A blank monthly calendar grid (printed handout — see activity-01)</a:t>
+            </a:r>
+            <a:endParaRPr lang="en-US" sz="1200" dirty="0"/>
+          </a:p>
+          <a:p>
+            <a:pPr algn="l" marL="342900" indent="-342900">
+              <a:lnSpc>
+                <a:spcPts val="1620"/>
+              </a:lnSpc>
+              <a:spcAft>
+                <a:spcPts val="300"/>
+              </a:spcAft>
+              <a:buSzPct val="100000"/>
+              <a:buChar char="•"/>
+            </a:pPr>
+            <a:r>
+              <a:rPr lang="en-US" sz="1200" dirty="0">
+                <a:solidFill>
+                  <a:srgbClr val="1C2833"/>
+                </a:solidFill>
+                <a:latin typeface="Arial" pitchFamily="34" charset="0"/>
+                <a:ea typeface="Arial" pitchFamily="34" charset="-122"/>
+                <a:cs typeface="Arial" pitchFamily="34" charset="-120"/>
+              </a:rPr>
+              <a:t>Coloured pencils or markers (two colours — one for </a:t>
             </a:r>
             <a:pPr algn="l" indent="0" marL="0">
               <a:lnSpc>
@@ -4236,27 +7957,27 @@
                 <a:ea typeface="Arial" pitchFamily="34" charset="-122"/>
                 <a:cs typeface="Arial" pitchFamily="34" charset="-120"/>
               </a:rPr>
-              <a:t>pakṣa</a:t>
-            </a:r>
-            <a:pPr algn="l" indent="0" marL="0">
-              <a:lnSpc>
-                <a:spcPts val="1620"/>
-              </a:lnSpc>
-              <a:spcAft>
-                <a:spcPts val="300"/>
-              </a:spcAft>
-              <a:buNone/>
-            </a:pPr>
-            <a:r>
-              <a:rPr lang="en-US" sz="1200" dirty="0">
-                <a:solidFill>
-                  <a:srgbClr val="1C2833"/>
-                </a:solidFill>
-                <a:latin typeface="Arial" pitchFamily="34" charset="0"/>
-                <a:ea typeface="Arial" pitchFamily="34" charset="-122"/>
-                <a:cs typeface="Arial" pitchFamily="34" charset="-120"/>
-              </a:rPr>
-              <a:t>, </a:t>
+              <a:t>śukla</a:t>
+            </a:r>
+            <a:pPr algn="l" indent="0" marL="0">
+              <a:lnSpc>
+                <a:spcPts val="1620"/>
+              </a:lnSpc>
+              <a:spcAft>
+                <a:spcPts val="300"/>
+              </a:spcAft>
+              <a:buNone/>
+            </a:pPr>
+            <a:r>
+              <a:rPr lang="en-US" sz="1200" dirty="0">
+                <a:solidFill>
+                  <a:srgbClr val="1C2833"/>
+                </a:solidFill>
+                <a:latin typeface="Arial" pitchFamily="34" charset="0"/>
+                <a:ea typeface="Arial" pitchFamily="34" charset="-122"/>
+                <a:cs typeface="Arial" pitchFamily="34" charset="-120"/>
+              </a:rPr>
+              <a:t>, one for </a:t>
             </a:r>
             <a:pPr algn="l" indent="0" marL="0">
               <a:lnSpc>
@@ -4276,203 +7997,59 @@
                 <a:ea typeface="Arial" pitchFamily="34" charset="-122"/>
                 <a:cs typeface="Arial" pitchFamily="34" charset="-120"/>
               </a:rPr>
-              <a:t>śukla pakṣa</a:t>
-            </a:r>
-            <a:pPr algn="l" indent="0" marL="0">
-              <a:lnSpc>
-                <a:spcPts val="1620"/>
-              </a:lnSpc>
-              <a:spcAft>
-                <a:spcPts val="300"/>
-              </a:spcAft>
-              <a:buNone/>
-            </a:pPr>
-            <a:r>
-              <a:rPr lang="en-US" sz="1200" dirty="0">
-                <a:solidFill>
-                  <a:srgbClr val="1C2833"/>
-                </a:solidFill>
-                <a:latin typeface="Arial" pitchFamily="34" charset="0"/>
-                <a:ea typeface="Arial" pitchFamily="34" charset="-122"/>
-                <a:cs typeface="Arial" pitchFamily="34" charset="-120"/>
-              </a:rPr>
-              <a:t>, </a:t>
-            </a:r>
-            <a:pPr algn="l" indent="0" marL="0">
-              <a:lnSpc>
-                <a:spcPts val="1620"/>
-              </a:lnSpc>
-              <a:spcAft>
-                <a:spcPts val="300"/>
-              </a:spcAft>
-              <a:buNone/>
-            </a:pPr>
-            <a:r>
-              <a:rPr lang="en-US" sz="1200" i="1" dirty="0">
-                <a:solidFill>
-                  <a:srgbClr val="1C2833"/>
-                </a:solidFill>
-                <a:latin typeface="Arial" pitchFamily="34" charset="0"/>
-                <a:ea typeface="Arial" pitchFamily="34" charset="-122"/>
-                <a:cs typeface="Arial" pitchFamily="34" charset="-120"/>
-              </a:rPr>
-              <a:t>kṛṣṇa pakṣa</a:t>
-            </a:r>
-            <a:pPr algn="l" indent="0" marL="0">
-              <a:lnSpc>
-                <a:spcPts val="1620"/>
-              </a:lnSpc>
-              <a:spcAft>
-                <a:spcPts val="300"/>
-              </a:spcAft>
-              <a:buNone/>
-            </a:pPr>
-            <a:r>
-              <a:rPr lang="en-US" sz="1200" dirty="0">
-                <a:solidFill>
-                  <a:srgbClr val="1C2833"/>
-                </a:solidFill>
-                <a:latin typeface="Arial" pitchFamily="34" charset="0"/>
-                <a:ea typeface="Arial" pitchFamily="34" charset="-122"/>
-                <a:cs typeface="Arial" pitchFamily="34" charset="-120"/>
-              </a:rPr>
-              <a:t>, </a:t>
-            </a:r>
-            <a:pPr algn="l" indent="0" marL="0">
-              <a:lnSpc>
-                <a:spcPts val="1620"/>
-              </a:lnSpc>
-              <a:spcAft>
-                <a:spcPts val="300"/>
-              </a:spcAft>
-              <a:buNone/>
-            </a:pPr>
-            <a:r>
-              <a:rPr lang="en-US" sz="1200" i="1" dirty="0">
-                <a:solidFill>
-                  <a:srgbClr val="1C2833"/>
-                </a:solidFill>
-                <a:latin typeface="Arial" pitchFamily="34" charset="0"/>
-                <a:ea typeface="Arial" pitchFamily="34" charset="-122"/>
-                <a:cs typeface="Arial" pitchFamily="34" charset="-120"/>
-              </a:rPr>
-              <a:t>amāvasyā</a:t>
-            </a:r>
-            <a:pPr algn="l" indent="0" marL="0">
-              <a:lnSpc>
-                <a:spcPts val="1620"/>
-              </a:lnSpc>
-              <a:spcAft>
-                <a:spcPts val="300"/>
-              </a:spcAft>
-              <a:buNone/>
-            </a:pPr>
-            <a:r>
-              <a:rPr lang="en-US" sz="1200" dirty="0">
-                <a:solidFill>
-                  <a:srgbClr val="1C2833"/>
-                </a:solidFill>
-                <a:latin typeface="Arial" pitchFamily="34" charset="0"/>
-                <a:ea typeface="Arial" pitchFamily="34" charset="-122"/>
-                <a:cs typeface="Arial" pitchFamily="34" charset="-120"/>
-              </a:rPr>
-              <a:t>, </a:t>
-            </a:r>
-            <a:pPr algn="l" indent="0" marL="0">
-              <a:lnSpc>
-                <a:spcPts val="1620"/>
-              </a:lnSpc>
-              <a:spcAft>
-                <a:spcPts val="300"/>
-              </a:spcAft>
-              <a:buNone/>
-            </a:pPr>
-            <a:r>
-              <a:rPr lang="en-US" sz="1200" i="1" dirty="0">
-                <a:solidFill>
-                  <a:srgbClr val="1C2833"/>
-                </a:solidFill>
-                <a:latin typeface="Arial" pitchFamily="34" charset="0"/>
-                <a:ea typeface="Arial" pitchFamily="34" charset="-122"/>
-                <a:cs typeface="Arial" pitchFamily="34" charset="-120"/>
-              </a:rPr>
-              <a:t>pūrṇimā</a:t>
-            </a:r>
-            <a:pPr algn="l" indent="0" marL="0">
-              <a:lnSpc>
-                <a:spcPts val="1620"/>
-              </a:lnSpc>
-              <a:spcAft>
-                <a:spcPts val="300"/>
-              </a:spcAft>
-              <a:buNone/>
-            </a:pPr>
-            <a:r>
-              <a:rPr lang="en-US" sz="1200" dirty="0">
-                <a:solidFill>
-                  <a:srgbClr val="1C2833"/>
-                </a:solidFill>
-                <a:latin typeface="Arial" pitchFamily="34" charset="0"/>
-                <a:ea typeface="Arial" pitchFamily="34" charset="-122"/>
-                <a:cs typeface="Arial" pitchFamily="34" charset="-120"/>
-              </a:rPr>
-              <a:t> (Days 1–3)</a:t>
+              <a:t>kṛṣṇa</a:t>
+            </a:r>
+            <a:pPr algn="l" indent="0" marL="0">
+              <a:lnSpc>
+                <a:spcPts val="1620"/>
+              </a:lnSpc>
+              <a:spcAft>
+                <a:spcPts val="300"/>
+              </a:spcAft>
+              <a:buNone/>
+            </a:pPr>
+            <a:r>
+              <a:rPr lang="en-US" sz="1200" dirty="0">
+                <a:solidFill>
+                  <a:srgbClr val="1C2833"/>
+                </a:solidFill>
+                <a:latin typeface="Arial" pitchFamily="34" charset="0"/>
+                <a:ea typeface="Arial" pitchFamily="34" charset="-122"/>
+                <a:cs typeface="Arial" pitchFamily="34" charset="-120"/>
+              </a:rPr>
+              <a:t>)</a:t>
             </a:r>
             <a:endParaRPr lang="en-US" sz="1200" dirty="0"/>
           </a:p>
+          <a:p>
+            <a:pPr algn="l" marL="342900" indent="-342900">
+              <a:lnSpc>
+                <a:spcPts val="1620"/>
+              </a:lnSpc>
+              <a:spcAft>
+                <a:spcPts val="300"/>
+              </a:spcAft>
+              <a:buSzPct val="100000"/>
+              <a:buChar char="•"/>
+            </a:pPr>
+            <a:r>
+              <a:rPr lang="en-US" sz="1200" dirty="0">
+                <a:solidFill>
+                  <a:srgbClr val="1C2833"/>
+                </a:solidFill>
+                <a:latin typeface="Arial" pitchFamily="34" charset="0"/>
+                <a:ea typeface="Arial" pitchFamily="34" charset="-122"/>
+                <a:cs typeface="Arial" pitchFamily="34" charset="-120"/>
+              </a:rPr>
+              <a:t>Notebooks</a:t>
+            </a:r>
+            <a:endParaRPr lang="en-US" sz="1200" dirty="0"/>
+          </a:p>
         </p:txBody>
       </p:sp>
       <p:sp>
         <p:nvSpPr>
           <p:cNvPr id="5" name="Text 3"/>
-          <p:cNvSpPr/>
-          <p:nvPr/>
-        </p:nvSpPr>
-        <p:spPr>
-          <a:xfrm>
-            <a:off x="406301" y="1254323"/>
-            <a:ext cx="8498026" cy="213271"/>
-          </a:xfrm>
-          <a:prstGeom prst="rect">
-            <a:avLst/>
-          </a:prstGeom>
-          <a:noFill/>
-          <a:ln/>
-        </p:spPr>
-        <p:txBody>
-          <a:bodyPr wrap="square" lIns="0" tIns="0" rIns="0" bIns="0" rtlCol="0" anchor="t"/>
-          <a:lstStyle/>
-          <a:p>
-            <a:pPr algn="l" indent="0" marL="0">
-              <a:lnSpc>
-                <a:spcPts val="1680"/>
-              </a:lnSpc>
-              <a:spcBef>
-                <a:spcPts val="300"/>
-              </a:spcBef>
-              <a:spcAft>
-                <a:spcPts val="300"/>
-              </a:spcAft>
-              <a:buNone/>
-            </a:pPr>
-            <a:r>
-              <a:rPr lang="en-US" sz="1200" dirty="0">
-                <a:solidFill>
-                  <a:srgbClr val="1C2833"/>
-                </a:solidFill>
-                <a:latin typeface="Arial" pitchFamily="34" charset="0"/>
-                <a:ea typeface="Arial" pitchFamily="34" charset="-122"/>
-                <a:cs typeface="Arial" pitchFamily="34" charset="-120"/>
-              </a:rPr>
-              <a:t>– All 15 tithi names (Day 3)</a:t>
-            </a:r>
-            <a:endParaRPr lang="en-US" sz="1200" dirty="0"/>
-          </a:p>
-        </p:txBody>
-      </p:sp>
-      <p:sp>
-        <p:nvSpPr>
-          <p:cNvPr id="6" name="Text 4"/>
           <p:cNvSpPr/>
           <p:nvPr/>
         </p:nvSpPr>
@@ -4622,7 +8199,7 @@
                 <a:ea typeface="Georgia" pitchFamily="34" charset="-122"/>
                 <a:cs typeface="Georgia" pitchFamily="34" charset="-120"/>
               </a:rPr>
-              <a:t>Lesson flow</a:t>
+              <a:t>Vocabulary reused today</a:t>
             </a:r>
             <a:endParaRPr lang="en-US" sz="1800" dirty="0"/>
           </a:p>
@@ -4631,6 +8208,296 @@
       <p:sp>
         <p:nvSpPr>
           <p:cNvPr id="4" name="Text 2"/>
+          <p:cNvSpPr/>
+          <p:nvPr/>
+        </p:nvSpPr>
+        <p:spPr>
+          <a:xfrm>
+            <a:off x="634901" y="883593"/>
+            <a:ext cx="8102798" cy="525661"/>
+          </a:xfrm>
+          <a:prstGeom prst="rect">
+            <a:avLst/>
+          </a:prstGeom>
+          <a:noFill/>
+          <a:ln/>
+        </p:spPr>
+        <p:txBody>
+          <a:bodyPr wrap="square" lIns="0" tIns="0" rIns="0" bIns="0" rtlCol="0" anchor="t"/>
+          <a:lstStyle/>
+          <a:p>
+            <a:pPr algn="l" marL="342900" indent="-342900">
+              <a:lnSpc>
+                <a:spcPts val="1620"/>
+              </a:lnSpc>
+              <a:spcAft>
+                <a:spcPts val="300"/>
+              </a:spcAft>
+              <a:buSzPct val="100000"/>
+              <a:buChar char="•"/>
+            </a:pPr>
+            <a:r>
+              <a:rPr lang="en-US" sz="1200" i="1" dirty="0">
+                <a:solidFill>
+                  <a:srgbClr val="1C2833"/>
+                </a:solidFill>
+                <a:latin typeface="Arial" pitchFamily="34" charset="0"/>
+                <a:ea typeface="Arial" pitchFamily="34" charset="-122"/>
+                <a:cs typeface="Arial" pitchFamily="34" charset="-120"/>
+              </a:rPr>
+              <a:t>tithi</a:t>
+            </a:r>
+            <a:pPr algn="l" indent="0" marL="0">
+              <a:lnSpc>
+                <a:spcPts val="1620"/>
+              </a:lnSpc>
+              <a:spcAft>
+                <a:spcPts val="300"/>
+              </a:spcAft>
+              <a:buNone/>
+            </a:pPr>
+            <a:r>
+              <a:rPr lang="en-US" sz="1200" dirty="0">
+                <a:solidFill>
+                  <a:srgbClr val="1C2833"/>
+                </a:solidFill>
+                <a:latin typeface="Arial" pitchFamily="34" charset="0"/>
+                <a:ea typeface="Arial" pitchFamily="34" charset="-122"/>
+                <a:cs typeface="Arial" pitchFamily="34" charset="-120"/>
+              </a:rPr>
+              <a:t>, </a:t>
+            </a:r>
+            <a:pPr algn="l" indent="0" marL="0">
+              <a:lnSpc>
+                <a:spcPts val="1620"/>
+              </a:lnSpc>
+              <a:spcAft>
+                <a:spcPts val="300"/>
+              </a:spcAft>
+              <a:buNone/>
+            </a:pPr>
+            <a:r>
+              <a:rPr lang="en-US" sz="1200" i="1" dirty="0">
+                <a:solidFill>
+                  <a:srgbClr val="1C2833"/>
+                </a:solidFill>
+                <a:latin typeface="Arial" pitchFamily="34" charset="0"/>
+                <a:ea typeface="Arial" pitchFamily="34" charset="-122"/>
+                <a:cs typeface="Arial" pitchFamily="34" charset="-120"/>
+              </a:rPr>
+              <a:t>pakṣa</a:t>
+            </a:r>
+            <a:pPr algn="l" indent="0" marL="0">
+              <a:lnSpc>
+                <a:spcPts val="1620"/>
+              </a:lnSpc>
+              <a:spcAft>
+                <a:spcPts val="300"/>
+              </a:spcAft>
+              <a:buNone/>
+            </a:pPr>
+            <a:r>
+              <a:rPr lang="en-US" sz="1200" dirty="0">
+                <a:solidFill>
+                  <a:srgbClr val="1C2833"/>
+                </a:solidFill>
+                <a:latin typeface="Arial" pitchFamily="34" charset="0"/>
+                <a:ea typeface="Arial" pitchFamily="34" charset="-122"/>
+                <a:cs typeface="Arial" pitchFamily="34" charset="-120"/>
+              </a:rPr>
+              <a:t>, </a:t>
+            </a:r>
+            <a:pPr algn="l" indent="0" marL="0">
+              <a:lnSpc>
+                <a:spcPts val="1620"/>
+              </a:lnSpc>
+              <a:spcAft>
+                <a:spcPts val="300"/>
+              </a:spcAft>
+              <a:buNone/>
+            </a:pPr>
+            <a:r>
+              <a:rPr lang="en-US" sz="1200" i="1" dirty="0">
+                <a:solidFill>
+                  <a:srgbClr val="1C2833"/>
+                </a:solidFill>
+                <a:latin typeface="Arial" pitchFamily="34" charset="0"/>
+                <a:ea typeface="Arial" pitchFamily="34" charset="-122"/>
+                <a:cs typeface="Arial" pitchFamily="34" charset="-120"/>
+              </a:rPr>
+              <a:t>śukla pakṣa</a:t>
+            </a:r>
+            <a:pPr algn="l" indent="0" marL="0">
+              <a:lnSpc>
+                <a:spcPts val="1620"/>
+              </a:lnSpc>
+              <a:spcAft>
+                <a:spcPts val="300"/>
+              </a:spcAft>
+              <a:buNone/>
+            </a:pPr>
+            <a:r>
+              <a:rPr lang="en-US" sz="1200" dirty="0">
+                <a:solidFill>
+                  <a:srgbClr val="1C2833"/>
+                </a:solidFill>
+                <a:latin typeface="Arial" pitchFamily="34" charset="0"/>
+                <a:ea typeface="Arial" pitchFamily="34" charset="-122"/>
+                <a:cs typeface="Arial" pitchFamily="34" charset="-120"/>
+              </a:rPr>
+              <a:t>, </a:t>
+            </a:r>
+            <a:pPr algn="l" indent="0" marL="0">
+              <a:lnSpc>
+                <a:spcPts val="1620"/>
+              </a:lnSpc>
+              <a:spcAft>
+                <a:spcPts val="300"/>
+              </a:spcAft>
+              <a:buNone/>
+            </a:pPr>
+            <a:r>
+              <a:rPr lang="en-US" sz="1200" i="1" dirty="0">
+                <a:solidFill>
+                  <a:srgbClr val="1C2833"/>
+                </a:solidFill>
+                <a:latin typeface="Arial" pitchFamily="34" charset="0"/>
+                <a:ea typeface="Arial" pitchFamily="34" charset="-122"/>
+                <a:cs typeface="Arial" pitchFamily="34" charset="-120"/>
+              </a:rPr>
+              <a:t>kṛṣṇa pakṣa</a:t>
+            </a:r>
+            <a:pPr algn="l" indent="0" marL="0">
+              <a:lnSpc>
+                <a:spcPts val="1620"/>
+              </a:lnSpc>
+              <a:spcAft>
+                <a:spcPts val="300"/>
+              </a:spcAft>
+              <a:buNone/>
+            </a:pPr>
+            <a:r>
+              <a:rPr lang="en-US" sz="1200" dirty="0">
+                <a:solidFill>
+                  <a:srgbClr val="1C2833"/>
+                </a:solidFill>
+                <a:latin typeface="Arial" pitchFamily="34" charset="0"/>
+                <a:ea typeface="Arial" pitchFamily="34" charset="-122"/>
+                <a:cs typeface="Arial" pitchFamily="34" charset="-120"/>
+              </a:rPr>
+              <a:t>, </a:t>
+            </a:r>
+            <a:pPr algn="l" indent="0" marL="0">
+              <a:lnSpc>
+                <a:spcPts val="1620"/>
+              </a:lnSpc>
+              <a:spcAft>
+                <a:spcPts val="300"/>
+              </a:spcAft>
+              <a:buNone/>
+            </a:pPr>
+            <a:r>
+              <a:rPr lang="en-US" sz="1200" i="1" dirty="0">
+                <a:solidFill>
+                  <a:srgbClr val="1C2833"/>
+                </a:solidFill>
+                <a:latin typeface="Arial" pitchFamily="34" charset="0"/>
+                <a:ea typeface="Arial" pitchFamily="34" charset="-122"/>
+                <a:cs typeface="Arial" pitchFamily="34" charset="-120"/>
+              </a:rPr>
+              <a:t>amāvasyā</a:t>
+            </a:r>
+            <a:pPr algn="l" indent="0" marL="0">
+              <a:lnSpc>
+                <a:spcPts val="1620"/>
+              </a:lnSpc>
+              <a:spcAft>
+                <a:spcPts val="300"/>
+              </a:spcAft>
+              <a:buNone/>
+            </a:pPr>
+            <a:r>
+              <a:rPr lang="en-US" sz="1200" dirty="0">
+                <a:solidFill>
+                  <a:srgbClr val="1C2833"/>
+                </a:solidFill>
+                <a:latin typeface="Arial" pitchFamily="34" charset="0"/>
+                <a:ea typeface="Arial" pitchFamily="34" charset="-122"/>
+                <a:cs typeface="Arial" pitchFamily="34" charset="-120"/>
+              </a:rPr>
+              <a:t>, </a:t>
+            </a:r>
+            <a:pPr algn="l" indent="0" marL="0">
+              <a:lnSpc>
+                <a:spcPts val="1620"/>
+              </a:lnSpc>
+              <a:spcAft>
+                <a:spcPts val="300"/>
+              </a:spcAft>
+              <a:buNone/>
+            </a:pPr>
+            <a:r>
+              <a:rPr lang="en-US" sz="1200" i="1" dirty="0">
+                <a:solidFill>
+                  <a:srgbClr val="1C2833"/>
+                </a:solidFill>
+                <a:latin typeface="Arial" pitchFamily="34" charset="0"/>
+                <a:ea typeface="Arial" pitchFamily="34" charset="-122"/>
+                <a:cs typeface="Arial" pitchFamily="34" charset="-120"/>
+              </a:rPr>
+              <a:t>pūrṇimā</a:t>
+            </a:r>
+            <a:pPr algn="l" indent="0" marL="0">
+              <a:lnSpc>
+                <a:spcPts val="1620"/>
+              </a:lnSpc>
+              <a:spcAft>
+                <a:spcPts val="300"/>
+              </a:spcAft>
+              <a:buNone/>
+            </a:pPr>
+            <a:r>
+              <a:rPr lang="en-US" sz="1200" dirty="0">
+                <a:solidFill>
+                  <a:srgbClr val="1C2833"/>
+                </a:solidFill>
+                <a:latin typeface="Arial" pitchFamily="34" charset="0"/>
+                <a:ea typeface="Arial" pitchFamily="34" charset="-122"/>
+                <a:cs typeface="Arial" pitchFamily="34" charset="-120"/>
+              </a:rPr>
+              <a:t> (Days 1–3)</a:t>
+            </a:r>
+            <a:endParaRPr lang="en-US" sz="1200" dirty="0"/>
+          </a:p>
+          <a:p>
+            <a:pPr algn="l" marL="342900" indent="-342900">
+              <a:lnSpc>
+                <a:spcPts val="1620"/>
+              </a:lnSpc>
+              <a:spcAft>
+                <a:spcPts val="300"/>
+              </a:spcAft>
+              <a:buSzPct val="100000"/>
+              <a:buChar char="•"/>
+            </a:pPr>
+            <a:r>
+              <a:rPr lang="en-US" sz="1200" dirty="0">
+                <a:solidFill>
+                  <a:srgbClr val="1C2833"/>
+                </a:solidFill>
+                <a:latin typeface="Arial" pitchFamily="34" charset="0"/>
+                <a:ea typeface="Arial" pitchFamily="34" charset="-122"/>
+                <a:cs typeface="Arial" pitchFamily="34" charset="-120"/>
+              </a:rPr>
+              <a:t>All 15 tithi names (Day 3)</a:t>
+            </a:r>
+            <a:endParaRPr lang="en-US" sz="1200" dirty="0"/>
+          </a:p>
+        </p:txBody>
+      </p:sp>
+      <p:sp>
+        <p:nvSpPr>
+          <p:cNvPr id="5" name="Text 3"/>
           <p:cNvSpPr/>
           <p:nvPr/>
         </p:nvSpPr>
@@ -4780,7 +8647,7 @@
                 <a:ea typeface="Georgia" pitchFamily="34" charset="-122"/>
                 <a:cs typeface="Georgia" pitchFamily="34" charset="-120"/>
               </a:rPr>
-              <a:t>Warm-up (5 min)</a:t>
+              <a:t>Lesson flow</a:t>
             </a:r>
             <a:endParaRPr lang="en-US" sz="1800" dirty="0"/>
           </a:p>
@@ -4789,146 +8656,6 @@
       <p:sp>
         <p:nvSpPr>
           <p:cNvPr id="4" name="Text 2"/>
-          <p:cNvSpPr/>
-          <p:nvPr/>
-        </p:nvSpPr>
-        <p:spPr>
-          <a:xfrm>
-            <a:off x="406301" y="870942"/>
-            <a:ext cx="8498026" cy="426541"/>
-          </a:xfrm>
-          <a:prstGeom prst="rect">
-            <a:avLst/>
-          </a:prstGeom>
-          <a:noFill/>
-          <a:ln/>
-        </p:spPr>
-        <p:txBody>
-          <a:bodyPr wrap="square" lIns="0" tIns="0" rIns="0" bIns="0" rtlCol="0" anchor="t"/>
-          <a:lstStyle/>
-          <a:p>
-            <a:pPr algn="l" indent="0" marL="0">
-              <a:lnSpc>
-                <a:spcPts val="1680"/>
-              </a:lnSpc>
-              <a:spcBef>
-                <a:spcPts val="300"/>
-              </a:spcBef>
-              <a:spcAft>
-                <a:spcPts val="300"/>
-              </a:spcAft>
-              <a:buNone/>
-            </a:pPr>
-            <a:r>
-              <a:rPr lang="en-US" sz="1200" dirty="0">
-                <a:solidFill>
-                  <a:srgbClr val="1C2833"/>
-                </a:solidFill>
-                <a:latin typeface="Arial" pitchFamily="34" charset="0"/>
-                <a:ea typeface="Arial" pitchFamily="34" charset="-122"/>
-                <a:cs typeface="Arial" pitchFamily="34" charset="-120"/>
-              </a:rPr>
-              <a:t>– Daily prompt: </a:t>
-            </a:r>
-            <a:pPr algn="l" indent="0" marL="0">
-              <a:lnSpc>
-                <a:spcPts val="1680"/>
-              </a:lnSpc>
-              <a:spcBef>
-                <a:spcPts val="300"/>
-              </a:spcBef>
-              <a:spcAft>
-                <a:spcPts val="300"/>
-              </a:spcAft>
-              <a:buNone/>
-            </a:pPr>
-            <a:r>
-              <a:rPr lang="en-US" sz="1200" i="1" dirty="0">
-                <a:solidFill>
-                  <a:srgbClr val="1C2833"/>
-                </a:solidFill>
-                <a:latin typeface="Arial" pitchFamily="34" charset="0"/>
-                <a:ea typeface="Arial" pitchFamily="34" charset="-122"/>
-                <a:cs typeface="Arial" pitchFamily="34" charset="-120"/>
-              </a:rPr>
-              <a:t>"Did you see the Moon last night? What tithi was it?"</a:t>
-            </a:r>
-            <a:pPr algn="l" indent="0" marL="0">
-              <a:lnSpc>
-                <a:spcPts val="1680"/>
-              </a:lnSpc>
-              <a:spcBef>
-                <a:spcPts val="300"/>
-              </a:spcBef>
-              <a:spcAft>
-                <a:spcPts val="300"/>
-              </a:spcAft>
-              <a:buNone/>
-            </a:pPr>
-            <a:r>
-              <a:rPr lang="en-US" sz="1200" dirty="0">
-                <a:solidFill>
-                  <a:srgbClr val="1C2833"/>
-                </a:solidFill>
-                <a:latin typeface="Arial" pitchFamily="34" charset="0"/>
-                <a:ea typeface="Arial" pitchFamily="34" charset="-122"/>
-                <a:cs typeface="Arial" pitchFamily="34" charset="-120"/>
-              </a:rPr>
-              <a:t> — 2 students share. – Hand back yesterday's formative quizzes briefly (90 sec) — call out the most common miss; correct it once.</a:t>
-            </a:r>
-            <a:endParaRPr lang="en-US" sz="1200" dirty="0"/>
-          </a:p>
-        </p:txBody>
-      </p:sp>
-      <p:sp>
-        <p:nvSpPr>
-          <p:cNvPr id="5" name="Text 3"/>
-          <p:cNvSpPr/>
-          <p:nvPr/>
-        </p:nvSpPr>
-        <p:spPr>
-          <a:xfrm>
-            <a:off x="634901" y="1386334"/>
-            <a:ext cx="8102798" cy="281880"/>
-          </a:xfrm>
-          <a:prstGeom prst="rect">
-            <a:avLst/>
-          </a:prstGeom>
-          <a:noFill/>
-          <a:ln/>
-        </p:spPr>
-        <p:txBody>
-          <a:bodyPr wrap="square" lIns="0" tIns="0" rIns="0" bIns="0" rtlCol="0" anchor="t"/>
-          <a:lstStyle/>
-          <a:p>
-            <a:pPr algn="l" marL="342900" indent="-342900">
-              <a:lnSpc>
-                <a:spcPts val="1620"/>
-              </a:lnSpc>
-              <a:spcAft>
-                <a:spcPts val="300"/>
-              </a:spcAft>
-              <a:buSzPct val="100000"/>
-              <a:buChar char="•"/>
-            </a:pPr>
-            <a:r>
-              <a:rPr lang="en-US" sz="1200" i="1" dirty="0">
-                <a:solidFill>
-                  <a:srgbClr val="1C2833"/>
-                </a:solidFill>
-                <a:latin typeface="Arial" pitchFamily="34" charset="0"/>
-                <a:ea typeface="Arial" pitchFamily="34" charset="-122"/>
-                <a:cs typeface="Arial" pitchFamily="34" charset="-120"/>
-              </a:rPr>
-              <a:t>"Today the puzzle is concrete: what's the tithi for every date this month?"</a:t>
-            </a:r>
-            <a:endParaRPr lang="en-US" sz="1200" dirty="0"/>
-          </a:p>
-        </p:txBody>
-      </p:sp>
-      <p:sp>
-        <p:nvSpPr>
-          <p:cNvPr id="6" name="Text 4"/>
           <p:cNvSpPr/>
           <p:nvPr/>
         </p:nvSpPr>
@@ -5078,7 +8805,7 @@
                 <a:ea typeface="Georgia" pitchFamily="34" charset="-122"/>
                 <a:cs typeface="Georgia" pitchFamily="34" charset="-120"/>
               </a:rPr>
-              <a:t>Core (15 min)</a:t>
+              <a:t>Warm-up (5 min)</a:t>
             </a:r>
             <a:endParaRPr lang="en-US" sz="1800" dirty="0"/>
           </a:p>
@@ -5093,7 +8820,7 @@
         <p:spPr>
           <a:xfrm>
             <a:off x="634901" y="883593"/>
-            <a:ext cx="8102798" cy="281880"/>
+            <a:ext cx="8102798" cy="769441"/>
           </a:xfrm>
           <a:prstGeom prst="rect">
             <a:avLst/>
@@ -5116,35 +8843,15 @@
               <a:buChar char="•"/>
             </a:pPr>
             <a:r>
-              <a:rPr lang="en-US" sz="1200" b="1" dirty="0">
-                <a:solidFill>
-                  <a:srgbClr val="1C2833"/>
-                </a:solidFill>
-                <a:latin typeface="Arial" pitchFamily="34" charset="0"/>
-                <a:ea typeface="Arial" pitchFamily="34" charset="-122"/>
-                <a:cs typeface="Arial" pitchFamily="34" charset="-120"/>
-              </a:rPr>
-              <a:t>Show one sample row.</a:t>
-            </a:r>
-            <a:pPr algn="l" indent="0" marL="0">
-              <a:lnSpc>
-                <a:spcPts val="1620"/>
-              </a:lnSpc>
-              <a:spcAft>
-                <a:spcPts val="300"/>
-              </a:spcAft>
-              <a:buNone/>
-            </a:pPr>
-            <a:r>
-              <a:rPr lang="en-US" sz="1200" dirty="0">
-                <a:solidFill>
-                  <a:srgbClr val="1C2833"/>
-                </a:solidFill>
-                <a:latin typeface="Arial" pitchFamily="34" charset="0"/>
-                <a:ea typeface="Arial" pitchFamily="34" charset="-122"/>
-                <a:cs typeface="Arial" pitchFamily="34" charset="-120"/>
-              </a:rPr>
-              <a:t> Project or photocopy a </a:t>
+              <a:rPr lang="en-US" sz="1200" dirty="0">
+                <a:solidFill>
+                  <a:srgbClr val="1C2833"/>
+                </a:solidFill>
+                <a:latin typeface="Arial" pitchFamily="34" charset="0"/>
+                <a:ea typeface="Arial" pitchFamily="34" charset="-122"/>
+                <a:cs typeface="Arial" pitchFamily="34" charset="-120"/>
+              </a:rPr>
+              <a:t>Daily prompt: </a:t>
             </a:r>
             <a:pPr algn="l" indent="0" marL="0">
               <a:lnSpc>
@@ -5164,27 +8871,75 @@
                 <a:ea typeface="Arial" pitchFamily="34" charset="-122"/>
                 <a:cs typeface="Arial" pitchFamily="34" charset="-120"/>
               </a:rPr>
-              <a:t>pañcāṅga</a:t>
-            </a:r>
-            <a:pPr algn="l" indent="0" marL="0">
-              <a:lnSpc>
-                <a:spcPts val="1620"/>
-              </a:lnSpc>
-              <a:spcAft>
-                <a:spcPts val="300"/>
-              </a:spcAft>
-              <a:buNone/>
-            </a:pPr>
-            <a:r>
-              <a:rPr lang="en-US" sz="1200" dirty="0">
-                <a:solidFill>
-                  <a:srgbClr val="1C2833"/>
-                </a:solidFill>
-                <a:latin typeface="Arial" pitchFamily="34" charset="0"/>
-                <a:ea typeface="Arial" pitchFamily="34" charset="-122"/>
-                <a:cs typeface="Arial" pitchFamily="34" charset="-120"/>
-              </a:rPr>
-              <a:t> entry for any one date. Walk through:</a:t>
+              <a:t>"Did you see the Moon last night? What tithi was it?"</a:t>
+            </a:r>
+            <a:pPr algn="l" indent="0" marL="0">
+              <a:lnSpc>
+                <a:spcPts val="1620"/>
+              </a:lnSpc>
+              <a:spcAft>
+                <a:spcPts val="300"/>
+              </a:spcAft>
+              <a:buNone/>
+            </a:pPr>
+            <a:r>
+              <a:rPr lang="en-US" sz="1200" dirty="0">
+                <a:solidFill>
+                  <a:srgbClr val="1C2833"/>
+                </a:solidFill>
+                <a:latin typeface="Arial" pitchFamily="34" charset="0"/>
+                <a:ea typeface="Arial" pitchFamily="34" charset="-122"/>
+                <a:cs typeface="Arial" pitchFamily="34" charset="-120"/>
+              </a:rPr>
+              <a:t> — 2 students share.</a:t>
+            </a:r>
+            <a:endParaRPr lang="en-US" sz="1200" dirty="0"/>
+          </a:p>
+          <a:p>
+            <a:pPr algn="l" marL="342900" indent="-342900">
+              <a:lnSpc>
+                <a:spcPts val="1620"/>
+              </a:lnSpc>
+              <a:spcAft>
+                <a:spcPts val="300"/>
+              </a:spcAft>
+              <a:buSzPct val="100000"/>
+              <a:buChar char="•"/>
+            </a:pPr>
+            <a:r>
+              <a:rPr lang="en-US" sz="1200" dirty="0">
+                <a:solidFill>
+                  <a:srgbClr val="1C2833"/>
+                </a:solidFill>
+                <a:latin typeface="Arial" pitchFamily="34" charset="0"/>
+                <a:ea typeface="Arial" pitchFamily="34" charset="-122"/>
+                <a:cs typeface="Arial" pitchFamily="34" charset="-120"/>
+              </a:rPr>
+              <a:t>Hand back yesterday's formative quizzes briefly (90 sec) — call out the most common miss; correct it once.</a:t>
+            </a:r>
+            <a:endParaRPr lang="en-US" sz="1200" dirty="0"/>
+          </a:p>
+          <a:p>
+            <a:pPr algn="l" marL="342900" indent="-342900">
+              <a:lnSpc>
+                <a:spcPts val="1620"/>
+              </a:lnSpc>
+              <a:spcAft>
+                <a:spcPts val="300"/>
+              </a:spcAft>
+              <a:buSzPct val="100000"/>
+              <a:buChar char="•"/>
+            </a:pPr>
+            <a:r>
+              <a:rPr lang="en-US" sz="1200" i="1" dirty="0">
+                <a:solidFill>
+                  <a:srgbClr val="1C2833"/>
+                </a:solidFill>
+                <a:latin typeface="Arial" pitchFamily="34" charset="0"/>
+                <a:ea typeface="Arial" pitchFamily="34" charset="-122"/>
+                <a:cs typeface="Arial" pitchFamily="34" charset="-120"/>
+              </a:rPr>
+              <a:t>"Today the puzzle is concrete: what's the tithi for every date this month?"</a:t>
             </a:r>
             <a:endParaRPr lang="en-US" sz="1200" dirty="0"/>
           </a:p>
@@ -5198,963 +8953,7 @@
         </p:nvSpPr>
         <p:spPr>
           <a:xfrm>
-            <a:off x="406301" y="1254323"/>
-            <a:ext cx="8498026" cy="426541"/>
-          </a:xfrm>
-          <a:prstGeom prst="rect">
-            <a:avLst/>
-          </a:prstGeom>
-          <a:noFill/>
-          <a:ln/>
-        </p:spPr>
-        <p:txBody>
-          <a:bodyPr wrap="square" lIns="0" tIns="0" rIns="0" bIns="0" rtlCol="0" anchor="t"/>
-          <a:lstStyle/>
-          <a:p>
-            <a:pPr algn="l" indent="0" marL="0">
-              <a:lnSpc>
-                <a:spcPts val="1680"/>
-              </a:lnSpc>
-              <a:spcBef>
-                <a:spcPts val="300"/>
-              </a:spcBef>
-              <a:spcAft>
-                <a:spcPts val="300"/>
-              </a:spcAft>
-              <a:buNone/>
-            </a:pPr>
-            <a:r>
-              <a:rPr lang="en-US" sz="1200" dirty="0">
-                <a:solidFill>
-                  <a:srgbClr val="1C2833"/>
-                </a:solidFill>
-                <a:latin typeface="Arial" pitchFamily="34" charset="0"/>
-                <a:ea typeface="Arial" pitchFamily="34" charset="-122"/>
-                <a:cs typeface="Arial" pitchFamily="34" charset="-120"/>
-              </a:rPr>
-              <a:t>– Date: e.g. "May 22" – Pakṣa: e.g. </a:t>
-            </a:r>
-            <a:pPr algn="l" indent="0" marL="0">
-              <a:lnSpc>
-                <a:spcPts val="1680"/>
-              </a:lnSpc>
-              <a:spcBef>
-                <a:spcPts val="300"/>
-              </a:spcBef>
-              <a:spcAft>
-                <a:spcPts val="300"/>
-              </a:spcAft>
-              <a:buNone/>
-            </a:pPr>
-            <a:r>
-              <a:rPr lang="en-US" sz="1200" i="1" dirty="0">
-                <a:solidFill>
-                  <a:srgbClr val="1C2833"/>
-                </a:solidFill>
-                <a:latin typeface="Arial" pitchFamily="34" charset="0"/>
-                <a:ea typeface="Arial" pitchFamily="34" charset="-122"/>
-                <a:cs typeface="Arial" pitchFamily="34" charset="-120"/>
-              </a:rPr>
-              <a:t>kṛṣṇa</a:t>
-            </a:r>
-            <a:pPr algn="l" indent="0" marL="0">
-              <a:lnSpc>
-                <a:spcPts val="1680"/>
-              </a:lnSpc>
-              <a:spcBef>
-                <a:spcPts val="300"/>
-              </a:spcBef>
-              <a:spcAft>
-                <a:spcPts val="300"/>
-              </a:spcAft>
-              <a:buNone/>
-            </a:pPr>
-            <a:r>
-              <a:rPr lang="en-US" sz="1200" dirty="0">
-                <a:solidFill>
-                  <a:srgbClr val="1C2833"/>
-                </a:solidFill>
-                <a:latin typeface="Arial" pitchFamily="34" charset="0"/>
-                <a:ea typeface="Arial" pitchFamily="34" charset="-122"/>
-                <a:cs typeface="Arial" pitchFamily="34" charset="-120"/>
-              </a:rPr>
-              <a:t> – Tithi at sunrise: e.g. </a:t>
-            </a:r>
-            <a:pPr algn="l" indent="0" marL="0">
-              <a:lnSpc>
-                <a:spcPts val="1680"/>
-              </a:lnSpc>
-              <a:spcBef>
-                <a:spcPts val="300"/>
-              </a:spcBef>
-              <a:spcAft>
-                <a:spcPts val="300"/>
-              </a:spcAft>
-              <a:buNone/>
-            </a:pPr>
-            <a:r>
-              <a:rPr lang="en-US" sz="1200" i="1" dirty="0">
-                <a:solidFill>
-                  <a:srgbClr val="1C2833"/>
-                </a:solidFill>
-                <a:latin typeface="Arial" pitchFamily="34" charset="0"/>
-                <a:ea typeface="Arial" pitchFamily="34" charset="-122"/>
-                <a:cs typeface="Arial" pitchFamily="34" charset="-120"/>
-              </a:rPr>
-              <a:t>caturthī</a:t>
-            </a:r>
-            <a:pPr algn="l" indent="0" marL="0">
-              <a:lnSpc>
-                <a:spcPts val="1680"/>
-              </a:lnSpc>
-              <a:spcBef>
-                <a:spcPts val="300"/>
-              </a:spcBef>
-              <a:spcAft>
-                <a:spcPts val="300"/>
-              </a:spcAft>
-              <a:buNone/>
-            </a:pPr>
-            <a:r>
-              <a:rPr lang="en-US" sz="1200" dirty="0">
-                <a:solidFill>
-                  <a:srgbClr val="1C2833"/>
-                </a:solidFill>
-                <a:latin typeface="Arial" pitchFamily="34" charset="0"/>
-                <a:ea typeface="Arial" pitchFamily="34" charset="-122"/>
-                <a:cs typeface="Arial" pitchFamily="34" charset="-120"/>
-              </a:rPr>
-              <a:t> – Tithi end-time: e.g. 14:37 (after which </a:t>
-            </a:r>
-            <a:pPr algn="l" indent="0" marL="0">
-              <a:lnSpc>
-                <a:spcPts val="1680"/>
-              </a:lnSpc>
-              <a:spcBef>
-                <a:spcPts val="300"/>
-              </a:spcBef>
-              <a:spcAft>
-                <a:spcPts val="300"/>
-              </a:spcAft>
-              <a:buNone/>
-            </a:pPr>
-            <a:r>
-              <a:rPr lang="en-US" sz="1200" i="1" dirty="0">
-                <a:solidFill>
-                  <a:srgbClr val="1C2833"/>
-                </a:solidFill>
-                <a:latin typeface="Arial" pitchFamily="34" charset="0"/>
-                <a:ea typeface="Arial" pitchFamily="34" charset="-122"/>
-                <a:cs typeface="Arial" pitchFamily="34" charset="-120"/>
-              </a:rPr>
-              <a:t>pañcamī</a:t>
-            </a:r>
-            <a:pPr algn="l" indent="0" marL="0">
-              <a:lnSpc>
-                <a:spcPts val="1680"/>
-              </a:lnSpc>
-              <a:spcBef>
-                <a:spcPts val="300"/>
-              </a:spcBef>
-              <a:spcAft>
-                <a:spcPts val="300"/>
-              </a:spcAft>
-              <a:buNone/>
-            </a:pPr>
-            <a:r>
-              <a:rPr lang="en-US" sz="1200" dirty="0">
-                <a:solidFill>
-                  <a:srgbClr val="1C2833"/>
-                </a:solidFill>
-                <a:latin typeface="Arial" pitchFamily="34" charset="0"/>
-                <a:ea typeface="Arial" pitchFamily="34" charset="-122"/>
-                <a:cs typeface="Arial" pitchFamily="34" charset="-120"/>
-              </a:rPr>
-              <a:t> begins)</a:t>
-            </a:r>
-            <a:endParaRPr lang="en-US" sz="1200" dirty="0"/>
-          </a:p>
-        </p:txBody>
-      </p:sp>
-      <p:sp>
-        <p:nvSpPr>
-          <p:cNvPr id="6" name="Text 4"/>
-          <p:cNvSpPr/>
-          <p:nvPr/>
-        </p:nvSpPr>
-        <p:spPr>
-          <a:xfrm>
-            <a:off x="406301" y="1757065"/>
-            <a:ext cx="8498026" cy="426541"/>
-          </a:xfrm>
-          <a:prstGeom prst="rect">
-            <a:avLst/>
-          </a:prstGeom>
-          <a:noFill/>
-          <a:ln/>
-        </p:spPr>
-        <p:txBody>
-          <a:bodyPr wrap="square" lIns="0" tIns="0" rIns="0" bIns="0" rtlCol="0" anchor="t"/>
-          <a:lstStyle/>
-          <a:p>
-            <a:pPr algn="l" indent="0" marL="0">
-              <a:lnSpc>
-                <a:spcPts val="1680"/>
-              </a:lnSpc>
-              <a:spcBef>
-                <a:spcPts val="300"/>
-              </a:spcBef>
-              <a:spcAft>
-                <a:spcPts val="300"/>
-              </a:spcAft>
-              <a:buNone/>
-            </a:pPr>
-            <a:r>
-              <a:rPr lang="en-US" sz="1200" i="1" dirty="0">
-                <a:solidFill>
-                  <a:srgbClr val="1C2833"/>
-                </a:solidFill>
-                <a:latin typeface="Arial" pitchFamily="34" charset="0"/>
-                <a:ea typeface="Arial" pitchFamily="34" charset="-122"/>
-                <a:cs typeface="Arial" pitchFamily="34" charset="-120"/>
-              </a:rPr>
-              <a:t>"So if you went out at 8 p.m. on May 22, the tithi would already be pañcamī, not caturthī. The tithi listed at the top of a calendar date is the one current at sunrise."</a:t>
-            </a:r>
-            <a:endParaRPr lang="en-US" sz="1200" dirty="0"/>
-          </a:p>
-        </p:txBody>
-      </p:sp>
-      <p:sp>
-        <p:nvSpPr>
-          <p:cNvPr id="7" name="Text 5"/>
-          <p:cNvSpPr/>
-          <p:nvPr/>
-        </p:nvSpPr>
-        <p:spPr>
-          <a:xfrm>
-            <a:off x="634901" y="2272457"/>
-            <a:ext cx="8102798" cy="281880"/>
-          </a:xfrm>
-          <a:prstGeom prst="rect">
-            <a:avLst/>
-          </a:prstGeom>
-          <a:noFill/>
-          <a:ln/>
-        </p:spPr>
-        <p:txBody>
-          <a:bodyPr wrap="square" lIns="0" tIns="0" rIns="0" bIns="0" rtlCol="0" anchor="t"/>
-          <a:lstStyle/>
-          <a:p>
-            <a:pPr algn="l" marL="342900" indent="-342900">
-              <a:lnSpc>
-                <a:spcPts val="1620"/>
-              </a:lnSpc>
-              <a:spcAft>
-                <a:spcPts val="300"/>
-              </a:spcAft>
-              <a:buSzPct val="100000"/>
-              <a:buChar char="•"/>
-            </a:pPr>
-            <a:r>
-              <a:rPr lang="en-US" sz="1200" b="1" dirty="0">
-                <a:solidFill>
-                  <a:srgbClr val="1C2833"/>
-                </a:solidFill>
-                <a:latin typeface="Arial" pitchFamily="34" charset="0"/>
-                <a:ea typeface="Arial" pitchFamily="34" charset="-122"/>
-                <a:cs typeface="Arial" pitchFamily="34" charset="-120"/>
-              </a:rPr>
-              <a:t>The pattern of a month — anticipated.</a:t>
-            </a:r>
-            <a:pPr algn="l" indent="0" marL="0">
-              <a:lnSpc>
-                <a:spcPts val="1620"/>
-              </a:lnSpc>
-              <a:spcAft>
-                <a:spcPts val="300"/>
-              </a:spcAft>
-              <a:buNone/>
-            </a:pPr>
-            <a:r>
-              <a:rPr lang="en-US" sz="1200" dirty="0">
-                <a:solidFill>
-                  <a:srgbClr val="1C2833"/>
-                </a:solidFill>
-                <a:latin typeface="Arial" pitchFamily="34" charset="0"/>
-                <a:ea typeface="Arial" pitchFamily="34" charset="-122"/>
-                <a:cs typeface="Arial" pitchFamily="34" charset="-120"/>
-              </a:rPr>
-              <a:t> Most months have:</a:t>
-            </a:r>
-            <a:endParaRPr lang="en-US" sz="1200" dirty="0"/>
-          </a:p>
-        </p:txBody>
-      </p:sp>
-      <p:sp>
-        <p:nvSpPr>
-          <p:cNvPr id="8" name="Text 6"/>
-          <p:cNvSpPr/>
-          <p:nvPr/>
-        </p:nvSpPr>
-        <p:spPr>
-          <a:xfrm>
-            <a:off x="406301" y="2643188"/>
-            <a:ext cx="8498026" cy="426541"/>
-          </a:xfrm>
-          <a:prstGeom prst="rect">
-            <a:avLst/>
-          </a:prstGeom>
-          <a:noFill/>
-          <a:ln/>
-        </p:spPr>
-        <p:txBody>
-          <a:bodyPr wrap="square" lIns="0" tIns="0" rIns="0" bIns="0" rtlCol="0" anchor="t"/>
-          <a:lstStyle/>
-          <a:p>
-            <a:pPr algn="l" indent="0" marL="0">
-              <a:lnSpc>
-                <a:spcPts val="1680"/>
-              </a:lnSpc>
-              <a:spcBef>
-                <a:spcPts val="300"/>
-              </a:spcBef>
-              <a:spcAft>
-                <a:spcPts val="300"/>
-              </a:spcAft>
-              <a:buNone/>
-            </a:pPr>
-            <a:r>
-              <a:rPr lang="en-US" sz="1200" dirty="0">
-                <a:solidFill>
-                  <a:srgbClr val="1C2833"/>
-                </a:solidFill>
-                <a:latin typeface="Arial" pitchFamily="34" charset="0"/>
-                <a:ea typeface="Arial" pitchFamily="34" charset="-122"/>
-                <a:cs typeface="Arial" pitchFamily="34" charset="-120"/>
-              </a:rPr>
-              <a:t>– A </a:t>
-            </a:r>
-            <a:pPr algn="l" indent="0" marL="0">
-              <a:lnSpc>
-                <a:spcPts val="1680"/>
-              </a:lnSpc>
-              <a:spcBef>
-                <a:spcPts val="300"/>
-              </a:spcBef>
-              <a:spcAft>
-                <a:spcPts val="300"/>
-              </a:spcAft>
-              <a:buNone/>
-            </a:pPr>
-            <a:r>
-              <a:rPr lang="en-US" sz="1200" i="1" dirty="0">
-                <a:solidFill>
-                  <a:srgbClr val="1C2833"/>
-                </a:solidFill>
-                <a:latin typeface="Arial" pitchFamily="34" charset="0"/>
-                <a:ea typeface="Arial" pitchFamily="34" charset="-122"/>
-                <a:cs typeface="Arial" pitchFamily="34" charset="-120"/>
-              </a:rPr>
-              <a:t>śukla pratipadā</a:t>
-            </a:r>
-            <a:pPr algn="l" indent="0" marL="0">
-              <a:lnSpc>
-                <a:spcPts val="1680"/>
-              </a:lnSpc>
-              <a:spcBef>
-                <a:spcPts val="300"/>
-              </a:spcBef>
-              <a:spcAft>
-                <a:spcPts val="300"/>
-              </a:spcAft>
-              <a:buNone/>
-            </a:pPr>
-            <a:r>
-              <a:rPr lang="en-US" sz="1200" dirty="0">
-                <a:solidFill>
-                  <a:srgbClr val="1C2833"/>
-                </a:solidFill>
-                <a:latin typeface="Arial" pitchFamily="34" charset="0"/>
-                <a:ea typeface="Arial" pitchFamily="34" charset="-122"/>
-                <a:cs typeface="Arial" pitchFamily="34" charset="-120"/>
-              </a:rPr>
-              <a:t> (the day after </a:t>
-            </a:r>
-            <a:pPr algn="l" indent="0" marL="0">
-              <a:lnSpc>
-                <a:spcPts val="1680"/>
-              </a:lnSpc>
-              <a:spcBef>
-                <a:spcPts val="300"/>
-              </a:spcBef>
-              <a:spcAft>
-                <a:spcPts val="300"/>
-              </a:spcAft>
-              <a:buNone/>
-            </a:pPr>
-            <a:r>
-              <a:rPr lang="en-US" sz="1200" i="1" dirty="0">
-                <a:solidFill>
-                  <a:srgbClr val="1C2833"/>
-                </a:solidFill>
-                <a:latin typeface="Arial" pitchFamily="34" charset="0"/>
-                <a:ea typeface="Arial" pitchFamily="34" charset="-122"/>
-                <a:cs typeface="Arial" pitchFamily="34" charset="-120"/>
-              </a:rPr>
-              <a:t>amāvasyā</a:t>
-            </a:r>
-            <a:pPr algn="l" indent="0" marL="0">
-              <a:lnSpc>
-                <a:spcPts val="1680"/>
-              </a:lnSpc>
-              <a:spcBef>
-                <a:spcPts val="300"/>
-              </a:spcBef>
-              <a:spcAft>
-                <a:spcPts val="300"/>
-              </a:spcAft>
-              <a:buNone/>
-            </a:pPr>
-            <a:r>
-              <a:rPr lang="en-US" sz="1200" dirty="0">
-                <a:solidFill>
-                  <a:srgbClr val="1C2833"/>
-                </a:solidFill>
-                <a:latin typeface="Arial" pitchFamily="34" charset="0"/>
-                <a:ea typeface="Arial" pitchFamily="34" charset="-122"/>
-                <a:cs typeface="Arial" pitchFamily="34" charset="-120"/>
-              </a:rPr>
-              <a:t>) – A </a:t>
-            </a:r>
-            <a:pPr algn="l" indent="0" marL="0">
-              <a:lnSpc>
-                <a:spcPts val="1680"/>
-              </a:lnSpc>
-              <a:spcBef>
-                <a:spcPts val="300"/>
-              </a:spcBef>
-              <a:spcAft>
-                <a:spcPts val="300"/>
-              </a:spcAft>
-              <a:buNone/>
-            </a:pPr>
-            <a:r>
-              <a:rPr lang="en-US" sz="1200" i="1" dirty="0">
-                <a:solidFill>
-                  <a:srgbClr val="1C2833"/>
-                </a:solidFill>
-                <a:latin typeface="Arial" pitchFamily="34" charset="0"/>
-                <a:ea typeface="Arial" pitchFamily="34" charset="-122"/>
-                <a:cs typeface="Arial" pitchFamily="34" charset="-120"/>
-              </a:rPr>
-              <a:t>pūrṇimā</a:t>
-            </a:r>
-            <a:pPr algn="l" indent="0" marL="0">
-              <a:lnSpc>
-                <a:spcPts val="1680"/>
-              </a:lnSpc>
-              <a:spcBef>
-                <a:spcPts val="300"/>
-              </a:spcBef>
-              <a:spcAft>
-                <a:spcPts val="300"/>
-              </a:spcAft>
-              <a:buNone/>
-            </a:pPr>
-            <a:r>
-              <a:rPr lang="en-US" sz="1200" dirty="0">
-                <a:solidFill>
-                  <a:srgbClr val="1C2833"/>
-                </a:solidFill>
-                <a:latin typeface="Arial" pitchFamily="34" charset="0"/>
-                <a:ea typeface="Arial" pitchFamily="34" charset="-122"/>
-                <a:cs typeface="Arial" pitchFamily="34" charset="-120"/>
-              </a:rPr>
-              <a:t> (in the middle) – A </a:t>
-            </a:r>
-            <a:pPr algn="l" indent="0" marL="0">
-              <a:lnSpc>
-                <a:spcPts val="1680"/>
-              </a:lnSpc>
-              <a:spcBef>
-                <a:spcPts val="300"/>
-              </a:spcBef>
-              <a:spcAft>
-                <a:spcPts val="300"/>
-              </a:spcAft>
-              <a:buNone/>
-            </a:pPr>
-            <a:r>
-              <a:rPr lang="en-US" sz="1200" i="1" dirty="0">
-                <a:solidFill>
-                  <a:srgbClr val="1C2833"/>
-                </a:solidFill>
-                <a:latin typeface="Arial" pitchFamily="34" charset="0"/>
-                <a:ea typeface="Arial" pitchFamily="34" charset="-122"/>
-                <a:cs typeface="Arial" pitchFamily="34" charset="-120"/>
-              </a:rPr>
-              <a:t>kṛṣṇa pratipadā</a:t>
-            </a:r>
-            <a:pPr algn="l" indent="0" marL="0">
-              <a:lnSpc>
-                <a:spcPts val="1680"/>
-              </a:lnSpc>
-              <a:spcBef>
-                <a:spcPts val="300"/>
-              </a:spcBef>
-              <a:spcAft>
-                <a:spcPts val="300"/>
-              </a:spcAft>
-              <a:buNone/>
-            </a:pPr>
-            <a:r>
-              <a:rPr lang="en-US" sz="1200" dirty="0">
-                <a:solidFill>
-                  <a:srgbClr val="1C2833"/>
-                </a:solidFill>
-                <a:latin typeface="Arial" pitchFamily="34" charset="0"/>
-                <a:ea typeface="Arial" pitchFamily="34" charset="-122"/>
-                <a:cs typeface="Arial" pitchFamily="34" charset="-120"/>
-              </a:rPr>
-              <a:t> (the day after </a:t>
-            </a:r>
-            <a:pPr algn="l" indent="0" marL="0">
-              <a:lnSpc>
-                <a:spcPts val="1680"/>
-              </a:lnSpc>
-              <a:spcBef>
-                <a:spcPts val="300"/>
-              </a:spcBef>
-              <a:spcAft>
-                <a:spcPts val="300"/>
-              </a:spcAft>
-              <a:buNone/>
-            </a:pPr>
-            <a:r>
-              <a:rPr lang="en-US" sz="1200" i="1" dirty="0">
-                <a:solidFill>
-                  <a:srgbClr val="1C2833"/>
-                </a:solidFill>
-                <a:latin typeface="Arial" pitchFamily="34" charset="0"/>
-                <a:ea typeface="Arial" pitchFamily="34" charset="-122"/>
-                <a:cs typeface="Arial" pitchFamily="34" charset="-120"/>
-              </a:rPr>
-              <a:t>pūrṇimā</a:t>
-            </a:r>
-            <a:pPr algn="l" indent="0" marL="0">
-              <a:lnSpc>
-                <a:spcPts val="1680"/>
-              </a:lnSpc>
-              <a:spcBef>
-                <a:spcPts val="300"/>
-              </a:spcBef>
-              <a:spcAft>
-                <a:spcPts val="300"/>
-              </a:spcAft>
-              <a:buNone/>
-            </a:pPr>
-            <a:r>
-              <a:rPr lang="en-US" sz="1200" dirty="0">
-                <a:solidFill>
-                  <a:srgbClr val="1C2833"/>
-                </a:solidFill>
-                <a:latin typeface="Arial" pitchFamily="34" charset="0"/>
-                <a:ea typeface="Arial" pitchFamily="34" charset="-122"/>
-                <a:cs typeface="Arial" pitchFamily="34" charset="-120"/>
-              </a:rPr>
-              <a:t>) – A </a:t>
-            </a:r>
-            <a:pPr algn="l" indent="0" marL="0">
-              <a:lnSpc>
-                <a:spcPts val="1680"/>
-              </a:lnSpc>
-              <a:spcBef>
-                <a:spcPts val="300"/>
-              </a:spcBef>
-              <a:spcAft>
-                <a:spcPts val="300"/>
-              </a:spcAft>
-              <a:buNone/>
-            </a:pPr>
-            <a:r>
-              <a:rPr lang="en-US" sz="1200" i="1" dirty="0">
-                <a:solidFill>
-                  <a:srgbClr val="1C2833"/>
-                </a:solidFill>
-                <a:latin typeface="Arial" pitchFamily="34" charset="0"/>
-                <a:ea typeface="Arial" pitchFamily="34" charset="-122"/>
-                <a:cs typeface="Arial" pitchFamily="34" charset="-120"/>
-              </a:rPr>
-              <a:t>kṛṣṇa amāvasyā</a:t>
-            </a:r>
-            <a:pPr algn="l" indent="0" marL="0">
-              <a:lnSpc>
-                <a:spcPts val="1680"/>
-              </a:lnSpc>
-              <a:spcBef>
-                <a:spcPts val="300"/>
-              </a:spcBef>
-              <a:spcAft>
-                <a:spcPts val="300"/>
-              </a:spcAft>
-              <a:buNone/>
-            </a:pPr>
-            <a:r>
-              <a:rPr lang="en-US" sz="1200" dirty="0">
-                <a:solidFill>
-                  <a:srgbClr val="1C2833"/>
-                </a:solidFill>
-                <a:latin typeface="Arial" pitchFamily="34" charset="0"/>
-                <a:ea typeface="Arial" pitchFamily="34" charset="-122"/>
-                <a:cs typeface="Arial" pitchFamily="34" charset="-120"/>
-              </a:rPr>
-              <a:t> (close to the end) – 28–31 dated tithis (because of </a:t>
-            </a:r>
-            <a:pPr algn="l" indent="0" marL="0">
-              <a:lnSpc>
-                <a:spcPts val="1680"/>
-              </a:lnSpc>
-              <a:spcBef>
-                <a:spcPts val="300"/>
-              </a:spcBef>
-              <a:spcAft>
-                <a:spcPts val="300"/>
-              </a:spcAft>
-              <a:buNone/>
-            </a:pPr>
-            <a:r>
-              <a:rPr lang="en-US" sz="1200" i="1" dirty="0">
-                <a:solidFill>
-                  <a:srgbClr val="1C2833"/>
-                </a:solidFill>
-                <a:latin typeface="Arial" pitchFamily="34" charset="0"/>
-                <a:ea typeface="Arial" pitchFamily="34" charset="-122"/>
-                <a:cs typeface="Arial" pitchFamily="34" charset="-120"/>
-              </a:rPr>
-              <a:t>kṣaya</a:t>
-            </a:r>
-            <a:pPr algn="l" indent="0" marL="0">
-              <a:lnSpc>
-                <a:spcPts val="1680"/>
-              </a:lnSpc>
-              <a:spcBef>
-                <a:spcPts val="300"/>
-              </a:spcBef>
-              <a:spcAft>
-                <a:spcPts val="300"/>
-              </a:spcAft>
-              <a:buNone/>
-            </a:pPr>
-            <a:r>
-              <a:rPr lang="en-US" sz="1200" dirty="0">
-                <a:solidFill>
-                  <a:srgbClr val="1C2833"/>
-                </a:solidFill>
-                <a:latin typeface="Arial" pitchFamily="34" charset="0"/>
-                <a:ea typeface="Arial" pitchFamily="34" charset="-122"/>
-                <a:cs typeface="Arial" pitchFamily="34" charset="-120"/>
-              </a:rPr>
-              <a:t> / </a:t>
-            </a:r>
-            <a:pPr algn="l" indent="0" marL="0">
-              <a:lnSpc>
-                <a:spcPts val="1680"/>
-              </a:lnSpc>
-              <a:spcBef>
-                <a:spcPts val="300"/>
-              </a:spcBef>
-              <a:spcAft>
-                <a:spcPts val="300"/>
-              </a:spcAft>
-              <a:buNone/>
-            </a:pPr>
-            <a:r>
-              <a:rPr lang="en-US" sz="1200" i="1" dirty="0">
-                <a:solidFill>
-                  <a:srgbClr val="1C2833"/>
-                </a:solidFill>
-                <a:latin typeface="Arial" pitchFamily="34" charset="0"/>
-                <a:ea typeface="Arial" pitchFamily="34" charset="-122"/>
-                <a:cs typeface="Arial" pitchFamily="34" charset="-120"/>
-              </a:rPr>
-              <a:t>vṛddhi</a:t>
-            </a:r>
-            <a:pPr algn="l" indent="0" marL="0">
-              <a:lnSpc>
-                <a:spcPts val="1680"/>
-              </a:lnSpc>
-              <a:spcBef>
-                <a:spcPts val="300"/>
-              </a:spcBef>
-              <a:spcAft>
-                <a:spcPts val="300"/>
-              </a:spcAft>
-              <a:buNone/>
-            </a:pPr>
-            <a:r>
-              <a:rPr lang="en-US" sz="1200" dirty="0">
-                <a:solidFill>
-                  <a:srgbClr val="1C2833"/>
-                </a:solidFill>
-                <a:latin typeface="Arial" pitchFamily="34" charset="0"/>
-                <a:ea typeface="Arial" pitchFamily="34" charset="-122"/>
-                <a:cs typeface="Arial" pitchFamily="34" charset="-120"/>
-              </a:rPr>
-              <a:t> — see Day 3)</a:t>
-            </a:r>
-            <a:endParaRPr lang="en-US" sz="1200" dirty="0"/>
-          </a:p>
-        </p:txBody>
-      </p:sp>
-      <p:sp>
-        <p:nvSpPr>
-          <p:cNvPr id="9" name="Text 7"/>
-          <p:cNvSpPr/>
-          <p:nvPr/>
-        </p:nvSpPr>
-        <p:spPr>
-          <a:xfrm>
-            <a:off x="634901" y="3158579"/>
-            <a:ext cx="8102798" cy="281880"/>
-          </a:xfrm>
-          <a:prstGeom prst="rect">
-            <a:avLst/>
-          </a:prstGeom>
-          <a:noFill/>
-          <a:ln/>
-        </p:spPr>
-        <p:txBody>
-          <a:bodyPr wrap="square" lIns="0" tIns="0" rIns="0" bIns="0" rtlCol="0" anchor="t"/>
-          <a:lstStyle/>
-          <a:p>
-            <a:pPr algn="l" marL="342900" indent="-342900">
-              <a:lnSpc>
-                <a:spcPts val="1620"/>
-              </a:lnSpc>
-              <a:spcAft>
-                <a:spcPts val="300"/>
-              </a:spcAft>
-              <a:buSzPct val="100000"/>
-              <a:buChar char="•"/>
-            </a:pPr>
-            <a:r>
-              <a:rPr lang="en-US" sz="1200" b="1" dirty="0">
-                <a:solidFill>
-                  <a:srgbClr val="1C2833"/>
-                </a:solidFill>
-                <a:latin typeface="Arial" pitchFamily="34" charset="0"/>
-                <a:ea typeface="Arial" pitchFamily="34" charset="-122"/>
-                <a:cs typeface="Arial" pitchFamily="34" charset="-120"/>
-              </a:rPr>
-              <a:t>Anatomy of a tithi calendar — the activity sheet.</a:t>
-            </a:r>
-            <a:pPr algn="l" indent="0" marL="0">
-              <a:lnSpc>
-                <a:spcPts val="1620"/>
-              </a:lnSpc>
-              <a:spcAft>
-                <a:spcPts val="300"/>
-              </a:spcAft>
-              <a:buNone/>
-            </a:pPr>
-            <a:r>
-              <a:rPr lang="en-US" sz="1200" dirty="0">
-                <a:solidFill>
-                  <a:srgbClr val="1C2833"/>
-                </a:solidFill>
-                <a:latin typeface="Arial" pitchFamily="34" charset="0"/>
-                <a:ea typeface="Arial" pitchFamily="34" charset="-122"/>
-                <a:cs typeface="Arial" pitchFamily="34" charset="-120"/>
-              </a:rPr>
-              <a:t> Walk through the blank grid:</a:t>
-            </a:r>
-            <a:endParaRPr lang="en-US" sz="1200" dirty="0"/>
-          </a:p>
-        </p:txBody>
-      </p:sp>
-      <p:sp>
-        <p:nvSpPr>
-          <p:cNvPr id="10" name="Text 8"/>
-          <p:cNvSpPr/>
-          <p:nvPr/>
-        </p:nvSpPr>
-        <p:spPr>
-          <a:xfrm>
-            <a:off x="406301" y="3529310"/>
-            <a:ext cx="8498026" cy="213271"/>
-          </a:xfrm>
-          <a:prstGeom prst="rect">
-            <a:avLst/>
-          </a:prstGeom>
-          <a:noFill/>
-          <a:ln/>
-        </p:spPr>
-        <p:txBody>
-          <a:bodyPr wrap="square" lIns="0" tIns="0" rIns="0" bIns="0" rtlCol="0" anchor="t"/>
-          <a:lstStyle/>
-          <a:p>
-            <a:pPr algn="l" indent="0" marL="0">
-              <a:lnSpc>
-                <a:spcPts val="1680"/>
-              </a:lnSpc>
-              <a:spcBef>
-                <a:spcPts val="300"/>
-              </a:spcBef>
-              <a:spcAft>
-                <a:spcPts val="300"/>
-              </a:spcAft>
-              <a:buNone/>
-            </a:pPr>
-            <a:r>
-              <a:rPr lang="en-US" sz="1200" dirty="0">
-                <a:solidFill>
-                  <a:srgbClr val="1C2833"/>
-                </a:solidFill>
-                <a:latin typeface="Arial" pitchFamily="34" charset="0"/>
-                <a:ea typeface="Arial" pitchFamily="34" charset="-122"/>
-                <a:cs typeface="Arial" pitchFamily="34" charset="-120"/>
-              </a:rPr>
-              <a:t>– One row per date    – Columns: Date | Day of week | Pakṣa | Tithi name | Tithi end-time | Expected Moon shape</a:t>
-            </a:r>
-            <a:endParaRPr lang="en-US" sz="1200" dirty="0"/>
-          </a:p>
-        </p:txBody>
-      </p:sp>
-      <p:sp>
-        <p:nvSpPr>
-          <p:cNvPr id="11" name="Text 9"/>
-          <p:cNvSpPr/>
-          <p:nvPr/>
-        </p:nvSpPr>
-        <p:spPr>
-          <a:xfrm>
-            <a:off x="634901" y="3831431"/>
-            <a:ext cx="8102798" cy="487561"/>
-          </a:xfrm>
-          <a:prstGeom prst="rect">
-            <a:avLst/>
-          </a:prstGeom>
-          <a:noFill/>
-          <a:ln/>
-        </p:spPr>
-        <p:txBody>
-          <a:bodyPr wrap="square" lIns="0" tIns="0" rIns="0" bIns="0" rtlCol="0" anchor="t"/>
-          <a:lstStyle/>
-          <a:p>
-            <a:pPr algn="l" marL="342900" indent="-342900">
-              <a:lnSpc>
-                <a:spcPts val="1620"/>
-              </a:lnSpc>
-              <a:spcAft>
-                <a:spcPts val="300"/>
-              </a:spcAft>
-              <a:buSzPct val="100000"/>
-              <a:buChar char="•"/>
-            </a:pPr>
-            <a:r>
-              <a:rPr lang="en-US" sz="1200" b="1" dirty="0">
-                <a:solidFill>
-                  <a:srgbClr val="1C2833"/>
-                </a:solidFill>
-                <a:latin typeface="Arial" pitchFamily="34" charset="0"/>
-                <a:ea typeface="Arial" pitchFamily="34" charset="-122"/>
-                <a:cs typeface="Arial" pitchFamily="34" charset="-120"/>
-              </a:rPr>
-              <a:t>One festival hook.</a:t>
-            </a:r>
-            <a:pPr algn="l" indent="0" marL="0">
-              <a:lnSpc>
-                <a:spcPts val="1620"/>
-              </a:lnSpc>
-              <a:spcAft>
-                <a:spcPts val="300"/>
-              </a:spcAft>
-              <a:buNone/>
-            </a:pPr>
-            <a:r>
-              <a:rPr lang="en-US" sz="1200" dirty="0">
-                <a:solidFill>
-                  <a:srgbClr val="1C2833"/>
-                </a:solidFill>
-                <a:latin typeface="Arial" pitchFamily="34" charset="0"/>
-                <a:ea typeface="Arial" pitchFamily="34" charset="-122"/>
-                <a:cs typeface="Arial" pitchFamily="34" charset="-120"/>
-              </a:rPr>
-              <a:t> Find one festival this month from the </a:t>
-            </a:r>
-            <a:pPr algn="l" indent="0" marL="0">
-              <a:lnSpc>
-                <a:spcPts val="1620"/>
-              </a:lnSpc>
-              <a:spcAft>
-                <a:spcPts val="300"/>
-              </a:spcAft>
-              <a:buNone/>
-            </a:pPr>
-            <a:r>
-              <a:rPr lang="en-US" sz="1200" i="1" dirty="0">
-                <a:solidFill>
-                  <a:srgbClr val="1C2833"/>
-                </a:solidFill>
-                <a:latin typeface="Arial" pitchFamily="34" charset="0"/>
-                <a:ea typeface="Arial" pitchFamily="34" charset="-122"/>
-                <a:cs typeface="Arial" pitchFamily="34" charset="-120"/>
-              </a:rPr>
-              <a:t>pañcāṅga</a:t>
-            </a:r>
-            <a:pPr algn="l" indent="0" marL="0">
-              <a:lnSpc>
-                <a:spcPts val="1620"/>
-              </a:lnSpc>
-              <a:spcAft>
-                <a:spcPts val="300"/>
-              </a:spcAft>
-              <a:buNone/>
-            </a:pPr>
-            <a:r>
-              <a:rPr lang="en-US" sz="1200" dirty="0">
-                <a:solidFill>
-                  <a:srgbClr val="1C2833"/>
-                </a:solidFill>
-                <a:latin typeface="Arial" pitchFamily="34" charset="0"/>
-                <a:ea typeface="Arial" pitchFamily="34" charset="-122"/>
-                <a:cs typeface="Arial" pitchFamily="34" charset="-120"/>
-              </a:rPr>
-              <a:t> and announce it: </a:t>
-            </a:r>
-            <a:pPr algn="l" indent="0" marL="0">
-              <a:lnSpc>
-                <a:spcPts val="1620"/>
-              </a:lnSpc>
-              <a:spcAft>
-                <a:spcPts val="300"/>
-              </a:spcAft>
-              <a:buNone/>
-            </a:pPr>
-            <a:r>
-              <a:rPr lang="en-US" sz="1200" i="1" dirty="0">
-                <a:solidFill>
-                  <a:srgbClr val="1C2833"/>
-                </a:solidFill>
-                <a:latin typeface="Arial" pitchFamily="34" charset="0"/>
-                <a:ea typeface="Arial" pitchFamily="34" charset="-122"/>
-                <a:cs typeface="Arial" pitchFamily="34" charset="-120"/>
-              </a:rPr>
-              <a:t>"On dvitīyā of śukla pakṣa this month, there's a regional festival called X — let's see if we agree with the date."</a:t>
-            </a:r>
-            <a:endParaRPr lang="en-US" sz="1200" dirty="0"/>
-          </a:p>
-        </p:txBody>
-      </p:sp>
-      <p:sp>
-        <p:nvSpPr>
-          <p:cNvPr id="12" name="Text 10"/>
-          <p:cNvSpPr/>
-          <p:nvPr/>
-        </p:nvSpPr>
-        <p:spPr>
-          <a:xfrm>
-            <a:off x="406301" y="4484043"/>
+            <a:off x="406301" y="4434929"/>
             <a:ext cx="8498026" cy="213271"/>
           </a:xfrm>
           <a:prstGeom prst="rect">
@@ -6298,7 +9097,7 @@
                 <a:ea typeface="Georgia" pitchFamily="34" charset="-122"/>
                 <a:cs typeface="Georgia" pitchFamily="34" charset="-120"/>
               </a:rPr>
-              <a:t>Activity (20 min) — Build the calendar</a:t>
+              <a:t>Core (15 min)</a:t>
             </a:r>
             <a:endParaRPr lang="en-US" sz="1800" dirty="0"/>
           </a:p>
@@ -6312,8 +9111,8 @@
         </p:nvSpPr>
         <p:spPr>
           <a:xfrm>
-            <a:off x="406301" y="870942"/>
-            <a:ext cx="8498026" cy="222796"/>
+            <a:off x="634901" y="883593"/>
+            <a:ext cx="8102798" cy="281880"/>
           </a:xfrm>
           <a:prstGeom prst="rect">
             <a:avLst/>
@@ -6325,40 +9124,15 @@
           <a:bodyPr wrap="square" lIns="0" tIns="0" rIns="0" bIns="0" rtlCol="0" anchor="t"/>
           <a:lstStyle/>
           <a:p>
-            <a:pPr algn="l" indent="0" marL="0">
-              <a:lnSpc>
-                <a:spcPts val="1680"/>
-              </a:lnSpc>
-              <a:spcBef>
-                <a:spcPts val="300"/>
-              </a:spcBef>
-              <a:spcAft>
-                <a:spcPts val="300"/>
-              </a:spcAft>
-              <a:buNone/>
-            </a:pPr>
-            <a:r>
-              <a:rPr lang="en-US" sz="1200" dirty="0">
-                <a:solidFill>
-                  <a:srgbClr val="1C2833"/>
-                </a:solidFill>
-                <a:latin typeface="Arial" pitchFamily="34" charset="0"/>
-                <a:ea typeface="Arial" pitchFamily="34" charset="-122"/>
-                <a:cs typeface="Arial" pitchFamily="34" charset="-120"/>
-              </a:rPr>
-              <a:t>This </a:t>
-            </a:r>
-            <a:pPr algn="l" indent="0" marL="0">
-              <a:lnSpc>
-                <a:spcPts val="1680"/>
-              </a:lnSpc>
-              <a:spcBef>
-                <a:spcPts val="300"/>
-              </a:spcBef>
-              <a:spcAft>
-                <a:spcPts val="300"/>
-              </a:spcAft>
-              <a:buNone/>
+            <a:pPr algn="l" marL="342900" indent="-342900">
+              <a:lnSpc>
+                <a:spcPts val="1620"/>
+              </a:lnSpc>
+              <a:spcAft>
+                <a:spcPts val="300"/>
+              </a:spcAft>
+              <a:buSzPct val="100000"/>
+              <a:buChar char="•"/>
             </a:pPr>
             <a:r>
               <a:rPr lang="en-US" sz="1200" b="1" dirty="0">
@@ -6369,76 +9143,67 @@
                 <a:ea typeface="Arial" pitchFamily="34" charset="-122"/>
                 <a:cs typeface="Arial" pitchFamily="34" charset="-120"/>
               </a:rPr>
-              <a:t>IS</a:t>
-            </a:r>
-            <a:pPr algn="l" indent="0" marL="0">
-              <a:lnSpc>
-                <a:spcPts val="1680"/>
-              </a:lnSpc>
-              <a:spcBef>
-                <a:spcPts val="300"/>
-              </a:spcBef>
-              <a:spcAft>
-                <a:spcPts val="300"/>
-              </a:spcAft>
-              <a:buNone/>
-            </a:pPr>
-            <a:r>
-              <a:rPr lang="en-US" sz="1200" dirty="0">
-                <a:solidFill>
-                  <a:srgbClr val="1C2833"/>
-                </a:solidFill>
-                <a:latin typeface="Arial" pitchFamily="34" charset="0"/>
-                <a:ea typeface="Arial" pitchFamily="34" charset="-122"/>
-                <a:cs typeface="Arial" pitchFamily="34" charset="-120"/>
-              </a:rPr>
-              <a:t> Activity 01 — see </a:t>
-            </a:r>
-            <a:pPr algn="l" indent="0" marL="0">
-              <a:lnSpc>
-                <a:spcPts val="1680"/>
-              </a:lnSpc>
-              <a:spcBef>
-                <a:spcPts val="300"/>
-              </a:spcBef>
-              <a:spcAft>
-                <a:spcPts val="300"/>
-              </a:spcAft>
-              <a:buNone/>
-            </a:pPr>
-            <a:r>
-              <a:rPr lang="en-US" sz="1200" dirty="0">
-                <a:solidFill>
-                  <a:srgbClr val="1C2833"/>
-                </a:solidFill>
-                <a:latin typeface="Arial" pitchFamily="34" charset="0"/>
-                <a:ea typeface="Arial" pitchFamily="34" charset="-122"/>
-                <a:cs typeface="Arial" pitchFamily="34" charset="-120"/>
-              </a:rPr>
-              <a:t>activities/activity-01-build-tithi-calendar.md</a:t>
-            </a:r>
-            <a:pPr algn="l" indent="0" marL="0">
-              <a:lnSpc>
-                <a:spcPts val="1680"/>
-              </a:lnSpc>
-              <a:spcBef>
-                <a:spcPts val="300"/>
-              </a:spcBef>
-              <a:spcAft>
-                <a:spcPts val="300"/>
-              </a:spcAft>
-              <a:buNone/>
-            </a:pPr>
-            <a:r>
-              <a:rPr lang="en-US" sz="1200" dirty="0">
-                <a:solidFill>
-                  <a:srgbClr val="1C2833"/>
-                </a:solidFill>
-                <a:latin typeface="Arial" pitchFamily="34" charset="0"/>
-                <a:ea typeface="Arial" pitchFamily="34" charset="-122"/>
-                <a:cs typeface="Arial" pitchFamily="34" charset="-120"/>
-              </a:rPr>
-              <a:t> for the full set of instructions.</a:t>
+              <a:t>Show one sample row.</a:t>
+            </a:r>
+            <a:pPr algn="l" indent="0" marL="0">
+              <a:lnSpc>
+                <a:spcPts val="1620"/>
+              </a:lnSpc>
+              <a:spcAft>
+                <a:spcPts val="300"/>
+              </a:spcAft>
+              <a:buNone/>
+            </a:pPr>
+            <a:r>
+              <a:rPr lang="en-US" sz="1200" dirty="0">
+                <a:solidFill>
+                  <a:srgbClr val="1C2833"/>
+                </a:solidFill>
+                <a:latin typeface="Arial" pitchFamily="34" charset="0"/>
+                <a:ea typeface="Arial" pitchFamily="34" charset="-122"/>
+                <a:cs typeface="Arial" pitchFamily="34" charset="-120"/>
+              </a:rPr>
+              <a:t> Project or photocopy a </a:t>
+            </a:r>
+            <a:pPr algn="l" indent="0" marL="0">
+              <a:lnSpc>
+                <a:spcPts val="1620"/>
+              </a:lnSpc>
+              <a:spcAft>
+                <a:spcPts val="300"/>
+              </a:spcAft>
+              <a:buNone/>
+            </a:pPr>
+            <a:r>
+              <a:rPr lang="en-US" sz="1200" i="1" dirty="0">
+                <a:solidFill>
+                  <a:srgbClr val="1C2833"/>
+                </a:solidFill>
+                <a:latin typeface="Arial" pitchFamily="34" charset="0"/>
+                <a:ea typeface="Arial" pitchFamily="34" charset="-122"/>
+                <a:cs typeface="Arial" pitchFamily="34" charset="-120"/>
+              </a:rPr>
+              <a:t>pañcāṅga</a:t>
+            </a:r>
+            <a:pPr algn="l" indent="0" marL="0">
+              <a:lnSpc>
+                <a:spcPts val="1620"/>
+              </a:lnSpc>
+              <a:spcAft>
+                <a:spcPts val="300"/>
+              </a:spcAft>
+              <a:buNone/>
+            </a:pPr>
+            <a:r>
+              <a:rPr lang="en-US" sz="1200" dirty="0">
+                <a:solidFill>
+                  <a:srgbClr val="1C2833"/>
+                </a:solidFill>
+                <a:latin typeface="Arial" pitchFamily="34" charset="0"/>
+                <a:ea typeface="Arial" pitchFamily="34" charset="-122"/>
+                <a:cs typeface="Arial" pitchFamily="34" charset="-120"/>
+              </a:rPr>
+              <a:t> entry for any one date. Walk through:</a:t>
             </a:r>
             <a:endParaRPr lang="en-US" sz="1200" dirty="0"/>
           </a:p>
@@ -6452,8 +9217,8 @@
         </p:nvSpPr>
         <p:spPr>
           <a:xfrm>
-            <a:off x="406301" y="1169938"/>
-            <a:ext cx="8498026" cy="213271"/>
+            <a:off x="634901" y="1266974"/>
+            <a:ext cx="8102798" cy="1013222"/>
           </a:xfrm>
           <a:prstGeom prst="rect">
             <a:avLst/>
@@ -6465,54 +9230,6 @@
           <a:bodyPr wrap="square" lIns="0" tIns="0" rIns="0" bIns="0" rtlCol="0" anchor="t"/>
           <a:lstStyle/>
           <a:p>
-            <a:pPr algn="l" indent="0" marL="0">
-              <a:lnSpc>
-                <a:spcPts val="1680"/>
-              </a:lnSpc>
-              <a:spcBef>
-                <a:spcPts val="300"/>
-              </a:spcBef>
-              <a:spcAft>
-                <a:spcPts val="300"/>
-              </a:spcAft>
-              <a:buNone/>
-            </a:pPr>
-            <a:r>
-              <a:rPr lang="en-US" sz="1200" dirty="0">
-                <a:solidFill>
-                  <a:srgbClr val="1C2833"/>
-                </a:solidFill>
-                <a:latin typeface="Arial" pitchFamily="34" charset="0"/>
-                <a:ea typeface="Arial" pitchFamily="34" charset="-122"/>
-                <a:cs typeface="Arial" pitchFamily="34" charset="-120"/>
-              </a:rPr>
-              <a:t>In pairs:</a:t>
-            </a:r>
-            <a:endParaRPr lang="en-US" sz="1200" dirty="0"/>
-          </a:p>
-        </p:txBody>
-      </p:sp>
-      <p:sp>
-        <p:nvSpPr>
-          <p:cNvPr id="6" name="Text 4"/>
-          <p:cNvSpPr/>
-          <p:nvPr/>
-        </p:nvSpPr>
-        <p:spPr>
-          <a:xfrm>
-            <a:off x="634901" y="1472059"/>
-            <a:ext cx="8102798" cy="1257002"/>
-          </a:xfrm>
-          <a:prstGeom prst="rect">
-            <a:avLst/>
-          </a:prstGeom>
-          <a:noFill/>
-          <a:ln/>
-        </p:spPr>
-        <p:txBody>
-          <a:bodyPr wrap="square" lIns="0" tIns="0" rIns="0" bIns="0" rtlCol="0" anchor="t"/>
-          <a:lstStyle/>
-          <a:p>
             <a:pPr algn="l" marL="342900" indent="-342900">
               <a:lnSpc>
                 <a:spcPts val="1620"/>
@@ -6532,47 +9249,7 @@
                 <a:ea typeface="Arial" pitchFamily="34" charset="-122"/>
                 <a:cs typeface="Arial" pitchFamily="34" charset="-120"/>
               </a:rPr>
-              <a:t>Receive one printed </a:t>
-            </a:r>
-            <a:pPr algn="l" indent="0" marL="0">
-              <a:lnSpc>
-                <a:spcPts val="1620"/>
-              </a:lnSpc>
-              <a:spcAft>
-                <a:spcPts val="300"/>
-              </a:spcAft>
-              <a:buNone/>
-            </a:pPr>
-            <a:r>
-              <a:rPr lang="en-US" sz="1200" i="1" dirty="0">
-                <a:solidFill>
-                  <a:srgbClr val="1C2833"/>
-                </a:solidFill>
-                <a:latin typeface="Arial" pitchFamily="34" charset="0"/>
-                <a:ea typeface="Arial" pitchFamily="34" charset="-122"/>
-                <a:cs typeface="Arial" pitchFamily="34" charset="-120"/>
-              </a:rPr>
-              <a:t>pañcāṅga</a:t>
-            </a:r>
-            <a:pPr algn="l" indent="0" marL="0">
-              <a:lnSpc>
-                <a:spcPts val="1620"/>
-              </a:lnSpc>
-              <a:spcAft>
-                <a:spcPts val="300"/>
-              </a:spcAft>
-              <a:buNone/>
-            </a:pPr>
-            <a:r>
-              <a:rPr lang="en-US" sz="1200" dirty="0">
-                <a:solidFill>
-                  <a:srgbClr val="1C2833"/>
-                </a:solidFill>
-                <a:latin typeface="Arial" pitchFamily="34" charset="0"/>
-                <a:ea typeface="Arial" pitchFamily="34" charset="-122"/>
-                <a:cs typeface="Arial" pitchFamily="34" charset="-120"/>
-              </a:rPr>
-              <a:t> page for the current month.</a:t>
+              <a:t>Date: e.g. "May 22"</a:t>
             </a:r>
             <a:endParaRPr lang="en-US" sz="1200" dirty="0"/>
           </a:p>
@@ -6596,7 +9273,27 @@
                 <a:ea typeface="Arial" pitchFamily="34" charset="-122"/>
                 <a:cs typeface="Arial" pitchFamily="34" charset="-120"/>
               </a:rPr>
-              <a:t>Fill in the blank calendar grid for every date of the month.</a:t>
+              <a:t>Pakṣa: e.g. </a:t>
+            </a:r>
+            <a:pPr algn="l" indent="0" marL="0">
+              <a:lnSpc>
+                <a:spcPts val="1620"/>
+              </a:lnSpc>
+              <a:spcAft>
+                <a:spcPts val="300"/>
+              </a:spcAft>
+              <a:buNone/>
+            </a:pPr>
+            <a:r>
+              <a:rPr lang="en-US" sz="1200" i="1" dirty="0">
+                <a:solidFill>
+                  <a:srgbClr val="1C2833"/>
+                </a:solidFill>
+                <a:latin typeface="Arial" pitchFamily="34" charset="0"/>
+                <a:ea typeface="Arial" pitchFamily="34" charset="-122"/>
+                <a:cs typeface="Arial" pitchFamily="34" charset="-120"/>
+              </a:rPr>
+              <a:t>kṛṣṇa</a:t>
             </a:r>
             <a:endParaRPr lang="en-US" sz="1200" dirty="0"/>
           </a:p>
@@ -6620,7 +9317,7 @@
                 <a:ea typeface="Arial" pitchFamily="34" charset="-122"/>
                 <a:cs typeface="Arial" pitchFamily="34" charset="-120"/>
               </a:rPr>
-              <a:t>Colour code: </a:t>
+              <a:t>Tithi at sunrise: e.g. </a:t>
             </a:r>
             <a:pPr algn="l" indent="0" marL="0">
               <a:lnSpc>
@@ -6640,67 +9337,7 @@
                 <a:ea typeface="Arial" pitchFamily="34" charset="-122"/>
                 <a:cs typeface="Arial" pitchFamily="34" charset="-120"/>
               </a:rPr>
-              <a:t>śukla pakṣa</a:t>
-            </a:r>
-            <a:pPr algn="l" indent="0" marL="0">
-              <a:lnSpc>
-                <a:spcPts val="1620"/>
-              </a:lnSpc>
-              <a:spcAft>
-                <a:spcPts val="300"/>
-              </a:spcAft>
-              <a:buNone/>
-            </a:pPr>
-            <a:r>
-              <a:rPr lang="en-US" sz="1200" dirty="0">
-                <a:solidFill>
-                  <a:srgbClr val="1C2833"/>
-                </a:solidFill>
-                <a:latin typeface="Arial" pitchFamily="34" charset="0"/>
-                <a:ea typeface="Arial" pitchFamily="34" charset="-122"/>
-                <a:cs typeface="Arial" pitchFamily="34" charset="-120"/>
-              </a:rPr>
-              <a:t> in yellow, </a:t>
-            </a:r>
-            <a:pPr algn="l" indent="0" marL="0">
-              <a:lnSpc>
-                <a:spcPts val="1620"/>
-              </a:lnSpc>
-              <a:spcAft>
-                <a:spcPts val="300"/>
-              </a:spcAft>
-              <a:buNone/>
-            </a:pPr>
-            <a:r>
-              <a:rPr lang="en-US" sz="1200" i="1" dirty="0">
-                <a:solidFill>
-                  <a:srgbClr val="1C2833"/>
-                </a:solidFill>
-                <a:latin typeface="Arial" pitchFamily="34" charset="0"/>
-                <a:ea typeface="Arial" pitchFamily="34" charset="-122"/>
-                <a:cs typeface="Arial" pitchFamily="34" charset="-120"/>
-              </a:rPr>
-              <a:t>kṛṣṇa pakṣa</a:t>
-            </a:r>
-            <a:pPr algn="l" indent="0" marL="0">
-              <a:lnSpc>
-                <a:spcPts val="1620"/>
-              </a:lnSpc>
-              <a:spcAft>
-                <a:spcPts val="300"/>
-              </a:spcAft>
-              <a:buNone/>
-            </a:pPr>
-            <a:r>
-              <a:rPr lang="en-US" sz="1200" dirty="0">
-                <a:solidFill>
-                  <a:srgbClr val="1C2833"/>
-                </a:solidFill>
-                <a:latin typeface="Arial" pitchFamily="34" charset="0"/>
-                <a:ea typeface="Arial" pitchFamily="34" charset="-122"/>
-                <a:cs typeface="Arial" pitchFamily="34" charset="-120"/>
-              </a:rPr>
-              <a:t> in grey/blue.</a:t>
+              <a:t>caturthī</a:t>
             </a:r>
             <a:endParaRPr lang="en-US" sz="1200" dirty="0"/>
           </a:p>
@@ -6724,213 +9361,55 @@
                 <a:ea typeface="Arial" pitchFamily="34" charset="-122"/>
                 <a:cs typeface="Arial" pitchFamily="34" charset="-120"/>
               </a:rPr>
-              <a:t>Sketch a small Moon shape for each date (or every 3rd date if running short on time).</a:t>
+              <a:t>Tithi end-time: e.g. 14:37 (after which </a:t>
+            </a:r>
+            <a:pPr algn="l" indent="0" marL="0">
+              <a:lnSpc>
+                <a:spcPts val="1620"/>
+              </a:lnSpc>
+              <a:spcAft>
+                <a:spcPts val="300"/>
+              </a:spcAft>
+              <a:buNone/>
+            </a:pPr>
+            <a:r>
+              <a:rPr lang="en-US" sz="1200" i="1" dirty="0">
+                <a:solidFill>
+                  <a:srgbClr val="1C2833"/>
+                </a:solidFill>
+                <a:latin typeface="Arial" pitchFamily="34" charset="0"/>
+                <a:ea typeface="Arial" pitchFamily="34" charset="-122"/>
+                <a:cs typeface="Arial" pitchFamily="34" charset="-120"/>
+              </a:rPr>
+              <a:t>pañcamī</a:t>
+            </a:r>
+            <a:pPr algn="l" indent="0" marL="0">
+              <a:lnSpc>
+                <a:spcPts val="1620"/>
+              </a:lnSpc>
+              <a:spcAft>
+                <a:spcPts val="300"/>
+              </a:spcAft>
+              <a:buNone/>
+            </a:pPr>
+            <a:r>
+              <a:rPr lang="en-US" sz="1200" dirty="0">
+                <a:solidFill>
+                  <a:srgbClr val="1C2833"/>
+                </a:solidFill>
+                <a:latin typeface="Arial" pitchFamily="34" charset="0"/>
+                <a:ea typeface="Arial" pitchFamily="34" charset="-122"/>
+                <a:cs typeface="Arial" pitchFamily="34" charset="-120"/>
+              </a:rPr>
+              <a:t> begins)</a:t>
             </a:r>
             <a:endParaRPr lang="en-US" sz="1200" dirty="0"/>
           </a:p>
-          <a:p>
-            <a:pPr algn="l" marL="342900" indent="-342900">
-              <a:lnSpc>
-                <a:spcPts val="1620"/>
-              </a:lnSpc>
-              <a:spcAft>
-                <a:spcPts val="300"/>
-              </a:spcAft>
-              <a:buSzPct val="100000"/>
-              <a:buChar char="•"/>
-            </a:pPr>
-            <a:r>
-              <a:rPr lang="en-US" sz="1200" dirty="0">
-                <a:solidFill>
-                  <a:srgbClr val="1C2833"/>
-                </a:solidFill>
-                <a:latin typeface="Arial" pitchFamily="34" charset="0"/>
-                <a:ea typeface="Arial" pitchFamily="34" charset="-122"/>
-                <a:cs typeface="Arial" pitchFamily="34" charset="-120"/>
-              </a:rPr>
-              <a:t>Circle any </a:t>
-            </a:r>
-            <a:pPr algn="l" indent="0" marL="0">
-              <a:lnSpc>
-                <a:spcPts val="1620"/>
-              </a:lnSpc>
-              <a:spcAft>
-                <a:spcPts val="300"/>
-              </a:spcAft>
-              <a:buNone/>
-            </a:pPr>
-            <a:r>
-              <a:rPr lang="en-US" sz="1200" i="1" dirty="0">
-                <a:solidFill>
-                  <a:srgbClr val="1C2833"/>
-                </a:solidFill>
-                <a:latin typeface="Arial" pitchFamily="34" charset="0"/>
-                <a:ea typeface="Arial" pitchFamily="34" charset="-122"/>
-                <a:cs typeface="Arial" pitchFamily="34" charset="-120"/>
-              </a:rPr>
-              <a:t>amāvasyā</a:t>
-            </a:r>
-            <a:pPr algn="l" indent="0" marL="0">
-              <a:lnSpc>
-                <a:spcPts val="1620"/>
-              </a:lnSpc>
-              <a:spcAft>
-                <a:spcPts val="300"/>
-              </a:spcAft>
-              <a:buNone/>
-            </a:pPr>
-            <a:r>
-              <a:rPr lang="en-US" sz="1200" dirty="0">
-                <a:solidFill>
-                  <a:srgbClr val="1C2833"/>
-                </a:solidFill>
-                <a:latin typeface="Arial" pitchFamily="34" charset="0"/>
-                <a:ea typeface="Arial" pitchFamily="34" charset="-122"/>
-                <a:cs typeface="Arial" pitchFamily="34" charset="-120"/>
-              </a:rPr>
-              <a:t> and </a:t>
-            </a:r>
-            <a:pPr algn="l" indent="0" marL="0">
-              <a:lnSpc>
-                <a:spcPts val="1620"/>
-              </a:lnSpc>
-              <a:spcAft>
-                <a:spcPts val="300"/>
-              </a:spcAft>
-              <a:buNone/>
-            </a:pPr>
-            <a:r>
-              <a:rPr lang="en-US" sz="1200" i="1" dirty="0">
-                <a:solidFill>
-                  <a:srgbClr val="1C2833"/>
-                </a:solidFill>
-                <a:latin typeface="Arial" pitchFamily="34" charset="0"/>
-                <a:ea typeface="Arial" pitchFamily="34" charset="-122"/>
-                <a:cs typeface="Arial" pitchFamily="34" charset="-120"/>
-              </a:rPr>
-              <a:t>pūrṇimā</a:t>
-            </a:r>
-            <a:pPr algn="l" indent="0" marL="0">
-              <a:lnSpc>
-                <a:spcPts val="1620"/>
-              </a:lnSpc>
-              <a:spcAft>
-                <a:spcPts val="300"/>
-              </a:spcAft>
-              <a:buNone/>
-            </a:pPr>
-            <a:r>
-              <a:rPr lang="en-US" sz="1200" dirty="0">
-                <a:solidFill>
-                  <a:srgbClr val="1C2833"/>
-                </a:solidFill>
-                <a:latin typeface="Arial" pitchFamily="34" charset="0"/>
-                <a:ea typeface="Arial" pitchFamily="34" charset="-122"/>
-                <a:cs typeface="Arial" pitchFamily="34" charset="-120"/>
-              </a:rPr>
-              <a:t>.</a:t>
-            </a:r>
-            <a:endParaRPr lang="en-US" sz="1200" dirty="0"/>
-          </a:p>
-        </p:txBody>
-      </p:sp>
-      <p:sp>
-        <p:nvSpPr>
-          <p:cNvPr id="7" name="Text 5"/>
-          <p:cNvSpPr/>
-          <p:nvPr/>
-        </p:nvSpPr>
-        <p:spPr>
-          <a:xfrm>
-            <a:off x="406301" y="2817912"/>
-            <a:ext cx="8498026" cy="426541"/>
-          </a:xfrm>
-          <a:prstGeom prst="rect">
-            <a:avLst/>
-          </a:prstGeom>
-          <a:noFill/>
-          <a:ln/>
-        </p:spPr>
-        <p:txBody>
-          <a:bodyPr wrap="square" lIns="0" tIns="0" rIns="0" bIns="0" rtlCol="0" anchor="t"/>
-          <a:lstStyle/>
-          <a:p>
-            <a:pPr algn="l" indent="0" marL="0">
-              <a:lnSpc>
-                <a:spcPts val="1680"/>
-              </a:lnSpc>
-              <a:spcBef>
-                <a:spcPts val="300"/>
-              </a:spcBef>
-              <a:spcAft>
-                <a:spcPts val="300"/>
-              </a:spcAft>
-              <a:buNone/>
-            </a:pPr>
-            <a:r>
-              <a:rPr lang="en-US" sz="1200" dirty="0">
-                <a:solidFill>
-                  <a:srgbClr val="1C2833"/>
-                </a:solidFill>
-                <a:latin typeface="Arial" pitchFamily="34" charset="0"/>
-                <a:ea typeface="Arial" pitchFamily="34" charset="-122"/>
-                <a:cs typeface="Arial" pitchFamily="34" charset="-120"/>
-              </a:rPr>
-              <a:t>Walk around. The most common error: students copy the wrong column from the </a:t>
-            </a:r>
-            <a:pPr algn="l" indent="0" marL="0">
-              <a:lnSpc>
-                <a:spcPts val="1680"/>
-              </a:lnSpc>
-              <a:spcBef>
-                <a:spcPts val="300"/>
-              </a:spcBef>
-              <a:spcAft>
-                <a:spcPts val="300"/>
-              </a:spcAft>
-              <a:buNone/>
-            </a:pPr>
-            <a:r>
-              <a:rPr lang="en-US" sz="1200" i="1" dirty="0">
-                <a:solidFill>
-                  <a:srgbClr val="1C2833"/>
-                </a:solidFill>
-                <a:latin typeface="Arial" pitchFamily="34" charset="0"/>
-                <a:ea typeface="Arial" pitchFamily="34" charset="-122"/>
-                <a:cs typeface="Arial" pitchFamily="34" charset="-120"/>
-              </a:rPr>
-              <a:t>pañcāṅga</a:t>
-            </a:r>
-            <a:pPr algn="l" indent="0" marL="0">
-              <a:lnSpc>
-                <a:spcPts val="1680"/>
-              </a:lnSpc>
-              <a:spcBef>
-                <a:spcPts val="300"/>
-              </a:spcBef>
-              <a:spcAft>
-                <a:spcPts val="300"/>
-              </a:spcAft>
-              <a:buNone/>
-            </a:pPr>
-            <a:r>
-              <a:rPr lang="en-US" sz="1200" dirty="0">
-                <a:solidFill>
-                  <a:srgbClr val="1C2833"/>
-                </a:solidFill>
-                <a:latin typeface="Arial" pitchFamily="34" charset="0"/>
-                <a:ea typeface="Arial" pitchFamily="34" charset="-122"/>
-                <a:cs typeface="Arial" pitchFamily="34" charset="-120"/>
-              </a:rPr>
-              <a:t>. Have them double-check 2–3 entries with you.</a:t>
-            </a:r>
-            <a:endParaRPr lang="en-US" sz="1200" dirty="0"/>
-          </a:p>
-        </p:txBody>
-      </p:sp>
-      <p:sp>
-        <p:nvSpPr>
-          <p:cNvPr id="8" name="Text 6"/>
+        </p:txBody>
+      </p:sp>
+      <p:sp>
+        <p:nvSpPr>
+          <p:cNvPr id="6" name="Text 4"/>
           <p:cNvSpPr/>
           <p:nvPr/>
         </p:nvSpPr>
@@ -7080,7 +9559,7 @@
                 <a:ea typeface="Georgia" pitchFamily="34" charset="-122"/>
                 <a:cs typeface="Georgia" pitchFamily="34" charset="-120"/>
               </a:rPr>
-              <a:t>Wrap-up (5 min)</a:t>
+              <a:t>Core (15 min) (cont.)</a:t>
             </a:r>
             <a:endParaRPr lang="en-US" sz="1800" dirty="0"/>
           </a:p>
@@ -7095,7 +9574,7 @@
         <p:spPr>
           <a:xfrm>
             <a:off x="406301" y="870942"/>
-            <a:ext cx="8498026" cy="213271"/>
+            <a:ext cx="8498026" cy="426541"/>
           </a:xfrm>
           <a:prstGeom prst="rect">
             <a:avLst/>
@@ -7120,15 +9599,15 @@
               <a:buNone/>
             </a:pPr>
             <a:r>
-              <a:rPr lang="en-US" sz="1200" dirty="0">
-                <a:solidFill>
-                  <a:srgbClr val="1C2833"/>
-                </a:solidFill>
-                <a:latin typeface="Arial" pitchFamily="34" charset="0"/>
-                <a:ea typeface="Arial" pitchFamily="34" charset="-122"/>
-                <a:cs typeface="Arial" pitchFamily="34" charset="-120"/>
-              </a:rPr>
-              <a:t>– Pairs hold up their finished calendars briefly. The teacher takes a quick scan.</a:t>
+              <a:rPr lang="en-US" sz="1200" i="1" dirty="0">
+                <a:solidFill>
+                  <a:srgbClr val="1C2833"/>
+                </a:solidFill>
+                <a:latin typeface="Arial" pitchFamily="34" charset="0"/>
+                <a:ea typeface="Arial" pitchFamily="34" charset="-122"/>
+                <a:cs typeface="Arial" pitchFamily="34" charset="-120"/>
+              </a:rPr>
+              <a:t>"So if you went out at 8 p.m. on May 22, the tithi would already be pañcamī, not caturthī. The tithi listed at the top of a calendar date is the one current at sunrise."</a:t>
             </a:r>
             <a:endParaRPr lang="en-US" sz="1200" dirty="0"/>
           </a:p>
@@ -7137,216 +9616,6 @@
       <p:sp>
         <p:nvSpPr>
           <p:cNvPr id="5" name="Text 3"/>
-          <p:cNvSpPr/>
-          <p:nvPr/>
-        </p:nvSpPr>
-        <p:spPr>
-          <a:xfrm>
-            <a:off x="634901" y="1173063"/>
-            <a:ext cx="8102798" cy="525661"/>
-          </a:xfrm>
-          <a:prstGeom prst="rect">
-            <a:avLst/>
-          </a:prstGeom>
-          <a:noFill/>
-          <a:ln/>
-        </p:spPr>
-        <p:txBody>
-          <a:bodyPr wrap="square" lIns="0" tIns="0" rIns="0" bIns="0" rtlCol="0" anchor="t"/>
-          <a:lstStyle/>
-          <a:p>
-            <a:pPr algn="l" marL="342900" indent="-342900">
-              <a:lnSpc>
-                <a:spcPts val="1620"/>
-              </a:lnSpc>
-              <a:spcAft>
-                <a:spcPts val="300"/>
-              </a:spcAft>
-              <a:buSzPct val="100000"/>
-              <a:buChar char="•"/>
-            </a:pPr>
-            <a:r>
-              <a:rPr lang="en-US" sz="1200" b="1" dirty="0">
-                <a:solidFill>
-                  <a:srgbClr val="1C2833"/>
-                </a:solidFill>
-                <a:latin typeface="Arial" pitchFamily="34" charset="0"/>
-                <a:ea typeface="Arial" pitchFamily="34" charset="-122"/>
-                <a:cs typeface="Arial" pitchFamily="34" charset="-120"/>
-              </a:rPr>
-              <a:t>Exit question (1 min, oral):</a:t>
-            </a:r>
-            <a:pPr algn="l" indent="0" marL="0">
-              <a:lnSpc>
-                <a:spcPts val="1620"/>
-              </a:lnSpc>
-              <a:spcAft>
-                <a:spcPts val="300"/>
-              </a:spcAft>
-              <a:buNone/>
-            </a:pPr>
-            <a:r>
-              <a:rPr lang="en-US" sz="1200" dirty="0">
-                <a:solidFill>
-                  <a:srgbClr val="1C2833"/>
-                </a:solidFill>
-                <a:latin typeface="Arial" pitchFamily="34" charset="0"/>
-                <a:ea typeface="Arial" pitchFamily="34" charset="-122"/>
-                <a:cs typeface="Arial" pitchFamily="34" charset="-120"/>
-              </a:rPr>
-              <a:t> </a:t>
-            </a:r>
-            <a:pPr algn="l" indent="0" marL="0">
-              <a:lnSpc>
-                <a:spcPts val="1620"/>
-              </a:lnSpc>
-              <a:spcAft>
-                <a:spcPts val="300"/>
-              </a:spcAft>
-              <a:buNone/>
-            </a:pPr>
-            <a:r>
-              <a:rPr lang="en-US" sz="1200" i="1" dirty="0">
-                <a:solidFill>
-                  <a:srgbClr val="1C2833"/>
-                </a:solidFill>
-                <a:latin typeface="Arial" pitchFamily="34" charset="0"/>
-                <a:ea typeface="Arial" pitchFamily="34" charset="-122"/>
-                <a:cs typeface="Arial" pitchFamily="34" charset="-120"/>
-              </a:rPr>
-              <a:t>"Which date this month is</a:t>
-            </a:r>
-            <a:pPr algn="l" indent="0" marL="0">
-              <a:lnSpc>
-                <a:spcPts val="1620"/>
-              </a:lnSpc>
-              <a:spcAft>
-                <a:spcPts val="300"/>
-              </a:spcAft>
-              <a:buNone/>
-            </a:pPr>
-            <a:r>
-              <a:rPr lang="en-US" sz="1200" dirty="0">
-                <a:solidFill>
-                  <a:srgbClr val="1C2833"/>
-                </a:solidFill>
-                <a:latin typeface="Arial" pitchFamily="34" charset="0"/>
-                <a:ea typeface="Arial" pitchFamily="34" charset="-122"/>
-                <a:cs typeface="Arial" pitchFamily="34" charset="-120"/>
-              </a:rPr>
-              <a:t>pūrṇimā</a:t>
-            </a:r>
-            <a:pPr algn="l" indent="0" marL="0">
-              <a:lnSpc>
-                <a:spcPts val="1620"/>
-              </a:lnSpc>
-              <a:spcAft>
-                <a:spcPts val="300"/>
-              </a:spcAft>
-              <a:buNone/>
-            </a:pPr>
-            <a:r>
-              <a:rPr lang="en-US" sz="1200" i="1" dirty="0">
-                <a:solidFill>
-                  <a:srgbClr val="1C2833"/>
-                </a:solidFill>
-                <a:latin typeface="Arial" pitchFamily="34" charset="0"/>
-                <a:ea typeface="Arial" pitchFamily="34" charset="-122"/>
-                <a:cs typeface="Arial" pitchFamily="34" charset="-120"/>
-              </a:rPr>
-              <a:t>?"</a:t>
-            </a:r>
-            <a:pPr algn="l" indent="0" marL="0">
-              <a:lnSpc>
-                <a:spcPts val="1620"/>
-              </a:lnSpc>
-              <a:spcAft>
-                <a:spcPts val="300"/>
-              </a:spcAft>
-              <a:buNone/>
-            </a:pPr>
-            <a:r>
-              <a:rPr lang="en-US" sz="1200" dirty="0">
-                <a:solidFill>
-                  <a:srgbClr val="1C2833"/>
-                </a:solidFill>
-                <a:latin typeface="Arial" pitchFamily="34" charset="0"/>
-                <a:ea typeface="Arial" pitchFamily="34" charset="-122"/>
-                <a:cs typeface="Arial" pitchFamily="34" charset="-120"/>
-              </a:rPr>
-              <a:t> Class answers in chorus.</a:t>
-            </a:r>
-            <a:endParaRPr lang="en-US" sz="1200" dirty="0"/>
-          </a:p>
-          <a:p>
-            <a:pPr algn="l" marL="342900" indent="-342900">
-              <a:lnSpc>
-                <a:spcPts val="1620"/>
-              </a:lnSpc>
-              <a:spcAft>
-                <a:spcPts val="300"/>
-              </a:spcAft>
-              <a:buSzPct val="100000"/>
-              <a:buChar char="•"/>
-            </a:pPr>
-            <a:r>
-              <a:rPr lang="en-US" sz="1200" b="1" dirty="0">
-                <a:solidFill>
-                  <a:srgbClr val="1C2833"/>
-                </a:solidFill>
-                <a:latin typeface="Arial" pitchFamily="34" charset="0"/>
-                <a:ea typeface="Arial" pitchFamily="34" charset="-122"/>
-                <a:cs typeface="Arial" pitchFamily="34" charset="-120"/>
-              </a:rPr>
-              <a:t>Preview Day 5:</a:t>
-            </a:r>
-            <a:pPr algn="l" indent="0" marL="0">
-              <a:lnSpc>
-                <a:spcPts val="1620"/>
-              </a:lnSpc>
-              <a:spcAft>
-                <a:spcPts val="300"/>
-              </a:spcAft>
-              <a:buNone/>
-            </a:pPr>
-            <a:r>
-              <a:rPr lang="en-US" sz="1200" dirty="0">
-                <a:solidFill>
-                  <a:srgbClr val="1C2833"/>
-                </a:solidFill>
-                <a:latin typeface="Arial" pitchFamily="34" charset="0"/>
-                <a:ea typeface="Arial" pitchFamily="34" charset="-122"/>
-                <a:cs typeface="Arial" pitchFamily="34" charset="-120"/>
-              </a:rPr>
-              <a:t> </a:t>
-            </a:r>
-            <a:pPr algn="l" indent="0" marL="0">
-              <a:lnSpc>
-                <a:spcPts val="1620"/>
-              </a:lnSpc>
-              <a:spcAft>
-                <a:spcPts val="300"/>
-              </a:spcAft>
-              <a:buNone/>
-            </a:pPr>
-            <a:r>
-              <a:rPr lang="en-US" sz="1200" i="1" dirty="0">
-                <a:solidFill>
-                  <a:srgbClr val="1C2833"/>
-                </a:solidFill>
-                <a:latin typeface="Arial" pitchFamily="34" charset="0"/>
-                <a:ea typeface="Arial" pitchFamily="34" charset="-122"/>
-                <a:cs typeface="Arial" pitchFamily="34" charset="-120"/>
-              </a:rPr>
-              <a:t>"Tomorrow we name the 12 lunar months and link them to festivals."</a:t>
-            </a:r>
-            <a:endParaRPr lang="en-US" sz="1200" dirty="0"/>
-          </a:p>
-        </p:txBody>
-      </p:sp>
-      <p:sp>
-        <p:nvSpPr>
-          <p:cNvPr id="6" name="Text 4"/>
           <p:cNvSpPr/>
           <p:nvPr/>
         </p:nvSpPr>
@@ -7496,7 +9765,7 @@
                 <a:ea typeface="Georgia" pitchFamily="34" charset="-122"/>
                 <a:cs typeface="Georgia" pitchFamily="34" charset="-120"/>
               </a:rPr>
-              <a:t>Student-facing content</a:t>
+              <a:t>Core (15 min) (cont.)</a:t>
             </a:r>
             <a:endParaRPr lang="en-US" sz="1800" dirty="0"/>
           </a:p>
@@ -7510,61 +9779,8 @@
         </p:nvSpPr>
         <p:spPr>
           <a:xfrm>
-            <a:off x="406301" y="883593"/>
-            <a:ext cx="8331398" cy="1843088"/>
-          </a:xfrm>
-          <a:prstGeom prst="rect">
-            <a:avLst/>
-          </a:prstGeom>
-          <a:solidFill>
-            <a:srgbClr val="F4F8F9"/>
-          </a:solidFill>
-          <a:ln/>
-        </p:spPr>
-        <p:txBody>
-          <a:bodyPr wrap="square" rtlCol="0" anchor="ctr"/>
-          <a:lstStyle/>
-          <a:p>
-            <a:pPr indent="0" marL="0">
-              <a:buNone/>
-            </a:pPr>
-            <a:endParaRPr lang="en-US" dirty="0"/>
-          </a:p>
-        </p:txBody>
-      </p:sp>
-      <p:sp>
-        <p:nvSpPr>
-          <p:cNvPr id="5" name="Shape 3"/>
-          <p:cNvSpPr/>
-          <p:nvPr/>
-        </p:nvSpPr>
-        <p:spPr>
-          <a:xfrm>
-            <a:off x="434876" y="883593"/>
-            <a:ext cx="0" cy="1843088"/>
-          </a:xfrm>
-          <a:prstGeom prst="line">
-            <a:avLst/>
-          </a:prstGeom>
-          <a:noFill/>
-          <a:ln w="57150">
-            <a:solidFill>
-              <a:srgbClr val="FE4447"/>
-            </a:solidFill>
-            <a:prstDash val="solid"/>
-          </a:ln>
-        </p:spPr>
-      </p:sp>
-      <p:sp>
-        <p:nvSpPr>
-          <p:cNvPr id="6" name="Text 4"/>
-          <p:cNvSpPr/>
-          <p:nvPr/>
-        </p:nvSpPr>
-        <p:spPr>
-          <a:xfrm>
-            <a:off x="692051" y="1074093"/>
-            <a:ext cx="7973389" cy="230981"/>
+            <a:off x="634901" y="883593"/>
+            <a:ext cx="8102798" cy="281880"/>
           </a:xfrm>
           <a:prstGeom prst="rect">
             <a:avLst/>
@@ -7576,43 +9792,61 @@
           <a:bodyPr wrap="square" lIns="0" tIns="0" rIns="0" bIns="0" rtlCol="0" anchor="t"/>
           <a:lstStyle/>
           <a:p>
-            <a:pPr algn="l" indent="0" marL="0">
-              <a:lnSpc>
-                <a:spcPts val="1820"/>
-              </a:lnSpc>
-              <a:spcBef>
-                <a:spcPts val="300"/>
-              </a:spcBef>
-              <a:spcAft>
-                <a:spcPts val="300"/>
-              </a:spcAft>
-              <a:buNone/>
-            </a:pPr>
-            <a:r>
-              <a:rPr lang="en-US" sz="1300" b="1" i="1" dirty="0">
-                <a:solidFill>
-                  <a:srgbClr val="1C2833"/>
-                </a:solidFill>
-                <a:latin typeface="Georgia" pitchFamily="34" charset="0"/>
-                <a:ea typeface="Georgia" pitchFamily="34" charset="-122"/>
-                <a:cs typeface="Georgia" pitchFamily="34" charset="-120"/>
-              </a:rPr>
-              <a:t>Today you built a tithi calendar.</a:t>
-            </a:r>
-            <a:endParaRPr lang="en-US" sz="1300" dirty="0"/>
-          </a:p>
-        </p:txBody>
-      </p:sp>
-      <p:sp>
-        <p:nvSpPr>
-          <p:cNvPr id="7" name="Text 5"/>
+            <a:pPr algn="l" marL="342900" indent="-342900">
+              <a:lnSpc>
+                <a:spcPts val="1620"/>
+              </a:lnSpc>
+              <a:spcAft>
+                <a:spcPts val="300"/>
+              </a:spcAft>
+              <a:buSzPct val="100000"/>
+              <a:buChar char="•"/>
+            </a:pPr>
+            <a:r>
+              <a:rPr lang="en-US" sz="1200" b="1" dirty="0">
+                <a:solidFill>
+                  <a:srgbClr val="1C2833"/>
+                </a:solidFill>
+                <a:latin typeface="Arial" pitchFamily="34" charset="0"/>
+                <a:ea typeface="Arial" pitchFamily="34" charset="-122"/>
+                <a:cs typeface="Arial" pitchFamily="34" charset="-120"/>
+              </a:rPr>
+              <a:t>The pattern of a month — anticipated.</a:t>
+            </a:r>
+            <a:pPr algn="l" indent="0" marL="0">
+              <a:lnSpc>
+                <a:spcPts val="1620"/>
+              </a:lnSpc>
+              <a:spcAft>
+                <a:spcPts val="300"/>
+              </a:spcAft>
+              <a:buNone/>
+            </a:pPr>
+            <a:r>
+              <a:rPr lang="en-US" sz="1200" dirty="0">
+                <a:solidFill>
+                  <a:srgbClr val="1C2833"/>
+                </a:solidFill>
+                <a:latin typeface="Arial" pitchFamily="34" charset="0"/>
+                <a:ea typeface="Arial" pitchFamily="34" charset="-122"/>
+                <a:cs typeface="Arial" pitchFamily="34" charset="-120"/>
+              </a:rPr>
+              <a:t> Most months have:</a:t>
+            </a:r>
+            <a:endParaRPr lang="en-US" sz="1200" dirty="0"/>
+          </a:p>
+        </p:txBody>
+      </p:sp>
+      <p:sp>
+        <p:nvSpPr>
+          <p:cNvPr id="5" name="Text 3"/>
           <p:cNvSpPr/>
           <p:nvPr/>
         </p:nvSpPr>
         <p:spPr>
           <a:xfrm>
-            <a:off x="692051" y="1343174"/>
-            <a:ext cx="7973389" cy="461963"/>
+            <a:off x="634901" y="1266974"/>
+            <a:ext cx="8102798" cy="1257002"/>
           </a:xfrm>
           <a:prstGeom prst="rect">
             <a:avLst/>
@@ -7624,360 +9858,450 @@
           <a:bodyPr wrap="square" lIns="0" tIns="0" rIns="0" bIns="0" rtlCol="0" anchor="t"/>
           <a:lstStyle/>
           <a:p>
-            <a:pPr algn="l" indent="0" marL="0">
-              <a:lnSpc>
-                <a:spcPts val="1820"/>
-              </a:lnSpc>
-              <a:spcBef>
-                <a:spcPts val="300"/>
-              </a:spcBef>
-              <a:spcAft>
-                <a:spcPts val="300"/>
-              </a:spcAft>
-              <a:buNone/>
-            </a:pPr>
-            <a:r>
-              <a:rPr lang="en-US" sz="1300" dirty="0">
-                <a:solidFill>
-                  <a:srgbClr val="1C2833"/>
-                </a:solidFill>
-                <a:latin typeface="Georgia" pitchFamily="34" charset="0"/>
-                <a:ea typeface="Georgia" pitchFamily="34" charset="-122"/>
-                <a:cs typeface="Georgia" pitchFamily="34" charset="-120"/>
-              </a:rPr>
-              <a:t>A tithi calendar links each date in a calendar month to: - the </a:t>
-            </a:r>
-            <a:pPr algn="l" indent="0" marL="0">
-              <a:lnSpc>
-                <a:spcPts val="1820"/>
-              </a:lnSpc>
-              <a:spcBef>
-                <a:spcPts val="300"/>
-              </a:spcBef>
-              <a:spcAft>
-                <a:spcPts val="300"/>
-              </a:spcAft>
-              <a:buNone/>
-            </a:pPr>
-            <a:r>
-              <a:rPr lang="en-US" sz="1300" i="1" dirty="0">
-                <a:solidFill>
-                  <a:srgbClr val="1C2833"/>
-                </a:solidFill>
-                <a:latin typeface="Georgia" pitchFamily="34" charset="0"/>
-                <a:ea typeface="Georgia" pitchFamily="34" charset="-122"/>
-                <a:cs typeface="Georgia" pitchFamily="34" charset="-120"/>
-              </a:rPr>
-              <a:t>pakṣa</a:t>
-            </a:r>
-            <a:pPr algn="l" indent="0" marL="0">
-              <a:lnSpc>
-                <a:spcPts val="1820"/>
-              </a:lnSpc>
-              <a:spcBef>
-                <a:spcPts val="300"/>
-              </a:spcBef>
-              <a:spcAft>
-                <a:spcPts val="300"/>
-              </a:spcAft>
-              <a:buNone/>
-            </a:pPr>
-            <a:r>
-              <a:rPr lang="en-US" sz="1300" dirty="0">
-                <a:solidFill>
-                  <a:srgbClr val="1C2833"/>
-                </a:solidFill>
-                <a:latin typeface="Georgia" pitchFamily="34" charset="0"/>
-                <a:ea typeface="Georgia" pitchFamily="34" charset="-122"/>
-                <a:cs typeface="Georgia" pitchFamily="34" charset="-120"/>
-              </a:rPr>
-              <a:t> it falls in - the </a:t>
-            </a:r>
-            <a:pPr algn="l" indent="0" marL="0">
-              <a:lnSpc>
-                <a:spcPts val="1820"/>
-              </a:lnSpc>
-              <a:spcBef>
-                <a:spcPts val="300"/>
-              </a:spcBef>
-              <a:spcAft>
-                <a:spcPts val="300"/>
-              </a:spcAft>
-              <a:buNone/>
-            </a:pPr>
-            <a:r>
-              <a:rPr lang="en-US" sz="1300" i="1" dirty="0">
-                <a:solidFill>
-                  <a:srgbClr val="1C2833"/>
-                </a:solidFill>
-                <a:latin typeface="Georgia" pitchFamily="34" charset="0"/>
-                <a:ea typeface="Georgia" pitchFamily="34" charset="-122"/>
-                <a:cs typeface="Georgia" pitchFamily="34" charset="-120"/>
-              </a:rPr>
-              <a:t>tithi</a:t>
-            </a:r>
-            <a:pPr algn="l" indent="0" marL="0">
-              <a:lnSpc>
-                <a:spcPts val="1820"/>
-              </a:lnSpc>
-              <a:spcBef>
-                <a:spcPts val="300"/>
-              </a:spcBef>
-              <a:spcAft>
-                <a:spcPts val="300"/>
-              </a:spcAft>
-              <a:buNone/>
-            </a:pPr>
-            <a:r>
-              <a:rPr lang="en-US" sz="1300" dirty="0">
-                <a:solidFill>
-                  <a:srgbClr val="1C2833"/>
-                </a:solidFill>
-                <a:latin typeface="Georgia" pitchFamily="34" charset="0"/>
-                <a:ea typeface="Georgia" pitchFamily="34" charset="-122"/>
-                <a:cs typeface="Georgia" pitchFamily="34" charset="-120"/>
-              </a:rPr>
-              <a:t> current at sunrise - the time the tithi ends - the expected shape of the Moon</a:t>
-            </a:r>
-            <a:endParaRPr lang="en-US" sz="1300" dirty="0"/>
-          </a:p>
-        </p:txBody>
-      </p:sp>
-      <p:sp>
-        <p:nvSpPr>
-          <p:cNvPr id="8" name="Text 6"/>
-          <p:cNvSpPr/>
-          <p:nvPr/>
-        </p:nvSpPr>
-        <p:spPr>
-          <a:xfrm>
-            <a:off x="692051" y="1843236"/>
-            <a:ext cx="7973389" cy="692944"/>
-          </a:xfrm>
-          <a:prstGeom prst="rect">
-            <a:avLst/>
-          </a:prstGeom>
-          <a:noFill/>
-          <a:ln/>
-        </p:spPr>
-        <p:txBody>
-          <a:bodyPr wrap="square" lIns="0" tIns="0" rIns="0" bIns="0" rtlCol="0" anchor="t"/>
-          <a:lstStyle/>
-          <a:p>
-            <a:pPr algn="l" indent="0" marL="0">
-              <a:lnSpc>
-                <a:spcPts val="1820"/>
-              </a:lnSpc>
-              <a:spcBef>
-                <a:spcPts val="300"/>
-              </a:spcBef>
-              <a:spcAft>
-                <a:spcPts val="300"/>
-              </a:spcAft>
-              <a:buNone/>
-            </a:pPr>
-            <a:r>
-              <a:rPr lang="en-US" sz="1300" dirty="0">
-                <a:solidFill>
-                  <a:srgbClr val="1C2833"/>
-                </a:solidFill>
-                <a:latin typeface="Georgia" pitchFamily="34" charset="0"/>
-                <a:ea typeface="Georgia" pitchFamily="34" charset="-122"/>
-                <a:cs typeface="Georgia" pitchFamily="34" charset="-120"/>
-              </a:rPr>
-              <a:t>Two patterns to notice: - There are usually 1 </a:t>
-            </a:r>
-            <a:pPr algn="l" indent="0" marL="0">
-              <a:lnSpc>
-                <a:spcPts val="1820"/>
-              </a:lnSpc>
-              <a:spcBef>
-                <a:spcPts val="300"/>
-              </a:spcBef>
-              <a:spcAft>
-                <a:spcPts val="300"/>
-              </a:spcAft>
-              <a:buNone/>
-            </a:pPr>
-            <a:r>
-              <a:rPr lang="en-US" sz="1300" i="1" dirty="0">
-                <a:solidFill>
-                  <a:srgbClr val="1C2833"/>
-                </a:solidFill>
-                <a:latin typeface="Georgia" pitchFamily="34" charset="0"/>
-                <a:ea typeface="Georgia" pitchFamily="34" charset="-122"/>
-                <a:cs typeface="Georgia" pitchFamily="34" charset="-120"/>
+            <a:pPr algn="l" marL="342900" indent="-342900">
+              <a:lnSpc>
+                <a:spcPts val="1620"/>
+              </a:lnSpc>
+              <a:spcAft>
+                <a:spcPts val="300"/>
+              </a:spcAft>
+              <a:buSzPct val="100000"/>
+              <a:buChar char="•"/>
+            </a:pPr>
+            <a:r>
+              <a:rPr lang="en-US" sz="1200" dirty="0">
+                <a:solidFill>
+                  <a:srgbClr val="1C2833"/>
+                </a:solidFill>
+                <a:latin typeface="Arial" pitchFamily="34" charset="0"/>
+                <a:ea typeface="Arial" pitchFamily="34" charset="-122"/>
+                <a:cs typeface="Arial" pitchFamily="34" charset="-120"/>
+              </a:rPr>
+              <a:t>A </a:t>
+            </a:r>
+            <a:pPr algn="l" indent="0" marL="0">
+              <a:lnSpc>
+                <a:spcPts val="1620"/>
+              </a:lnSpc>
+              <a:spcAft>
+                <a:spcPts val="300"/>
+              </a:spcAft>
+              <a:buNone/>
+            </a:pPr>
+            <a:r>
+              <a:rPr lang="en-US" sz="1200" i="1" dirty="0">
+                <a:solidFill>
+                  <a:srgbClr val="1C2833"/>
+                </a:solidFill>
+                <a:latin typeface="Arial" pitchFamily="34" charset="0"/>
+                <a:ea typeface="Arial" pitchFamily="34" charset="-122"/>
+                <a:cs typeface="Arial" pitchFamily="34" charset="-120"/>
+              </a:rPr>
+              <a:t>śukla pratipadā</a:t>
+            </a:r>
+            <a:pPr algn="l" indent="0" marL="0">
+              <a:lnSpc>
+                <a:spcPts val="1620"/>
+              </a:lnSpc>
+              <a:spcAft>
+                <a:spcPts val="300"/>
+              </a:spcAft>
+              <a:buNone/>
+            </a:pPr>
+            <a:r>
+              <a:rPr lang="en-US" sz="1200" dirty="0">
+                <a:solidFill>
+                  <a:srgbClr val="1C2833"/>
+                </a:solidFill>
+                <a:latin typeface="Arial" pitchFamily="34" charset="0"/>
+                <a:ea typeface="Arial" pitchFamily="34" charset="-122"/>
+                <a:cs typeface="Arial" pitchFamily="34" charset="-120"/>
+              </a:rPr>
+              <a:t> (the day after </a:t>
+            </a:r>
+            <a:pPr algn="l" indent="0" marL="0">
+              <a:lnSpc>
+                <a:spcPts val="1620"/>
+              </a:lnSpc>
+              <a:spcAft>
+                <a:spcPts val="300"/>
+              </a:spcAft>
+              <a:buNone/>
+            </a:pPr>
+            <a:r>
+              <a:rPr lang="en-US" sz="1200" i="1" dirty="0">
+                <a:solidFill>
+                  <a:srgbClr val="1C2833"/>
+                </a:solidFill>
+                <a:latin typeface="Arial" pitchFamily="34" charset="0"/>
+                <a:ea typeface="Arial" pitchFamily="34" charset="-122"/>
+                <a:cs typeface="Arial" pitchFamily="34" charset="-120"/>
               </a:rPr>
               <a:t>amāvasyā</a:t>
             </a:r>
             <a:pPr algn="l" indent="0" marL="0">
               <a:lnSpc>
-                <a:spcPts val="1820"/>
-              </a:lnSpc>
-              <a:spcBef>
-                <a:spcPts val="300"/>
-              </a:spcBef>
-              <a:spcAft>
-                <a:spcPts val="300"/>
-              </a:spcAft>
-              <a:buNone/>
-            </a:pPr>
-            <a:r>
-              <a:rPr lang="en-US" sz="1300" dirty="0">
-                <a:solidFill>
-                  <a:srgbClr val="1C2833"/>
-                </a:solidFill>
-                <a:latin typeface="Georgia" pitchFamily="34" charset="0"/>
-                <a:ea typeface="Georgia" pitchFamily="34" charset="-122"/>
-                <a:cs typeface="Georgia" pitchFamily="34" charset="-120"/>
-              </a:rPr>
-              <a:t> and 1 </a:t>
-            </a:r>
-            <a:pPr algn="l" indent="0" marL="0">
-              <a:lnSpc>
-                <a:spcPts val="1820"/>
-              </a:lnSpc>
-              <a:spcBef>
-                <a:spcPts val="300"/>
-              </a:spcBef>
-              <a:spcAft>
-                <a:spcPts val="300"/>
-              </a:spcAft>
-              <a:buNone/>
-            </a:pPr>
-            <a:r>
-              <a:rPr lang="en-US" sz="1300" i="1" dirty="0">
-                <a:solidFill>
-                  <a:srgbClr val="1C2833"/>
-                </a:solidFill>
-                <a:latin typeface="Georgia" pitchFamily="34" charset="0"/>
-                <a:ea typeface="Georgia" pitchFamily="34" charset="-122"/>
-                <a:cs typeface="Georgia" pitchFamily="34" charset="-120"/>
+                <a:spcPts val="1620"/>
+              </a:lnSpc>
+              <a:spcAft>
+                <a:spcPts val="300"/>
+              </a:spcAft>
+              <a:buNone/>
+            </a:pPr>
+            <a:r>
+              <a:rPr lang="en-US" sz="1200" dirty="0">
+                <a:solidFill>
+                  <a:srgbClr val="1C2833"/>
+                </a:solidFill>
+                <a:latin typeface="Arial" pitchFamily="34" charset="0"/>
+                <a:ea typeface="Arial" pitchFamily="34" charset="-122"/>
+                <a:cs typeface="Arial" pitchFamily="34" charset="-120"/>
+              </a:rPr>
+              <a:t>)</a:t>
+            </a:r>
+            <a:endParaRPr lang="en-US" sz="1200" dirty="0"/>
+          </a:p>
+          <a:p>
+            <a:pPr algn="l" marL="342900" indent="-342900">
+              <a:lnSpc>
+                <a:spcPts val="1620"/>
+              </a:lnSpc>
+              <a:spcAft>
+                <a:spcPts val="300"/>
+              </a:spcAft>
+              <a:buSzPct val="100000"/>
+              <a:buChar char="•"/>
+            </a:pPr>
+            <a:r>
+              <a:rPr lang="en-US" sz="1200" dirty="0">
+                <a:solidFill>
+                  <a:srgbClr val="1C2833"/>
+                </a:solidFill>
+                <a:latin typeface="Arial" pitchFamily="34" charset="0"/>
+                <a:ea typeface="Arial" pitchFamily="34" charset="-122"/>
+                <a:cs typeface="Arial" pitchFamily="34" charset="-120"/>
+              </a:rPr>
+              <a:t>A </a:t>
+            </a:r>
+            <a:pPr algn="l" indent="0" marL="0">
+              <a:lnSpc>
+                <a:spcPts val="1620"/>
+              </a:lnSpc>
+              <a:spcAft>
+                <a:spcPts val="300"/>
+              </a:spcAft>
+              <a:buNone/>
+            </a:pPr>
+            <a:r>
+              <a:rPr lang="en-US" sz="1200" i="1" dirty="0">
+                <a:solidFill>
+                  <a:srgbClr val="1C2833"/>
+                </a:solidFill>
+                <a:latin typeface="Arial" pitchFamily="34" charset="0"/>
+                <a:ea typeface="Arial" pitchFamily="34" charset="-122"/>
+                <a:cs typeface="Arial" pitchFamily="34" charset="-120"/>
               </a:rPr>
               <a:t>pūrṇimā</a:t>
             </a:r>
             <a:pPr algn="l" indent="0" marL="0">
               <a:lnSpc>
-                <a:spcPts val="1820"/>
-              </a:lnSpc>
-              <a:spcBef>
-                <a:spcPts val="300"/>
-              </a:spcBef>
-              <a:spcAft>
-                <a:spcPts val="300"/>
-              </a:spcAft>
-              <a:buNone/>
-            </a:pPr>
-            <a:r>
-              <a:rPr lang="en-US" sz="1300" dirty="0">
-                <a:solidFill>
-                  <a:srgbClr val="1C2833"/>
-                </a:solidFill>
-                <a:latin typeface="Georgia" pitchFamily="34" charset="0"/>
-                <a:ea typeface="Georgia" pitchFamily="34" charset="-122"/>
-                <a:cs typeface="Georgia" pitchFamily="34" charset="-120"/>
-              </a:rPr>
-              <a:t> per calendar month — sometimes 0 or 2 depending on month length. - A few tithis will have unusual entries — a </a:t>
-            </a:r>
-            <a:pPr algn="l" indent="0" marL="0">
-              <a:lnSpc>
-                <a:spcPts val="1820"/>
-              </a:lnSpc>
-              <a:spcBef>
-                <a:spcPts val="300"/>
-              </a:spcBef>
-              <a:spcAft>
-                <a:spcPts val="300"/>
-              </a:spcAft>
-              <a:buNone/>
-            </a:pPr>
-            <a:r>
-              <a:rPr lang="en-US" sz="1300" i="1" dirty="0">
-                <a:solidFill>
-                  <a:srgbClr val="1C2833"/>
-                </a:solidFill>
-                <a:latin typeface="Georgia" pitchFamily="34" charset="0"/>
-                <a:ea typeface="Georgia" pitchFamily="34" charset="-122"/>
-                <a:cs typeface="Georgia" pitchFamily="34" charset="-120"/>
+                <a:spcPts val="1620"/>
+              </a:lnSpc>
+              <a:spcAft>
+                <a:spcPts val="300"/>
+              </a:spcAft>
+              <a:buNone/>
+            </a:pPr>
+            <a:r>
+              <a:rPr lang="en-US" sz="1200" dirty="0">
+                <a:solidFill>
+                  <a:srgbClr val="1C2833"/>
+                </a:solidFill>
+                <a:latin typeface="Arial" pitchFamily="34" charset="0"/>
+                <a:ea typeface="Arial" pitchFamily="34" charset="-122"/>
+                <a:cs typeface="Arial" pitchFamily="34" charset="-120"/>
+              </a:rPr>
+              <a:t> (in the middle)</a:t>
+            </a:r>
+            <a:endParaRPr lang="en-US" sz="1200" dirty="0"/>
+          </a:p>
+          <a:p>
+            <a:pPr algn="l" marL="342900" indent="-342900">
+              <a:lnSpc>
+                <a:spcPts val="1620"/>
+              </a:lnSpc>
+              <a:spcAft>
+                <a:spcPts val="300"/>
+              </a:spcAft>
+              <a:buSzPct val="100000"/>
+              <a:buChar char="•"/>
+            </a:pPr>
+            <a:r>
+              <a:rPr lang="en-US" sz="1200" dirty="0">
+                <a:solidFill>
+                  <a:srgbClr val="1C2833"/>
+                </a:solidFill>
+                <a:latin typeface="Arial" pitchFamily="34" charset="0"/>
+                <a:ea typeface="Arial" pitchFamily="34" charset="-122"/>
+                <a:cs typeface="Arial" pitchFamily="34" charset="-120"/>
+              </a:rPr>
+              <a:t>A </a:t>
+            </a:r>
+            <a:pPr algn="l" indent="0" marL="0">
+              <a:lnSpc>
+                <a:spcPts val="1620"/>
+              </a:lnSpc>
+              <a:spcAft>
+                <a:spcPts val="300"/>
+              </a:spcAft>
+              <a:buNone/>
+            </a:pPr>
+            <a:r>
+              <a:rPr lang="en-US" sz="1200" i="1" dirty="0">
+                <a:solidFill>
+                  <a:srgbClr val="1C2833"/>
+                </a:solidFill>
+                <a:latin typeface="Arial" pitchFamily="34" charset="0"/>
+                <a:ea typeface="Arial" pitchFamily="34" charset="-122"/>
+                <a:cs typeface="Arial" pitchFamily="34" charset="-120"/>
+              </a:rPr>
+              <a:t>kṛṣṇa pratipadā</a:t>
+            </a:r>
+            <a:pPr algn="l" indent="0" marL="0">
+              <a:lnSpc>
+                <a:spcPts val="1620"/>
+              </a:lnSpc>
+              <a:spcAft>
+                <a:spcPts val="300"/>
+              </a:spcAft>
+              <a:buNone/>
+            </a:pPr>
+            <a:r>
+              <a:rPr lang="en-US" sz="1200" dirty="0">
+                <a:solidFill>
+                  <a:srgbClr val="1C2833"/>
+                </a:solidFill>
+                <a:latin typeface="Arial" pitchFamily="34" charset="0"/>
+                <a:ea typeface="Arial" pitchFamily="34" charset="-122"/>
+                <a:cs typeface="Arial" pitchFamily="34" charset="-120"/>
+              </a:rPr>
+              <a:t> (the day after </a:t>
+            </a:r>
+            <a:pPr algn="l" indent="0" marL="0">
+              <a:lnSpc>
+                <a:spcPts val="1620"/>
+              </a:lnSpc>
+              <a:spcAft>
+                <a:spcPts val="300"/>
+              </a:spcAft>
+              <a:buNone/>
+            </a:pPr>
+            <a:r>
+              <a:rPr lang="en-US" sz="1200" i="1" dirty="0">
+                <a:solidFill>
+                  <a:srgbClr val="1C2833"/>
+                </a:solidFill>
+                <a:latin typeface="Arial" pitchFamily="34" charset="0"/>
+                <a:ea typeface="Arial" pitchFamily="34" charset="-122"/>
+                <a:cs typeface="Arial" pitchFamily="34" charset="-120"/>
+              </a:rPr>
+              <a:t>pūrṇimā</a:t>
+            </a:r>
+            <a:pPr algn="l" indent="0" marL="0">
+              <a:lnSpc>
+                <a:spcPts val="1620"/>
+              </a:lnSpc>
+              <a:spcAft>
+                <a:spcPts val="300"/>
+              </a:spcAft>
+              <a:buNone/>
+            </a:pPr>
+            <a:r>
+              <a:rPr lang="en-US" sz="1200" dirty="0">
+                <a:solidFill>
+                  <a:srgbClr val="1C2833"/>
+                </a:solidFill>
+                <a:latin typeface="Arial" pitchFamily="34" charset="0"/>
+                <a:ea typeface="Arial" pitchFamily="34" charset="-122"/>
+                <a:cs typeface="Arial" pitchFamily="34" charset="-120"/>
+              </a:rPr>
+              <a:t>)</a:t>
+            </a:r>
+            <a:endParaRPr lang="en-US" sz="1200" dirty="0"/>
+          </a:p>
+          <a:p>
+            <a:pPr algn="l" marL="342900" indent="-342900">
+              <a:lnSpc>
+                <a:spcPts val="1620"/>
+              </a:lnSpc>
+              <a:spcAft>
+                <a:spcPts val="300"/>
+              </a:spcAft>
+              <a:buSzPct val="100000"/>
+              <a:buChar char="•"/>
+            </a:pPr>
+            <a:r>
+              <a:rPr lang="en-US" sz="1200" dirty="0">
+                <a:solidFill>
+                  <a:srgbClr val="1C2833"/>
+                </a:solidFill>
+                <a:latin typeface="Arial" pitchFamily="34" charset="0"/>
+                <a:ea typeface="Arial" pitchFamily="34" charset="-122"/>
+                <a:cs typeface="Arial" pitchFamily="34" charset="-120"/>
+              </a:rPr>
+              <a:t>A </a:t>
+            </a:r>
+            <a:pPr algn="l" indent="0" marL="0">
+              <a:lnSpc>
+                <a:spcPts val="1620"/>
+              </a:lnSpc>
+              <a:spcAft>
+                <a:spcPts val="300"/>
+              </a:spcAft>
+              <a:buNone/>
+            </a:pPr>
+            <a:r>
+              <a:rPr lang="en-US" sz="1200" i="1" dirty="0">
+                <a:solidFill>
+                  <a:srgbClr val="1C2833"/>
+                </a:solidFill>
+                <a:latin typeface="Arial" pitchFamily="34" charset="0"/>
+                <a:ea typeface="Arial" pitchFamily="34" charset="-122"/>
+                <a:cs typeface="Arial" pitchFamily="34" charset="-120"/>
+              </a:rPr>
+              <a:t>kṛṣṇa amāvasyā</a:t>
+            </a:r>
+            <a:pPr algn="l" indent="0" marL="0">
+              <a:lnSpc>
+                <a:spcPts val="1620"/>
+              </a:lnSpc>
+              <a:spcAft>
+                <a:spcPts val="300"/>
+              </a:spcAft>
+              <a:buNone/>
+            </a:pPr>
+            <a:r>
+              <a:rPr lang="en-US" sz="1200" dirty="0">
+                <a:solidFill>
+                  <a:srgbClr val="1C2833"/>
+                </a:solidFill>
+                <a:latin typeface="Arial" pitchFamily="34" charset="0"/>
+                <a:ea typeface="Arial" pitchFamily="34" charset="-122"/>
+                <a:cs typeface="Arial" pitchFamily="34" charset="-120"/>
+              </a:rPr>
+              <a:t> (close to the end)</a:t>
+            </a:r>
+            <a:endParaRPr lang="en-US" sz="1200" dirty="0"/>
+          </a:p>
+          <a:p>
+            <a:pPr algn="l" marL="342900" indent="-342900">
+              <a:lnSpc>
+                <a:spcPts val="1620"/>
+              </a:lnSpc>
+              <a:spcAft>
+                <a:spcPts val="300"/>
+              </a:spcAft>
+              <a:buSzPct val="100000"/>
+              <a:buChar char="•"/>
+            </a:pPr>
+            <a:r>
+              <a:rPr lang="en-US" sz="1200" dirty="0">
+                <a:solidFill>
+                  <a:srgbClr val="1C2833"/>
+                </a:solidFill>
+                <a:latin typeface="Arial" pitchFamily="34" charset="0"/>
+                <a:ea typeface="Arial" pitchFamily="34" charset="-122"/>
+                <a:cs typeface="Arial" pitchFamily="34" charset="-120"/>
+              </a:rPr>
+              <a:t>28–31 dated tithis (because of </a:t>
+            </a:r>
+            <a:pPr algn="l" indent="0" marL="0">
+              <a:lnSpc>
+                <a:spcPts val="1620"/>
+              </a:lnSpc>
+              <a:spcAft>
+                <a:spcPts val="300"/>
+              </a:spcAft>
+              <a:buNone/>
+            </a:pPr>
+            <a:r>
+              <a:rPr lang="en-US" sz="1200" i="1" dirty="0">
+                <a:solidFill>
+                  <a:srgbClr val="1C2833"/>
+                </a:solidFill>
+                <a:latin typeface="Arial" pitchFamily="34" charset="0"/>
+                <a:ea typeface="Arial" pitchFamily="34" charset="-122"/>
+                <a:cs typeface="Arial" pitchFamily="34" charset="-120"/>
               </a:rPr>
               <a:t>kṣaya</a:t>
             </a:r>
             <a:pPr algn="l" indent="0" marL="0">
               <a:lnSpc>
-                <a:spcPts val="1820"/>
-              </a:lnSpc>
-              <a:spcBef>
-                <a:spcPts val="300"/>
-              </a:spcBef>
-              <a:spcAft>
-                <a:spcPts val="300"/>
-              </a:spcAft>
-              <a:buNone/>
-            </a:pPr>
-            <a:r>
-              <a:rPr lang="en-US" sz="1300" dirty="0">
-                <a:solidFill>
-                  <a:srgbClr val="1C2833"/>
-                </a:solidFill>
-                <a:latin typeface="Georgia" pitchFamily="34" charset="0"/>
-                <a:ea typeface="Georgia" pitchFamily="34" charset="-122"/>
-                <a:cs typeface="Georgia" pitchFamily="34" charset="-120"/>
-              </a:rPr>
-              <a:t> (skipped) or </a:t>
-            </a:r>
-            <a:pPr algn="l" indent="0" marL="0">
-              <a:lnSpc>
-                <a:spcPts val="1820"/>
-              </a:lnSpc>
-              <a:spcBef>
-                <a:spcPts val="300"/>
-              </a:spcBef>
-              <a:spcAft>
-                <a:spcPts val="300"/>
-              </a:spcAft>
-              <a:buNone/>
-            </a:pPr>
-            <a:r>
-              <a:rPr lang="en-US" sz="1300" i="1" dirty="0">
-                <a:solidFill>
-                  <a:srgbClr val="1C2833"/>
-                </a:solidFill>
-                <a:latin typeface="Georgia" pitchFamily="34" charset="0"/>
-                <a:ea typeface="Georgia" pitchFamily="34" charset="-122"/>
-                <a:cs typeface="Georgia" pitchFamily="34" charset="-120"/>
+                <a:spcPts val="1620"/>
+              </a:lnSpc>
+              <a:spcAft>
+                <a:spcPts val="300"/>
+              </a:spcAft>
+              <a:buNone/>
+            </a:pPr>
+            <a:r>
+              <a:rPr lang="en-US" sz="1200" dirty="0">
+                <a:solidFill>
+                  <a:srgbClr val="1C2833"/>
+                </a:solidFill>
+                <a:latin typeface="Arial" pitchFamily="34" charset="0"/>
+                <a:ea typeface="Arial" pitchFamily="34" charset="-122"/>
+                <a:cs typeface="Arial" pitchFamily="34" charset="-120"/>
+              </a:rPr>
+              <a:t> / </a:t>
+            </a:r>
+            <a:pPr algn="l" indent="0" marL="0">
+              <a:lnSpc>
+                <a:spcPts val="1620"/>
+              </a:lnSpc>
+              <a:spcAft>
+                <a:spcPts val="300"/>
+              </a:spcAft>
+              <a:buNone/>
+            </a:pPr>
+            <a:r>
+              <a:rPr lang="en-US" sz="1200" i="1" dirty="0">
+                <a:solidFill>
+                  <a:srgbClr val="1C2833"/>
+                </a:solidFill>
+                <a:latin typeface="Arial" pitchFamily="34" charset="0"/>
+                <a:ea typeface="Arial" pitchFamily="34" charset="-122"/>
+                <a:cs typeface="Arial" pitchFamily="34" charset="-120"/>
               </a:rPr>
               <a:t>vṛddhi</a:t>
             </a:r>
             <a:pPr algn="l" indent="0" marL="0">
               <a:lnSpc>
-                <a:spcPts val="1820"/>
-              </a:lnSpc>
-              <a:spcBef>
-                <a:spcPts val="300"/>
-              </a:spcBef>
-              <a:spcAft>
-                <a:spcPts val="300"/>
-              </a:spcAft>
-              <a:buNone/>
-            </a:pPr>
-            <a:r>
-              <a:rPr lang="en-US" sz="1300" dirty="0">
-                <a:solidFill>
-                  <a:srgbClr val="1C2833"/>
-                </a:solidFill>
-                <a:latin typeface="Georgia" pitchFamily="34" charset="0"/>
-                <a:ea typeface="Georgia" pitchFamily="34" charset="-122"/>
-                <a:cs typeface="Georgia" pitchFamily="34" charset="-120"/>
-              </a:rPr>
-              <a:t> (spanning two days). Note them; they are the system working as designed.</a:t>
-            </a:r>
-            <a:endParaRPr lang="en-US" sz="1300" dirty="0"/>
-          </a:p>
-        </p:txBody>
-      </p:sp>
-      <p:sp>
-        <p:nvSpPr>
-          <p:cNvPr id="9" name="Text 7"/>
+                <a:spcPts val="1620"/>
+              </a:lnSpc>
+              <a:spcAft>
+                <a:spcPts val="300"/>
+              </a:spcAft>
+              <a:buNone/>
+            </a:pPr>
+            <a:r>
+              <a:rPr lang="en-US" sz="1200" dirty="0">
+                <a:solidFill>
+                  <a:srgbClr val="1C2833"/>
+                </a:solidFill>
+                <a:latin typeface="Arial" pitchFamily="34" charset="0"/>
+                <a:ea typeface="Arial" pitchFamily="34" charset="-122"/>
+                <a:cs typeface="Arial" pitchFamily="34" charset="-120"/>
+              </a:rPr>
+              <a:t> — see Day 3)</a:t>
+            </a:r>
+            <a:endParaRPr lang="en-US" sz="1200" dirty="0"/>
+          </a:p>
+        </p:txBody>
+      </p:sp>
+      <p:sp>
+        <p:nvSpPr>
+          <p:cNvPr id="6" name="Text 4"/>
           <p:cNvSpPr/>
           <p:nvPr/>
         </p:nvSpPr>
